--- a/exports/pptx/lessons/middle-module-13-indic-ecology/day-03-rivers-sacred.pptx
+++ b/exports/pptx/lessons/middle-module-13-indic-ecology/day-03-rivers-sacred.pptx
@@ -18,9 +18,15 @@
     <p:sldId id="266" r:id="rId12"/>
     <p:sldId id="267" r:id="rId13"/>
     <p:sldId id="268" r:id="rId14"/>
+    <p:sldId id="269" r:id="rId15"/>
+    <p:sldId id="270" r:id="rId16"/>
+    <p:sldId id="271" r:id="rId17"/>
+    <p:sldId id="272" r:id="rId18"/>
+    <p:sldId id="273" r:id="rId19"/>
+    <p:sldId id="274" r:id="rId20"/>
   </p:sldIdLst>
   <p:notesMasterIdLst>
-    <p:notesMasterId r:id="rId15"/>
+    <p:notesMasterId r:id="rId21"/>
   </p:notesMasterIdLst>
   <p:sldSz cx="9144000" cy="5143500"/>
   <p:notesSz cx="5143500" cy="9144000"/>
@@ -890,6 +896,534 @@
             <a:fld id="{F7021451-1387-4CA6-816F-3879F97B5CBC}" type="slidenum">
               <a:rPr lang="en-US"/>
               <a:t>13</a:t>
+            </a:fld>
+            <a:endParaRPr lang="en-US"/>
+          </a:p>
+        </p:txBody>
+      </p:sp>
+    </p:spTree>
+    <p:extLst>
+      <p:ext uri="{BB962C8B-B14F-4D97-AF65-F5344CB8AC3E}">
+        <p14:creationId xmlns:p14="http://schemas.microsoft.com/office/powerpoint/2010/main" val="1024086991"/>
+      </p:ext>
+    </p:extLst>
+  </p:cSld>
+  <p:clrMapOvr>
+    <a:masterClrMapping/>
+  </p:clrMapOvr>
+</p:notes>
+</file>
+
+<file path=ppt/notesSlides/notesSlide14.xml><?xml version="1.0" encoding="utf-8"?>
+<p:notes xmlns:a="http://schemas.openxmlformats.org/drawingml/2006/main" xmlns:r="http://schemas.openxmlformats.org/officeDocument/2006/relationships" xmlns:p="http://schemas.openxmlformats.org/presentationml/2006/main">
+  <p:cSld>
+    <p:spTree>
+      <p:nvGrpSpPr>
+        <p:cNvPr id="1" name=""/>
+        <p:cNvGrpSpPr/>
+        <p:nvPr/>
+      </p:nvGrpSpPr>
+      <p:grpSpPr>
+        <a:xfrm>
+          <a:off x="0" y="0"/>
+          <a:ext cx="0" cy="0"/>
+          <a:chOff x="0" y="0"/>
+          <a:chExt cx="0" cy="0"/>
+        </a:xfrm>
+      </p:grpSpPr>
+      <p:sp>
+        <p:nvSpPr>
+          <p:cNvPr id="2" name="Slide Image Placeholder 1"/>
+          <p:cNvSpPr>
+            <a:spLocks noGrp="1" noRot="1" noChangeAspect="1"/>
+          </p:cNvSpPr>
+          <p:nvPr>
+            <p:ph type="sldImg"/>
+          </p:nvPr>
+        </p:nvSpPr>
+        <p:spPr/>
+      </p:sp>
+      <p:sp>
+        <p:nvSpPr>
+          <p:cNvPr id="3" name="Notes Placeholder 2"/>
+          <p:cNvSpPr>
+            <a:spLocks noGrp="1"/>
+          </p:cNvSpPr>
+          <p:nvPr>
+            <p:ph type="body" idx="1"/>
+          </p:nvPr>
+        </p:nvSpPr>
+        <p:spPr/>
+        <p:txBody>
+          <a:bodyPr/>
+          <a:lstStyle/>
+          <a:p>
+            <a:r>
+              <a:rPr lang="en-US" dirty="0"/>
+              <a:t/>
+            </a:r>
+            <a:endParaRPr lang="en-US" dirty="0"/>
+          </a:p>
+        </p:txBody>
+      </p:sp>
+      <p:sp>
+        <p:nvSpPr>
+          <p:cNvPr id="4" name="Slide Number Placeholder 3"/>
+          <p:cNvSpPr>
+            <a:spLocks noGrp="1"/>
+          </p:cNvSpPr>
+          <p:nvPr>
+            <p:ph type="sldNum" sz="quarter" idx="10"/>
+          </p:nvPr>
+        </p:nvSpPr>
+        <p:spPr/>
+        <p:txBody>
+          <a:bodyPr/>
+          <a:lstStyle/>
+          <a:p>
+            <a:fld id="{F7021451-1387-4CA6-816F-3879F97B5CBC}" type="slidenum">
+              <a:rPr lang="en-US"/>
+              <a:t>14</a:t>
+            </a:fld>
+            <a:endParaRPr lang="en-US"/>
+          </a:p>
+        </p:txBody>
+      </p:sp>
+    </p:spTree>
+    <p:extLst>
+      <p:ext uri="{BB962C8B-B14F-4D97-AF65-F5344CB8AC3E}">
+        <p14:creationId xmlns:p14="http://schemas.microsoft.com/office/powerpoint/2010/main" val="1024086991"/>
+      </p:ext>
+    </p:extLst>
+  </p:cSld>
+  <p:clrMapOvr>
+    <a:masterClrMapping/>
+  </p:clrMapOvr>
+</p:notes>
+</file>
+
+<file path=ppt/notesSlides/notesSlide15.xml><?xml version="1.0" encoding="utf-8"?>
+<p:notes xmlns:a="http://schemas.openxmlformats.org/drawingml/2006/main" xmlns:r="http://schemas.openxmlformats.org/officeDocument/2006/relationships" xmlns:p="http://schemas.openxmlformats.org/presentationml/2006/main">
+  <p:cSld>
+    <p:spTree>
+      <p:nvGrpSpPr>
+        <p:cNvPr id="1" name=""/>
+        <p:cNvGrpSpPr/>
+        <p:nvPr/>
+      </p:nvGrpSpPr>
+      <p:grpSpPr>
+        <a:xfrm>
+          <a:off x="0" y="0"/>
+          <a:ext cx="0" cy="0"/>
+          <a:chOff x="0" y="0"/>
+          <a:chExt cx="0" cy="0"/>
+        </a:xfrm>
+      </p:grpSpPr>
+      <p:sp>
+        <p:nvSpPr>
+          <p:cNvPr id="2" name="Slide Image Placeholder 1"/>
+          <p:cNvSpPr>
+            <a:spLocks noGrp="1" noRot="1" noChangeAspect="1"/>
+          </p:cNvSpPr>
+          <p:nvPr>
+            <p:ph type="sldImg"/>
+          </p:nvPr>
+        </p:nvSpPr>
+        <p:spPr/>
+      </p:sp>
+      <p:sp>
+        <p:nvSpPr>
+          <p:cNvPr id="3" name="Notes Placeholder 2"/>
+          <p:cNvSpPr>
+            <a:spLocks noGrp="1"/>
+          </p:cNvSpPr>
+          <p:nvPr>
+            <p:ph type="body" idx="1"/>
+          </p:nvPr>
+        </p:nvSpPr>
+        <p:spPr/>
+        <p:txBody>
+          <a:bodyPr/>
+          <a:lstStyle/>
+          <a:p>
+            <a:r>
+              <a:rPr lang="en-US" dirty="0"/>
+              <a:t/>
+            </a:r>
+            <a:endParaRPr lang="en-US" dirty="0"/>
+          </a:p>
+        </p:txBody>
+      </p:sp>
+      <p:sp>
+        <p:nvSpPr>
+          <p:cNvPr id="4" name="Slide Number Placeholder 3"/>
+          <p:cNvSpPr>
+            <a:spLocks noGrp="1"/>
+          </p:cNvSpPr>
+          <p:nvPr>
+            <p:ph type="sldNum" sz="quarter" idx="10"/>
+          </p:nvPr>
+        </p:nvSpPr>
+        <p:spPr/>
+        <p:txBody>
+          <a:bodyPr/>
+          <a:lstStyle/>
+          <a:p>
+            <a:fld id="{F7021451-1387-4CA6-816F-3879F97B5CBC}" type="slidenum">
+              <a:rPr lang="en-US"/>
+              <a:t>15</a:t>
+            </a:fld>
+            <a:endParaRPr lang="en-US"/>
+          </a:p>
+        </p:txBody>
+      </p:sp>
+    </p:spTree>
+    <p:extLst>
+      <p:ext uri="{BB962C8B-B14F-4D97-AF65-F5344CB8AC3E}">
+        <p14:creationId xmlns:p14="http://schemas.microsoft.com/office/powerpoint/2010/main" val="1024086991"/>
+      </p:ext>
+    </p:extLst>
+  </p:cSld>
+  <p:clrMapOvr>
+    <a:masterClrMapping/>
+  </p:clrMapOvr>
+</p:notes>
+</file>
+
+<file path=ppt/notesSlides/notesSlide16.xml><?xml version="1.0" encoding="utf-8"?>
+<p:notes xmlns:a="http://schemas.openxmlformats.org/drawingml/2006/main" xmlns:r="http://schemas.openxmlformats.org/officeDocument/2006/relationships" xmlns:p="http://schemas.openxmlformats.org/presentationml/2006/main">
+  <p:cSld>
+    <p:spTree>
+      <p:nvGrpSpPr>
+        <p:cNvPr id="1" name=""/>
+        <p:cNvGrpSpPr/>
+        <p:nvPr/>
+      </p:nvGrpSpPr>
+      <p:grpSpPr>
+        <a:xfrm>
+          <a:off x="0" y="0"/>
+          <a:ext cx="0" cy="0"/>
+          <a:chOff x="0" y="0"/>
+          <a:chExt cx="0" cy="0"/>
+        </a:xfrm>
+      </p:grpSpPr>
+      <p:sp>
+        <p:nvSpPr>
+          <p:cNvPr id="2" name="Slide Image Placeholder 1"/>
+          <p:cNvSpPr>
+            <a:spLocks noGrp="1" noRot="1" noChangeAspect="1"/>
+          </p:cNvSpPr>
+          <p:nvPr>
+            <p:ph type="sldImg"/>
+          </p:nvPr>
+        </p:nvSpPr>
+        <p:spPr/>
+      </p:sp>
+      <p:sp>
+        <p:nvSpPr>
+          <p:cNvPr id="3" name="Notes Placeholder 2"/>
+          <p:cNvSpPr>
+            <a:spLocks noGrp="1"/>
+          </p:cNvSpPr>
+          <p:nvPr>
+            <p:ph type="body" idx="1"/>
+          </p:nvPr>
+        </p:nvSpPr>
+        <p:spPr/>
+        <p:txBody>
+          <a:bodyPr/>
+          <a:lstStyle/>
+          <a:p>
+            <a:r>
+              <a:rPr lang="en-US" dirty="0"/>
+              <a:t/>
+            </a:r>
+            <a:endParaRPr lang="en-US" dirty="0"/>
+          </a:p>
+        </p:txBody>
+      </p:sp>
+      <p:sp>
+        <p:nvSpPr>
+          <p:cNvPr id="4" name="Slide Number Placeholder 3"/>
+          <p:cNvSpPr>
+            <a:spLocks noGrp="1"/>
+          </p:cNvSpPr>
+          <p:nvPr>
+            <p:ph type="sldNum" sz="quarter" idx="10"/>
+          </p:nvPr>
+        </p:nvSpPr>
+        <p:spPr/>
+        <p:txBody>
+          <a:bodyPr/>
+          <a:lstStyle/>
+          <a:p>
+            <a:fld id="{F7021451-1387-4CA6-816F-3879F97B5CBC}" type="slidenum">
+              <a:rPr lang="en-US"/>
+              <a:t>16</a:t>
+            </a:fld>
+            <a:endParaRPr lang="en-US"/>
+          </a:p>
+        </p:txBody>
+      </p:sp>
+    </p:spTree>
+    <p:extLst>
+      <p:ext uri="{BB962C8B-B14F-4D97-AF65-F5344CB8AC3E}">
+        <p14:creationId xmlns:p14="http://schemas.microsoft.com/office/powerpoint/2010/main" val="1024086991"/>
+      </p:ext>
+    </p:extLst>
+  </p:cSld>
+  <p:clrMapOvr>
+    <a:masterClrMapping/>
+  </p:clrMapOvr>
+</p:notes>
+</file>
+
+<file path=ppt/notesSlides/notesSlide17.xml><?xml version="1.0" encoding="utf-8"?>
+<p:notes xmlns:a="http://schemas.openxmlformats.org/drawingml/2006/main" xmlns:r="http://schemas.openxmlformats.org/officeDocument/2006/relationships" xmlns:p="http://schemas.openxmlformats.org/presentationml/2006/main">
+  <p:cSld>
+    <p:spTree>
+      <p:nvGrpSpPr>
+        <p:cNvPr id="1" name=""/>
+        <p:cNvGrpSpPr/>
+        <p:nvPr/>
+      </p:nvGrpSpPr>
+      <p:grpSpPr>
+        <a:xfrm>
+          <a:off x="0" y="0"/>
+          <a:ext cx="0" cy="0"/>
+          <a:chOff x="0" y="0"/>
+          <a:chExt cx="0" cy="0"/>
+        </a:xfrm>
+      </p:grpSpPr>
+      <p:sp>
+        <p:nvSpPr>
+          <p:cNvPr id="2" name="Slide Image Placeholder 1"/>
+          <p:cNvSpPr>
+            <a:spLocks noGrp="1" noRot="1" noChangeAspect="1"/>
+          </p:cNvSpPr>
+          <p:nvPr>
+            <p:ph type="sldImg"/>
+          </p:nvPr>
+        </p:nvSpPr>
+        <p:spPr/>
+      </p:sp>
+      <p:sp>
+        <p:nvSpPr>
+          <p:cNvPr id="3" name="Notes Placeholder 2"/>
+          <p:cNvSpPr>
+            <a:spLocks noGrp="1"/>
+          </p:cNvSpPr>
+          <p:nvPr>
+            <p:ph type="body" idx="1"/>
+          </p:nvPr>
+        </p:nvSpPr>
+        <p:spPr/>
+        <p:txBody>
+          <a:bodyPr/>
+          <a:lstStyle/>
+          <a:p>
+            <a:r>
+              <a:rPr lang="en-US" dirty="0"/>
+              <a:t/>
+            </a:r>
+            <a:endParaRPr lang="en-US" dirty="0"/>
+          </a:p>
+        </p:txBody>
+      </p:sp>
+      <p:sp>
+        <p:nvSpPr>
+          <p:cNvPr id="4" name="Slide Number Placeholder 3"/>
+          <p:cNvSpPr>
+            <a:spLocks noGrp="1"/>
+          </p:cNvSpPr>
+          <p:nvPr>
+            <p:ph type="sldNum" sz="quarter" idx="10"/>
+          </p:nvPr>
+        </p:nvSpPr>
+        <p:spPr/>
+        <p:txBody>
+          <a:bodyPr/>
+          <a:lstStyle/>
+          <a:p>
+            <a:fld id="{F7021451-1387-4CA6-816F-3879F97B5CBC}" type="slidenum">
+              <a:rPr lang="en-US"/>
+              <a:t>17</a:t>
+            </a:fld>
+            <a:endParaRPr lang="en-US"/>
+          </a:p>
+        </p:txBody>
+      </p:sp>
+    </p:spTree>
+    <p:extLst>
+      <p:ext uri="{BB962C8B-B14F-4D97-AF65-F5344CB8AC3E}">
+        <p14:creationId xmlns:p14="http://schemas.microsoft.com/office/powerpoint/2010/main" val="1024086991"/>
+      </p:ext>
+    </p:extLst>
+  </p:cSld>
+  <p:clrMapOvr>
+    <a:masterClrMapping/>
+  </p:clrMapOvr>
+</p:notes>
+</file>
+
+<file path=ppt/notesSlides/notesSlide18.xml><?xml version="1.0" encoding="utf-8"?>
+<p:notes xmlns:a="http://schemas.openxmlformats.org/drawingml/2006/main" xmlns:r="http://schemas.openxmlformats.org/officeDocument/2006/relationships" xmlns:p="http://schemas.openxmlformats.org/presentationml/2006/main">
+  <p:cSld>
+    <p:spTree>
+      <p:nvGrpSpPr>
+        <p:cNvPr id="1" name=""/>
+        <p:cNvGrpSpPr/>
+        <p:nvPr/>
+      </p:nvGrpSpPr>
+      <p:grpSpPr>
+        <a:xfrm>
+          <a:off x="0" y="0"/>
+          <a:ext cx="0" cy="0"/>
+          <a:chOff x="0" y="0"/>
+          <a:chExt cx="0" cy="0"/>
+        </a:xfrm>
+      </p:grpSpPr>
+      <p:sp>
+        <p:nvSpPr>
+          <p:cNvPr id="2" name="Slide Image Placeholder 1"/>
+          <p:cNvSpPr>
+            <a:spLocks noGrp="1" noRot="1" noChangeAspect="1"/>
+          </p:cNvSpPr>
+          <p:nvPr>
+            <p:ph type="sldImg"/>
+          </p:nvPr>
+        </p:nvSpPr>
+        <p:spPr/>
+      </p:sp>
+      <p:sp>
+        <p:nvSpPr>
+          <p:cNvPr id="3" name="Notes Placeholder 2"/>
+          <p:cNvSpPr>
+            <a:spLocks noGrp="1"/>
+          </p:cNvSpPr>
+          <p:nvPr>
+            <p:ph type="body" idx="1"/>
+          </p:nvPr>
+        </p:nvSpPr>
+        <p:spPr/>
+        <p:txBody>
+          <a:bodyPr/>
+          <a:lstStyle/>
+          <a:p>
+            <a:r>
+              <a:rPr lang="en-US" dirty="0"/>
+              <a:t/>
+            </a:r>
+            <a:endParaRPr lang="en-US" dirty="0"/>
+          </a:p>
+        </p:txBody>
+      </p:sp>
+      <p:sp>
+        <p:nvSpPr>
+          <p:cNvPr id="4" name="Slide Number Placeholder 3"/>
+          <p:cNvSpPr>
+            <a:spLocks noGrp="1"/>
+          </p:cNvSpPr>
+          <p:nvPr>
+            <p:ph type="sldNum" sz="quarter" idx="10"/>
+          </p:nvPr>
+        </p:nvSpPr>
+        <p:spPr/>
+        <p:txBody>
+          <a:bodyPr/>
+          <a:lstStyle/>
+          <a:p>
+            <a:fld id="{F7021451-1387-4CA6-816F-3879F97B5CBC}" type="slidenum">
+              <a:rPr lang="en-US"/>
+              <a:t>18</a:t>
+            </a:fld>
+            <a:endParaRPr lang="en-US"/>
+          </a:p>
+        </p:txBody>
+      </p:sp>
+    </p:spTree>
+    <p:extLst>
+      <p:ext uri="{BB962C8B-B14F-4D97-AF65-F5344CB8AC3E}">
+        <p14:creationId xmlns:p14="http://schemas.microsoft.com/office/powerpoint/2010/main" val="1024086991"/>
+      </p:ext>
+    </p:extLst>
+  </p:cSld>
+  <p:clrMapOvr>
+    <a:masterClrMapping/>
+  </p:clrMapOvr>
+</p:notes>
+</file>
+
+<file path=ppt/notesSlides/notesSlide19.xml><?xml version="1.0" encoding="utf-8"?>
+<p:notes xmlns:a="http://schemas.openxmlformats.org/drawingml/2006/main" xmlns:r="http://schemas.openxmlformats.org/officeDocument/2006/relationships" xmlns:p="http://schemas.openxmlformats.org/presentationml/2006/main">
+  <p:cSld>
+    <p:spTree>
+      <p:nvGrpSpPr>
+        <p:cNvPr id="1" name=""/>
+        <p:cNvGrpSpPr/>
+        <p:nvPr/>
+      </p:nvGrpSpPr>
+      <p:grpSpPr>
+        <a:xfrm>
+          <a:off x="0" y="0"/>
+          <a:ext cx="0" cy="0"/>
+          <a:chOff x="0" y="0"/>
+          <a:chExt cx="0" cy="0"/>
+        </a:xfrm>
+      </p:grpSpPr>
+      <p:sp>
+        <p:nvSpPr>
+          <p:cNvPr id="2" name="Slide Image Placeholder 1"/>
+          <p:cNvSpPr>
+            <a:spLocks noGrp="1" noRot="1" noChangeAspect="1"/>
+          </p:cNvSpPr>
+          <p:nvPr>
+            <p:ph type="sldImg"/>
+          </p:nvPr>
+        </p:nvSpPr>
+        <p:spPr/>
+      </p:sp>
+      <p:sp>
+        <p:nvSpPr>
+          <p:cNvPr id="3" name="Notes Placeholder 2"/>
+          <p:cNvSpPr>
+            <a:spLocks noGrp="1"/>
+          </p:cNvSpPr>
+          <p:nvPr>
+            <p:ph type="body" idx="1"/>
+          </p:nvPr>
+        </p:nvSpPr>
+        <p:spPr/>
+        <p:txBody>
+          <a:bodyPr/>
+          <a:lstStyle/>
+          <a:p>
+            <a:r>
+              <a:rPr lang="en-US" dirty="0"/>
+              <a:t/>
+            </a:r>
+            <a:endParaRPr lang="en-US" dirty="0"/>
+          </a:p>
+        </p:txBody>
+      </p:sp>
+      <p:sp>
+        <p:nvSpPr>
+          <p:cNvPr id="4" name="Slide Number Placeholder 3"/>
+          <p:cNvSpPr>
+            <a:spLocks noGrp="1"/>
+          </p:cNvSpPr>
+          <p:nvPr>
+            <p:ph type="sldNum" sz="quarter" idx="10"/>
+          </p:nvPr>
+        </p:nvSpPr>
+        <p:spPr/>
+        <p:txBody>
+          <a:bodyPr/>
+          <a:lstStyle/>
+          <a:p>
+            <a:fld id="{F7021451-1387-4CA6-816F-3879F97B5CBC}" type="slidenum">
+              <a:rPr lang="en-US"/>
+              <a:t>19</a:t>
             </a:fld>
             <a:endParaRPr lang="en-US"/>
           </a:p>
@@ -2189,102 +2723,6 @@
         </p:nvSpPr>
         <p:spPr>
           <a:xfrm>
-            <a:off x="406301" y="1223963"/>
-            <a:ext cx="8498026" cy="274290"/>
-          </a:xfrm>
-          <a:prstGeom prst="rect">
-            <a:avLst/>
-          </a:prstGeom>
-          <a:noFill/>
-          <a:ln/>
-        </p:spPr>
-        <p:txBody>
-          <a:bodyPr wrap="square" lIns="0" tIns="0" rIns="0" bIns="0" rtlCol="0" anchor="t"/>
-          <a:lstStyle/>
-          <a:p>
-            <a:pPr algn="l" indent="0" marL="0">
-              <a:lnSpc>
-                <a:spcPts val="2160"/>
-              </a:lnSpc>
-              <a:spcBef>
-                <a:spcPts val="600"/>
-              </a:spcBef>
-              <a:spcAft>
-                <a:spcPts val="800"/>
-              </a:spcAft>
-              <a:buNone/>
-            </a:pPr>
-            <a:r>
-              <a:rPr lang="en-US" sz="1800" b="1" dirty="0">
-                <a:solidFill>
-                  <a:srgbClr val="FE4447"/>
-                </a:solidFill>
-                <a:latin typeface="Georgia" pitchFamily="34" charset="0"/>
-                <a:ea typeface="Georgia" pitchFamily="34" charset="-122"/>
-                <a:cs typeface="Georgia" pitchFamily="34" charset="-120"/>
-              </a:rPr>
-              <a:t>Learning objective</a:t>
-            </a:r>
-            <a:endParaRPr lang="en-US" sz="1800" dirty="0"/>
-          </a:p>
-        </p:txBody>
-      </p:sp>
-      <p:sp>
-        <p:nvSpPr>
-          <p:cNvPr id="6" name="Text 4"/>
-          <p:cNvSpPr/>
-          <p:nvPr/>
-        </p:nvSpPr>
-        <p:spPr>
-          <a:xfrm>
-            <a:off x="406301" y="1637854"/>
-            <a:ext cx="8498026" cy="426541"/>
-          </a:xfrm>
-          <a:prstGeom prst="rect">
-            <a:avLst/>
-          </a:prstGeom>
-          <a:noFill/>
-          <a:ln/>
-        </p:spPr>
-        <p:txBody>
-          <a:bodyPr wrap="square" lIns="0" tIns="0" rIns="0" bIns="0" rtlCol="0" anchor="t"/>
-          <a:lstStyle/>
-          <a:p>
-            <a:pPr algn="l" indent="0" marL="0">
-              <a:lnSpc>
-                <a:spcPts val="1680"/>
-              </a:lnSpc>
-              <a:spcBef>
-                <a:spcPts val="300"/>
-              </a:spcBef>
-              <a:spcAft>
-                <a:spcPts val="300"/>
-              </a:spcAft>
-              <a:buNone/>
-            </a:pPr>
-            <a:r>
-              <a:rPr lang="en-US" sz="1200" dirty="0">
-                <a:solidFill>
-                  <a:srgbClr val="1C2833"/>
-                </a:solidFill>
-                <a:latin typeface="Arial" pitchFamily="34" charset="0"/>
-                <a:ea typeface="Arial" pitchFamily="34" charset="-122"/>
-                <a:cs typeface="Arial" pitchFamily="34" charset="-120"/>
-              </a:rPr>
-              <a:t>Students explain how treating a river as sacred functioned (sometimes well, sometimes poorly) as a method of protection in the Indic tradition, name the seven traditionally sacred rivers, and locate the nearest river to their own home.</a:t>
-            </a:r>
-            <a:endParaRPr lang="en-US" sz="1200" dirty="0"/>
-          </a:p>
-        </p:txBody>
-      </p:sp>
-      <p:sp>
-        <p:nvSpPr>
-          <p:cNvPr id="7" name="Text 5"/>
-          <p:cNvSpPr/>
-          <p:nvPr/>
-        </p:nvSpPr>
-        <p:spPr>
-          <a:xfrm>
             <a:off x="406301" y="4434929"/>
             <a:ext cx="8498026" cy="213271"/>
           </a:xfrm>
@@ -2429,7 +2867,7 @@
                 <a:ea typeface="Georgia" pitchFamily="34" charset="-122"/>
                 <a:cs typeface="Georgia" pitchFamily="34" charset="-120"/>
               </a:rPr>
-              <a:t>Homework</a:t>
+              <a:t>Core (20 min) (cont.)</a:t>
             </a:r>
             <a:endParaRPr lang="en-US" sz="1800" dirty="0"/>
           </a:p>
@@ -2443,8 +2881,8 @@
         </p:nvSpPr>
         <p:spPr>
           <a:xfrm>
-            <a:off x="406301" y="870942"/>
-            <a:ext cx="8498026" cy="426541"/>
+            <a:off x="634901" y="883593"/>
+            <a:ext cx="8102798" cy="898922"/>
           </a:xfrm>
           <a:prstGeom prst="rect">
             <a:avLst/>
@@ -2456,6 +2894,112 @@
           <a:bodyPr wrap="square" lIns="0" tIns="0" rIns="0" bIns="0" rtlCol="0" anchor="t"/>
           <a:lstStyle/>
           <a:p>
+            <a:pPr algn="l" marL="342900" indent="-342900">
+              <a:lnSpc>
+                <a:spcPts val="1620"/>
+              </a:lnSpc>
+              <a:spcAft>
+                <a:spcPts val="300"/>
+              </a:spcAft>
+              <a:buSzPct val="100000"/>
+              <a:buChar char="•"/>
+            </a:pPr>
+            <a:r>
+              <a:rPr lang="en-US" sz="1200" b="1" dirty="0">
+                <a:solidFill>
+                  <a:srgbClr val="1C2833"/>
+                </a:solidFill>
+                <a:latin typeface="Arial" pitchFamily="34" charset="0"/>
+                <a:ea typeface="Arial" pitchFamily="34" charset="-122"/>
+                <a:cs typeface="Arial" pitchFamily="34" charset="-120"/>
+              </a:rPr>
+              <a:t>Where the system worked and where it broke.</a:t>
+            </a:r>
+            <a:pPr algn="l" indent="0" marL="0">
+              <a:lnSpc>
+                <a:spcPts val="1620"/>
+              </a:lnSpc>
+              <a:spcAft>
+                <a:spcPts val="300"/>
+              </a:spcAft>
+              <a:buNone/>
+            </a:pPr>
+            <a:r>
+              <a:rPr lang="en-US" sz="1200" dirty="0">
+                <a:solidFill>
+                  <a:srgbClr val="1C2833"/>
+                </a:solidFill>
+                <a:latin typeface="Arial" pitchFamily="34" charset="0"/>
+                <a:ea typeface="Arial" pitchFamily="34" charset="-122"/>
+                <a:cs typeface="Arial" pitchFamily="34" charset="-120"/>
+              </a:rPr>
+              <a:t> Sacred-status protected upper-stretch rivers and small streams in many villages for centuries. It did </a:t>
+            </a:r>
+            <a:pPr algn="l" indent="0" marL="0">
+              <a:lnSpc>
+                <a:spcPts val="1620"/>
+              </a:lnSpc>
+              <a:spcAft>
+                <a:spcPts val="300"/>
+              </a:spcAft>
+              <a:buNone/>
+            </a:pPr>
+            <a:r>
+              <a:rPr lang="en-US" sz="1200" i="1" dirty="0">
+                <a:solidFill>
+                  <a:srgbClr val="1C2833"/>
+                </a:solidFill>
+                <a:latin typeface="Arial" pitchFamily="34" charset="0"/>
+                <a:ea typeface="Arial" pitchFamily="34" charset="-122"/>
+                <a:cs typeface="Arial" pitchFamily="34" charset="-120"/>
+              </a:rPr>
+              <a:t>not</a:t>
+            </a:r>
+            <a:pPr algn="l" indent="0" marL="0">
+              <a:lnSpc>
+                <a:spcPts val="1620"/>
+              </a:lnSpc>
+              <a:spcAft>
+                <a:spcPts val="300"/>
+              </a:spcAft>
+              <a:buNone/>
+            </a:pPr>
+            <a:r>
+              <a:rPr lang="en-US" sz="1200" dirty="0">
+                <a:solidFill>
+                  <a:srgbClr val="1C2833"/>
+                </a:solidFill>
+                <a:latin typeface="Arial" pitchFamily="34" charset="0"/>
+                <a:ea typeface="Arial" pitchFamily="34" charset="-122"/>
+                <a:cs typeface="Arial" pitchFamily="34" charset="-120"/>
+              </a:rPr>
+              <a:t> protect the urban stretches once cities grew, industry came, and population grew faster than the river could absorb. The Gaṅgā at Haridwar (upper) is still relatively clean; at Kanpur (urban industrial) it is among India's most polluted stretches.</a:t>
+            </a:r>
+            <a:endParaRPr lang="en-US" sz="1200" dirty="0"/>
+          </a:p>
+        </p:txBody>
+      </p:sp>
+      <p:sp>
+        <p:nvSpPr>
+          <p:cNvPr id="5" name="Text 3"/>
+          <p:cNvSpPr/>
+          <p:nvPr/>
+        </p:nvSpPr>
+        <p:spPr>
+          <a:xfrm>
+            <a:off x="406301" y="1871365"/>
+            <a:ext cx="8498026" cy="213271"/>
+          </a:xfrm>
+          <a:prstGeom prst="rect">
+            <a:avLst/>
+          </a:prstGeom>
+          <a:noFill/>
+          <a:ln/>
+        </p:spPr>
+        <p:txBody>
+          <a:bodyPr wrap="square" lIns="0" tIns="0" rIns="0" bIns="0" rtlCol="0" anchor="t"/>
+          <a:lstStyle/>
+          <a:p>
             <a:pPr algn="l" indent="0" marL="0">
               <a:lnSpc>
                 <a:spcPts val="1680"/>
@@ -2477,7 +3021,99 @@
                 <a:ea typeface="Arial" pitchFamily="34" charset="-122"/>
                 <a:cs typeface="Arial" pitchFamily="34" charset="-120"/>
               </a:rPr>
-              <a:t>– Find out one thing about your nearest river (or water body) that you didn't know yesterday. Examples: the river's name, where it starts, where it joins another river, whether it is monitored. Write 3 sentences.</a:t>
+              <a:t>This is the honest pattern: the tradition gave us a </a:t>
+            </a:r>
+            <a:pPr algn="l" indent="0" marL="0">
+              <a:lnSpc>
+                <a:spcPts val="1680"/>
+              </a:lnSpc>
+              <a:spcBef>
+                <a:spcPts val="300"/>
+              </a:spcBef>
+              <a:spcAft>
+                <a:spcPts val="300"/>
+              </a:spcAft>
+              <a:buNone/>
+            </a:pPr>
+            <a:r>
+              <a:rPr lang="en-US" sz="1200" i="1" dirty="0">
+                <a:solidFill>
+                  <a:srgbClr val="1C2833"/>
+                </a:solidFill>
+                <a:latin typeface="Arial" pitchFamily="34" charset="0"/>
+                <a:ea typeface="Arial" pitchFamily="34" charset="-122"/>
+                <a:cs typeface="Arial" pitchFamily="34" charset="-120"/>
+              </a:rPr>
+              <a:t>protective attitude</a:t>
+            </a:r>
+            <a:pPr algn="l" indent="0" marL="0">
+              <a:lnSpc>
+                <a:spcPts val="1680"/>
+              </a:lnSpc>
+              <a:spcBef>
+                <a:spcPts val="300"/>
+              </a:spcBef>
+              <a:spcAft>
+                <a:spcPts val="300"/>
+              </a:spcAft>
+              <a:buNone/>
+            </a:pPr>
+            <a:r>
+              <a:rPr lang="en-US" sz="1200" dirty="0">
+                <a:solidFill>
+                  <a:srgbClr val="1C2833"/>
+                </a:solidFill>
+                <a:latin typeface="Arial" pitchFamily="34" charset="0"/>
+                <a:ea typeface="Arial" pitchFamily="34" charset="-122"/>
+                <a:cs typeface="Arial" pitchFamily="34" charset="-120"/>
+              </a:rPr>
+              <a:t>, not a </a:t>
+            </a:r>
+            <a:pPr algn="l" indent="0" marL="0">
+              <a:lnSpc>
+                <a:spcPts val="1680"/>
+              </a:lnSpc>
+              <a:spcBef>
+                <a:spcPts val="300"/>
+              </a:spcBef>
+              <a:spcAft>
+                <a:spcPts val="300"/>
+              </a:spcAft>
+              <a:buNone/>
+            </a:pPr>
+            <a:r>
+              <a:rPr lang="en-US" sz="1200" i="1" dirty="0">
+                <a:solidFill>
+                  <a:srgbClr val="1C2833"/>
+                </a:solidFill>
+                <a:latin typeface="Arial" pitchFamily="34" charset="0"/>
+                <a:ea typeface="Arial" pitchFamily="34" charset="-122"/>
+                <a:cs typeface="Arial" pitchFamily="34" charset="-120"/>
+              </a:rPr>
+              <a:t>technical solution</a:t>
+            </a:r>
+            <a:pPr algn="l" indent="0" marL="0">
+              <a:lnSpc>
+                <a:spcPts val="1680"/>
+              </a:lnSpc>
+              <a:spcBef>
+                <a:spcPts val="300"/>
+              </a:spcBef>
+              <a:spcAft>
+                <a:spcPts val="300"/>
+              </a:spcAft>
+              <a:buNone/>
+            </a:pPr>
+            <a:r>
+              <a:rPr lang="en-US" sz="1200" dirty="0">
+                <a:solidFill>
+                  <a:srgbClr val="1C2833"/>
+                </a:solidFill>
+                <a:latin typeface="Arial" pitchFamily="34" charset="0"/>
+                <a:ea typeface="Arial" pitchFamily="34" charset="-122"/>
+                <a:cs typeface="Arial" pitchFamily="34" charset="-120"/>
+              </a:rPr>
+              <a:t>. Both are needed.</a:t>
             </a:r>
             <a:endParaRPr lang="en-US" sz="1200" dirty="0"/>
           </a:p>
@@ -2485,7 +3121,7 @@
       </p:sp>
       <p:sp>
         <p:nvSpPr>
-          <p:cNvPr id="5" name="Text 3"/>
+          <p:cNvPr id="6" name="Text 4"/>
           <p:cNvSpPr/>
           <p:nvPr/>
         </p:nvSpPr>
@@ -2635,7 +3271,7 @@
                 <a:ea typeface="Georgia" pitchFamily="34" charset="-122"/>
                 <a:cs typeface="Georgia" pitchFamily="34" charset="-120"/>
               </a:rPr>
-              <a:t>Differentiation</a:t>
+              <a:t>Core (20 min) (cont.)</a:t>
             </a:r>
             <a:endParaRPr lang="en-US" sz="1800" dirty="0"/>
           </a:p>
@@ -2650,7 +3286,7 @@
         <p:spPr>
           <a:xfrm>
             <a:off x="634901" y="883593"/>
-            <a:ext cx="8102798" cy="1142702"/>
+            <a:ext cx="8102798" cy="693241"/>
           </a:xfrm>
           <a:prstGeom prst="rect">
             <a:avLst/>
@@ -2681,7 +3317,7 @@
                 <a:ea typeface="Arial" pitchFamily="34" charset="-122"/>
                 <a:cs typeface="Arial" pitchFamily="34" charset="-120"/>
               </a:rPr>
-              <a:t>One tier up:</a:t>
+              <a:t>The contemporary state — quick numbers.</a:t>
             </a:r>
             <a:pPr algn="l" indent="0" marL="0">
               <a:lnSpc>
@@ -2701,131 +3337,7 @@
                 <a:ea typeface="Arial" pitchFamily="34" charset="-122"/>
                 <a:cs typeface="Arial" pitchFamily="34" charset="-120"/>
               </a:rPr>
-              <a:t> The Sarasvatī in the </a:t>
-            </a:r>
-            <a:pPr algn="l" indent="0" marL="0">
-              <a:lnSpc>
-                <a:spcPts val="1620"/>
-              </a:lnSpc>
-              <a:spcAft>
-                <a:spcPts val="300"/>
-              </a:spcAft>
-              <a:buNone/>
-            </a:pPr>
-            <a:r>
-              <a:rPr lang="en-US" sz="1200" i="1" dirty="0">
-                <a:solidFill>
-                  <a:srgbClr val="1C2833"/>
-                </a:solidFill>
-                <a:latin typeface="Arial" pitchFamily="34" charset="0"/>
-                <a:ea typeface="Arial" pitchFamily="34" charset="-122"/>
-                <a:cs typeface="Arial" pitchFamily="34" charset="-120"/>
-              </a:rPr>
-              <a:t>sapta-sindhu</a:t>
-            </a:r>
-            <a:pPr algn="l" indent="0" marL="0">
-              <a:lnSpc>
-                <a:spcPts val="1620"/>
-              </a:lnSpc>
-              <a:spcAft>
-                <a:spcPts val="300"/>
-              </a:spcAft>
-              <a:buNone/>
-            </a:pPr>
-            <a:r>
-              <a:rPr lang="en-US" sz="1200" dirty="0">
-                <a:solidFill>
-                  <a:srgbClr val="1C2833"/>
-                </a:solidFill>
-                <a:latin typeface="Arial" pitchFamily="34" charset="0"/>
-                <a:ea typeface="Arial" pitchFamily="34" charset="-122"/>
-                <a:cs typeface="Arial" pitchFamily="34" charset="-120"/>
-              </a:rPr>
-              <a:t> list is a "lost river" — the riverbed has been mapped by satellite (Ghaggar-Hakra system) but the river no longer flows. Look up one source on this and bring it tomorrow. What does it mean to call a </a:t>
-            </a:r>
-            <a:pPr algn="l" indent="0" marL="0">
-              <a:lnSpc>
-                <a:spcPts val="1620"/>
-              </a:lnSpc>
-              <a:spcAft>
-                <a:spcPts val="300"/>
-              </a:spcAft>
-              <a:buNone/>
-            </a:pPr>
-            <a:r>
-              <a:rPr lang="en-US" sz="1200" i="1" dirty="0">
-                <a:solidFill>
-                  <a:srgbClr val="1C2833"/>
-                </a:solidFill>
-                <a:latin typeface="Arial" pitchFamily="34" charset="0"/>
-                <a:ea typeface="Arial" pitchFamily="34" charset="-122"/>
-                <a:cs typeface="Arial" pitchFamily="34" charset="-120"/>
-              </a:rPr>
-              <a:t>dry riverbed</a:t>
-            </a:r>
-            <a:pPr algn="l" indent="0" marL="0">
-              <a:lnSpc>
-                <a:spcPts val="1620"/>
-              </a:lnSpc>
-              <a:spcAft>
-                <a:spcPts val="300"/>
-              </a:spcAft>
-              <a:buNone/>
-            </a:pPr>
-            <a:r>
-              <a:rPr lang="en-US" sz="1200" dirty="0">
-                <a:solidFill>
-                  <a:srgbClr val="1C2833"/>
-                </a:solidFill>
-                <a:latin typeface="Arial" pitchFamily="34" charset="0"/>
-                <a:ea typeface="Arial" pitchFamily="34" charset="-122"/>
-                <a:cs typeface="Arial" pitchFamily="34" charset="-120"/>
-              </a:rPr>
-              <a:t> sacred?</a:t>
-            </a:r>
-            <a:endParaRPr lang="en-US" sz="1200" dirty="0"/>
-          </a:p>
-          <a:p>
-            <a:pPr algn="l" marL="342900" indent="-342900">
-              <a:lnSpc>
-                <a:spcPts val="1620"/>
-              </a:lnSpc>
-              <a:spcAft>
-                <a:spcPts val="300"/>
-              </a:spcAft>
-              <a:buSzPct val="100000"/>
-              <a:buChar char="•"/>
-            </a:pPr>
-            <a:r>
-              <a:rPr lang="en-US" sz="1200" b="1" dirty="0">
-                <a:solidFill>
-                  <a:srgbClr val="1C2833"/>
-                </a:solidFill>
-                <a:latin typeface="Arial" pitchFamily="34" charset="0"/>
-                <a:ea typeface="Arial" pitchFamily="34" charset="-122"/>
-                <a:cs typeface="Arial" pitchFamily="34" charset="-120"/>
-              </a:rPr>
-              <a:t>One tier down:</a:t>
-            </a:r>
-            <a:pPr algn="l" indent="0" marL="0">
-              <a:lnSpc>
-                <a:spcPts val="1620"/>
-              </a:lnSpc>
-              <a:spcAft>
-                <a:spcPts val="300"/>
-              </a:spcAft>
-              <a:buNone/>
-            </a:pPr>
-            <a:r>
-              <a:rPr lang="en-US" sz="1200" dirty="0">
-                <a:solidFill>
-                  <a:srgbClr val="1C2833"/>
-                </a:solidFill>
-                <a:latin typeface="Arial" pitchFamily="34" charset="0"/>
-                <a:ea typeface="Arial" pitchFamily="34" charset="-122"/>
-                <a:cs typeface="Arial" pitchFamily="34" charset="-120"/>
-              </a:rPr>
-              <a:t> Memorise just three river names — Gaṅgā, Yamunā, Kāverī (north, north, south). The other four can come over the week.</a:t>
+              <a:t> (Source: Central Pollution Control Board, government of India, annual river-water-quality reports.) Of India's major river stretches monitored, more than 100 are in the "polluted" category (Class C or worse). Sewage is the primary cause. Industrial effluent is the second.</a:t>
             </a:r>
             <a:endParaRPr lang="en-US" sz="1200" dirty="0"/>
           </a:p>
@@ -2983,7 +3495,7 @@
                 <a:ea typeface="Georgia" pitchFamily="34" charset="-122"/>
                 <a:cs typeface="Georgia" pitchFamily="34" charset="-120"/>
               </a:rPr>
-              <a:t>Teacher notes</a:t>
+              <a:t>Core (20 min) (cont.)</a:t>
             </a:r>
             <a:endParaRPr lang="en-US" sz="1800" dirty="0"/>
           </a:p>
@@ -2998,7 +3510,7 @@
         <p:spPr>
           <a:xfrm>
             <a:off x="406301" y="870942"/>
-            <a:ext cx="8498026" cy="1066354"/>
+            <a:ext cx="8498026" cy="639812"/>
           </a:xfrm>
           <a:prstGeom prst="rect">
             <a:avLst/>
@@ -3031,7 +3543,7 @@
                 <a:ea typeface="Arial" pitchFamily="34" charset="-122"/>
                 <a:cs typeface="Arial" pitchFamily="34" charset="-120"/>
               </a:rPr>
-              <a:t>– Some students will challenge the "sacred = protected" claim with the Gaṅgā being so polluted. Affirm the challenge. The lesson is precisely that ritual reverence without behavioural follow-through is insufficient. The tradition gave a strong starting point; we have not lived up to it. – Avoid politicising the Namami Gange programme. Focus on it as one effort, with whatever results it has had. – Some classes will have students whose families have done </a:t>
+              <a:t>The remedy is being attempted — Namami Gange (the national clean-up programme) is one example. The tradition can supply the </a:t>
             </a:r>
             <a:pPr algn="l" indent="0" marL="0">
               <a:lnSpc>
@@ -3054,7 +3566,7 @@
                 <a:ea typeface="Arial" pitchFamily="34" charset="-122"/>
                 <a:cs typeface="Arial" pitchFamily="34" charset="-120"/>
               </a:rPr>
-              <a:t>snāna</a:t>
+              <a:t>will</a:t>
             </a:r>
             <a:pPr algn="l" indent="0" marL="0">
               <a:lnSpc>
@@ -3077,7 +3589,53 @@
                 <a:ea typeface="Arial" pitchFamily="34" charset="-122"/>
                 <a:cs typeface="Arial" pitchFamily="34" charset="-120"/>
               </a:rPr>
-              <a:t> at a sacred river. Invite them to share if they want; do not single them out. The lesson is enriched by lived experience.</a:t>
+              <a:t> (this river is sacred — we must clean it); the engineers supply the </a:t>
+            </a:r>
+            <a:pPr algn="l" indent="0" marL="0">
+              <a:lnSpc>
+                <a:spcPts val="1680"/>
+              </a:lnSpc>
+              <a:spcBef>
+                <a:spcPts val="300"/>
+              </a:spcBef>
+              <a:spcAft>
+                <a:spcPts val="300"/>
+              </a:spcAft>
+              <a:buNone/>
+            </a:pPr>
+            <a:r>
+              <a:rPr lang="en-US" sz="1200" i="1" dirty="0">
+                <a:solidFill>
+                  <a:srgbClr val="1C2833"/>
+                </a:solidFill>
+                <a:latin typeface="Arial" pitchFamily="34" charset="0"/>
+                <a:ea typeface="Arial" pitchFamily="34" charset="-122"/>
+                <a:cs typeface="Arial" pitchFamily="34" charset="-120"/>
+              </a:rPr>
+              <a:t>means</a:t>
+            </a:r>
+            <a:pPr algn="l" indent="0" marL="0">
+              <a:lnSpc>
+                <a:spcPts val="1680"/>
+              </a:lnSpc>
+              <a:spcBef>
+                <a:spcPts val="300"/>
+              </a:spcBef>
+              <a:spcAft>
+                <a:spcPts val="300"/>
+              </a:spcAft>
+              <a:buNone/>
+            </a:pPr>
+            <a:r>
+              <a:rPr lang="en-US" sz="1200" dirty="0">
+                <a:solidFill>
+                  <a:srgbClr val="1C2833"/>
+                </a:solidFill>
+                <a:latin typeface="Arial" pitchFamily="34" charset="0"/>
+                <a:ea typeface="Arial" pitchFamily="34" charset="-122"/>
+                <a:cs typeface="Arial" pitchFamily="34" charset="-120"/>
+              </a:rPr>
+              <a:t> (sewage treatment plants, monitoring, accountability).</a:t>
             </a:r>
             <a:endParaRPr lang="en-US" sz="1200" dirty="0"/>
           </a:p>
@@ -3235,7 +3793,7 @@
                 <a:ea typeface="Georgia" pitchFamily="34" charset="-122"/>
                 <a:cs typeface="Georgia" pitchFamily="34" charset="-120"/>
               </a:rPr>
-              <a:t>Citation(s) used in this lesson</a:t>
+              <a:t>Activity (15 min) — Find Your River</a:t>
             </a:r>
             <a:endParaRPr lang="en-US" sz="1800" dirty="0"/>
           </a:p>
@@ -3250,7 +3808,7 @@
         <p:spPr>
           <a:xfrm>
             <a:off x="634901" y="883593"/>
-            <a:ext cx="8102798" cy="693241"/>
+            <a:ext cx="8102798" cy="1744563"/>
           </a:xfrm>
           <a:prstGeom prst="rect">
             <a:avLst/>
@@ -3273,23 +3831,47 @@
               <a:buChar char="•"/>
             </a:pPr>
             <a:r>
-              <a:rPr lang="en-US" sz="1200" i="1" dirty="0">
-                <a:solidFill>
-                  <a:srgbClr val="1C2833"/>
-                </a:solidFill>
-                <a:latin typeface="Arial" pitchFamily="34" charset="0"/>
-                <a:ea typeface="Arial" pitchFamily="34" charset="-122"/>
-                <a:cs typeface="Arial" pitchFamily="34" charset="-120"/>
-              </a:rPr>
-              <a:t>sapta-sindhu</a:t>
-            </a:r>
-            <a:pPr algn="l" indent="0" marL="0">
+              <a:rPr lang="en-US" sz="1200" dirty="0">
+                <a:solidFill>
+                  <a:srgbClr val="1C2833"/>
+                </a:solidFill>
+                <a:latin typeface="Arial" pitchFamily="34" charset="0"/>
+                <a:ea typeface="Arial" pitchFamily="34" charset="-122"/>
+                <a:cs typeface="Arial" pitchFamily="34" charset="-120"/>
+              </a:rPr>
+              <a:t>Each student writes:</a:t>
+            </a:r>
+            <a:endParaRPr lang="en-US" sz="1200" dirty="0"/>
+          </a:p>
+          <a:p>
+            <a:pPr algn="l" marL="342900" indent="-342900">
               <a:lnSpc>
                 <a:spcPts val="1620"/>
               </a:lnSpc>
               <a:spcAft>
                 <a:spcPts val="300"/>
               </a:spcAft>
+              <a:buSzPct val="100000"/>
+              <a:buChar char="•"/>
+            </a:pPr>
+            <a:r>
+              <a:rPr lang="en-US" sz="1200" b="1" dirty="0">
+                <a:solidFill>
+                  <a:srgbClr val="1C2833"/>
+                </a:solidFill>
+                <a:latin typeface="Arial" pitchFamily="34" charset="0"/>
+                <a:ea typeface="Arial" pitchFamily="34" charset="-122"/>
+                <a:cs typeface="Arial" pitchFamily="34" charset="-120"/>
+              </a:rPr>
+              <a:t>Name</a:t>
+            </a:r>
+            <a:pPr algn="l" indent="0" marL="0">
+              <a:lnSpc>
+                <a:spcPts val="1620"/>
+              </a:lnSpc>
+              <a:spcAft>
+                <a:spcPts val="300"/>
+              </a:spcAft>
               <a:buNone/>
             </a:pPr>
             <a:r>
@@ -3301,27 +3883,31 @@
                 <a:ea typeface="Arial" pitchFamily="34" charset="-122"/>
                 <a:cs typeface="Arial" pitchFamily="34" charset="-120"/>
               </a:rPr>
-              <a:t> invocation — a traditional prayer chanted across many Hindu households; the exact text is found in standard prayer manuals (e.g. </a:t>
-            </a:r>
-            <a:pPr algn="l" indent="0" marL="0">
+              <a:t> of the nearest river / lake / large drain to your home.</a:t>
+            </a:r>
+            <a:endParaRPr lang="en-US" sz="1200" dirty="0"/>
+          </a:p>
+          <a:p>
+            <a:pPr algn="l" marL="342900" indent="-342900">
               <a:lnSpc>
                 <a:spcPts val="1620"/>
               </a:lnSpc>
               <a:spcAft>
                 <a:spcPts val="300"/>
               </a:spcAft>
-              <a:buNone/>
-            </a:pPr>
-            <a:r>
-              <a:rPr lang="en-US" sz="1200" i="1" dirty="0">
-                <a:solidFill>
-                  <a:srgbClr val="1C2833"/>
-                </a:solidFill>
-                <a:latin typeface="Arial" pitchFamily="34" charset="0"/>
-                <a:ea typeface="Arial" pitchFamily="34" charset="-122"/>
-                <a:cs typeface="Arial" pitchFamily="34" charset="-120"/>
-              </a:rPr>
-              <a:t>Nitya Karma Pūjā Prakāśa</a:t>
+              <a:buSzPct val="100000"/>
+              <a:buChar char="•"/>
+            </a:pPr>
+            <a:r>
+              <a:rPr lang="en-US" sz="1200" b="1" dirty="0">
+                <a:solidFill>
+                  <a:srgbClr val="1C2833"/>
+                </a:solidFill>
+                <a:latin typeface="Arial" pitchFamily="34" charset="0"/>
+                <a:ea typeface="Arial" pitchFamily="34" charset="-122"/>
+                <a:cs typeface="Arial" pitchFamily="34" charset="-120"/>
+              </a:rPr>
+              <a:t>One observation</a:t>
             </a:r>
             <a:pPr algn="l" indent="0" marL="0">
               <a:lnSpc>
@@ -3341,10 +3927,146 @@
                 <a:ea typeface="Arial" pitchFamily="34" charset="-122"/>
                 <a:cs typeface="Arial" pitchFamily="34" charset="-120"/>
               </a:rPr>
-              <a:t>). Not from a single canonical scripture; treated here as a traditional liturgical verse.</a:t>
+              <a:t> of its current state (clean? polluted? trickle? full?).</a:t>
             </a:r>
             <a:endParaRPr lang="en-US" sz="1200" dirty="0"/>
           </a:p>
+          <a:p>
+            <a:pPr algn="l" marL="342900" indent="-342900">
+              <a:lnSpc>
+                <a:spcPts val="1620"/>
+              </a:lnSpc>
+              <a:spcAft>
+                <a:spcPts val="300"/>
+              </a:spcAft>
+              <a:buSzPct val="100000"/>
+              <a:buChar char="•"/>
+            </a:pPr>
+            <a:r>
+              <a:rPr lang="en-US" sz="1200" b="1" dirty="0">
+                <a:solidFill>
+                  <a:srgbClr val="1C2833"/>
+                </a:solidFill>
+                <a:latin typeface="Arial" pitchFamily="34" charset="0"/>
+                <a:ea typeface="Arial" pitchFamily="34" charset="-122"/>
+                <a:cs typeface="Arial" pitchFamily="34" charset="-120"/>
+              </a:rPr>
+              <a:t>One specific source of pollution</a:t>
+            </a:r>
+            <a:pPr algn="l" indent="0" marL="0">
+              <a:lnSpc>
+                <a:spcPts val="1620"/>
+              </a:lnSpc>
+              <a:spcAft>
+                <a:spcPts val="300"/>
+              </a:spcAft>
+              <a:buNone/>
+            </a:pPr>
+            <a:r>
+              <a:rPr lang="en-US" sz="1200" dirty="0">
+                <a:solidFill>
+                  <a:srgbClr val="1C2833"/>
+                </a:solidFill>
+                <a:latin typeface="Arial" pitchFamily="34" charset="0"/>
+                <a:ea typeface="Arial" pitchFamily="34" charset="-122"/>
+                <a:cs typeface="Arial" pitchFamily="34" charset="-120"/>
+              </a:rPr>
+              <a:t> if you have noticed any (a particular drain, a particular factory, a particular dump).</a:t>
+            </a:r>
+            <a:endParaRPr lang="en-US" sz="1200" dirty="0"/>
+          </a:p>
+          <a:p>
+            <a:pPr algn="l" marL="342900" indent="-342900">
+              <a:lnSpc>
+                <a:spcPts val="1620"/>
+              </a:lnSpc>
+              <a:spcAft>
+                <a:spcPts val="300"/>
+              </a:spcAft>
+              <a:buSzPct val="100000"/>
+              <a:buChar char="•"/>
+            </a:pPr>
+            <a:r>
+              <a:rPr lang="en-US" sz="1200" b="1" dirty="0">
+                <a:solidFill>
+                  <a:srgbClr val="1C2833"/>
+                </a:solidFill>
+                <a:latin typeface="Arial" pitchFamily="34" charset="0"/>
+                <a:ea typeface="Arial" pitchFamily="34" charset="-122"/>
+                <a:cs typeface="Arial" pitchFamily="34" charset="-120"/>
+              </a:rPr>
+              <a:t>Is it considered sacred locally?</a:t>
+            </a:r>
+            <a:pPr algn="l" indent="0" marL="0">
+              <a:lnSpc>
+                <a:spcPts val="1620"/>
+              </a:lnSpc>
+              <a:spcAft>
+                <a:spcPts val="300"/>
+              </a:spcAft>
+              <a:buNone/>
+            </a:pPr>
+            <a:r>
+              <a:rPr lang="en-US" sz="1200" dirty="0">
+                <a:solidFill>
+                  <a:srgbClr val="1C2833"/>
+                </a:solidFill>
+                <a:latin typeface="Arial" pitchFamily="34" charset="0"/>
+                <a:ea typeface="Arial" pitchFamily="34" charset="-122"/>
+                <a:cs typeface="Arial" pitchFamily="34" charset="-120"/>
+              </a:rPr>
+              <a:t> (Yes / no / don't know.)</a:t>
+            </a:r>
+            <a:endParaRPr lang="en-US" sz="1200" dirty="0"/>
+          </a:p>
+          <a:p>
+            <a:pPr algn="l" marL="342900" indent="-342900">
+              <a:lnSpc>
+                <a:spcPts val="1620"/>
+              </a:lnSpc>
+              <a:spcAft>
+                <a:spcPts val="300"/>
+              </a:spcAft>
+              <a:buSzPct val="100000"/>
+              <a:buChar char="•"/>
+            </a:pPr>
+            <a:r>
+              <a:rPr lang="en-US" sz="1200" dirty="0">
+                <a:solidFill>
+                  <a:srgbClr val="1C2833"/>
+                </a:solidFill>
+                <a:latin typeface="Arial" pitchFamily="34" charset="0"/>
+                <a:ea typeface="Arial" pitchFamily="34" charset="-122"/>
+                <a:cs typeface="Arial" pitchFamily="34" charset="-120"/>
+              </a:rPr>
+              <a:t>Pairs share. Two pairs are picked to share with the class.</a:t>
+            </a:r>
+            <a:endParaRPr lang="en-US" sz="1200" dirty="0"/>
+          </a:p>
+          <a:p>
+            <a:pPr algn="l" marL="342900" indent="-342900">
+              <a:lnSpc>
+                <a:spcPts val="1620"/>
+              </a:lnSpc>
+              <a:spcAft>
+                <a:spcPts val="300"/>
+              </a:spcAft>
+              <a:buSzPct val="100000"/>
+              <a:buChar char="•"/>
+            </a:pPr>
+            <a:r>
+              <a:rPr lang="en-US" sz="1200" dirty="0">
+                <a:solidFill>
+                  <a:srgbClr val="1C2833"/>
+                </a:solidFill>
+                <a:latin typeface="Arial" pitchFamily="34" charset="0"/>
+                <a:ea typeface="Arial" pitchFamily="34" charset="-122"/>
+                <a:cs typeface="Arial" pitchFamily="34" charset="-120"/>
+              </a:rPr>
+              <a:t>The teacher catalogues the rivers / lakes that come up; this list is used on Day 9 for the walk planning.</a:t>
+            </a:r>
+            <a:endParaRPr lang="en-US" sz="1200" dirty="0"/>
+          </a:p>
         </p:txBody>
       </p:sp>
       <p:sp>
@@ -3355,8 +4077,8 @@
         </p:nvSpPr>
         <p:spPr>
           <a:xfrm>
-            <a:off x="406301" y="1665684"/>
-            <a:ext cx="8498026" cy="426541"/>
+            <a:off x="406301" y="4434929"/>
+            <a:ext cx="8498026" cy="213271"/>
           </a:xfrm>
           <a:prstGeom prst="rect">
             <a:avLst/>
@@ -3389,15 +4111,2022 @@
                 <a:ea typeface="Arial" pitchFamily="34" charset="-122"/>
                 <a:cs typeface="Arial" pitchFamily="34" charset="-120"/>
               </a:rPr>
-              <a:t>– Central Pollution Control Board (Government of India) annual reports on polluted river stretches — paraphrased, not cited verbatim.</a:t>
+              <a:t>Middle ·  · IKS Curriculum</a:t>
             </a:r>
             <a:endParaRPr lang="en-US" sz="1200" dirty="0"/>
           </a:p>
         </p:txBody>
       </p:sp>
+    </p:spTree>
+  </p:cSld>
+  <p:clrMapOvr>
+    <a:masterClrMapping/>
+  </p:clrMapOvr>
+</p:sld>
+</file>
+
+<file path=ppt/slides/slide14.xml><?xml version="1.0" encoding="utf-8"?>
+<p:sld xmlns:a="http://schemas.openxmlformats.org/drawingml/2006/main" xmlns:r="http://schemas.openxmlformats.org/officeDocument/2006/relationships" xmlns:p="http://schemas.openxmlformats.org/presentationml/2006/main">
+  <p:cSld name="Slide 14">
+    <p:bg>
+      <p:bgPr>
+        <a:solidFill>
+          <a:srgbClr val="FFFFFF"/>
+        </a:solidFill>
+      </p:bgPr>
+    </p:bg>
+    <p:spTree>
+      <p:nvGrpSpPr>
+        <p:cNvPr id="1" name=""/>
+        <p:cNvGrpSpPr/>
+        <p:nvPr/>
+      </p:nvGrpSpPr>
+      <p:grpSpPr>
+        <a:xfrm>
+          <a:off x="0" y="0"/>
+          <a:ext cx="0" cy="0"/>
+          <a:chOff x="0" y="0"/>
+          <a:chExt cx="0" cy="0"/>
+        </a:xfrm>
+      </p:grpSpPr>
+      <p:sp>
+        <p:nvSpPr>
+          <p:cNvPr id="2" name="Text 0"/>
+          <p:cNvSpPr/>
+          <p:nvPr/>
+        </p:nvSpPr>
+        <p:spPr>
+          <a:xfrm>
+            <a:off x="0" y="0"/>
+            <a:ext cx="9144000" cy="101501"/>
+          </a:xfrm>
+          <a:prstGeom prst="rect">
+            <a:avLst/>
+          </a:prstGeom>
+          <a:solidFill>
+            <a:srgbClr val="277884"/>
+          </a:solidFill>
+          <a:ln/>
+        </p:spPr>
+        <p:txBody>
+          <a:bodyPr wrap="square" rtlCol="0" anchor="ctr"/>
+          <a:lstStyle/>
+          <a:p>
+            <a:pPr indent="0" marL="0">
+              <a:buNone/>
+            </a:pPr>
+            <a:endParaRPr lang="en-US" dirty="0"/>
+          </a:p>
+        </p:txBody>
+      </p:sp>
+      <p:sp>
+        <p:nvSpPr>
+          <p:cNvPr id="3" name="Text 1"/>
+          <p:cNvSpPr/>
+          <p:nvPr/>
+        </p:nvSpPr>
+        <p:spPr>
+          <a:xfrm>
+            <a:off x="406301" y="457051"/>
+            <a:ext cx="8498026" cy="274290"/>
+          </a:xfrm>
+          <a:prstGeom prst="rect">
+            <a:avLst/>
+          </a:prstGeom>
+          <a:noFill/>
+          <a:ln/>
+        </p:spPr>
+        <p:txBody>
+          <a:bodyPr wrap="square" lIns="0" tIns="0" rIns="0" bIns="0" rtlCol="0" anchor="t"/>
+          <a:lstStyle/>
+          <a:p>
+            <a:pPr algn="l" indent="0" marL="0">
+              <a:lnSpc>
+                <a:spcPts val="2160"/>
+              </a:lnSpc>
+              <a:spcBef>
+                <a:spcPts val="600"/>
+              </a:spcBef>
+              <a:spcAft>
+                <a:spcPts val="800"/>
+              </a:spcAft>
+              <a:buNone/>
+            </a:pPr>
+            <a:r>
+              <a:rPr lang="en-US" sz="1800" b="1" dirty="0">
+                <a:solidFill>
+                  <a:srgbClr val="FE4447"/>
+                </a:solidFill>
+                <a:latin typeface="Georgia" pitchFamily="34" charset="0"/>
+                <a:ea typeface="Georgia" pitchFamily="34" charset="-122"/>
+                <a:cs typeface="Georgia" pitchFamily="34" charset="-120"/>
+              </a:rPr>
+              <a:t>Wrap-up (5 min)</a:t>
+            </a:r>
+            <a:endParaRPr lang="en-US" sz="1800" dirty="0"/>
+          </a:p>
+        </p:txBody>
+      </p:sp>
+      <p:sp>
+        <p:nvSpPr>
+          <p:cNvPr id="4" name="Text 2"/>
+          <p:cNvSpPr/>
+          <p:nvPr/>
+        </p:nvSpPr>
+        <p:spPr>
+          <a:xfrm>
+            <a:off x="634901" y="883593"/>
+            <a:ext cx="8102798" cy="544711"/>
+          </a:xfrm>
+          <a:prstGeom prst="rect">
+            <a:avLst/>
+          </a:prstGeom>
+          <a:noFill/>
+          <a:ln/>
+        </p:spPr>
+        <p:txBody>
+          <a:bodyPr wrap="square" lIns="0" tIns="0" rIns="0" bIns="0" rtlCol="0" anchor="t"/>
+          <a:lstStyle/>
+          <a:p>
+            <a:pPr algn="l" marL="342900" indent="-342900">
+              <a:lnSpc>
+                <a:spcPts val="1620"/>
+              </a:lnSpc>
+              <a:spcAft>
+                <a:spcPts val="300"/>
+              </a:spcAft>
+              <a:buSzPct val="100000"/>
+              <a:buChar char="•"/>
+            </a:pPr>
+            <a:r>
+              <a:rPr lang="en-US" sz="1200" b="1" dirty="0">
+                <a:solidFill>
+                  <a:srgbClr val="1C2833"/>
+                </a:solidFill>
+                <a:latin typeface="Arial" pitchFamily="34" charset="0"/>
+                <a:ea typeface="Arial" pitchFamily="34" charset="-122"/>
+                <a:cs typeface="Arial" pitchFamily="34" charset="-120"/>
+              </a:rPr>
+              <a:t>Formative quiz on a slip of paper (5 questions, 3 min)</a:t>
+            </a:r>
+            <a:pPr algn="l" indent="0" marL="0">
+              <a:lnSpc>
+                <a:spcPts val="1620"/>
+              </a:lnSpc>
+              <a:spcAft>
+                <a:spcPts val="300"/>
+              </a:spcAft>
+              <a:buNone/>
+            </a:pPr>
+            <a:r>
+              <a:rPr lang="en-US" sz="1200" dirty="0">
+                <a:solidFill>
+                  <a:srgbClr val="1C2833"/>
+                </a:solidFill>
+                <a:latin typeface="Arial" pitchFamily="34" charset="0"/>
+                <a:ea typeface="Arial" pitchFamily="34" charset="-122"/>
+                <a:cs typeface="Arial" pitchFamily="34" charset="-120"/>
+              </a:rPr>
+              <a:t> — see </a:t>
+            </a:r>
+            <a:pPr algn="l" indent="0" marL="0">
+              <a:lnSpc>
+                <a:spcPts val="1620"/>
+              </a:lnSpc>
+              <a:spcAft>
+                <a:spcPts val="300"/>
+              </a:spcAft>
+              <a:buNone/>
+            </a:pPr>
+            <a:r>
+              <a:rPr lang="en-US" sz="1200" dirty="0">
+                <a:solidFill>
+                  <a:srgbClr val="1C2833"/>
+                </a:solidFill>
+                <a:latin typeface="Arial" pitchFamily="34" charset="0"/>
+                <a:ea typeface="Arial" pitchFamily="34" charset="-122"/>
+                <a:cs typeface="Arial" pitchFamily="34" charset="-120"/>
+              </a:rPr>
+              <a:t>quizzes/formative.md</a:t>
+            </a:r>
+            <a:pPr algn="l" indent="0" marL="0">
+              <a:lnSpc>
+                <a:spcPts val="1620"/>
+              </a:lnSpc>
+              <a:spcAft>
+                <a:spcPts val="300"/>
+              </a:spcAft>
+              <a:buNone/>
+            </a:pPr>
+            <a:r>
+              <a:rPr lang="en-US" sz="1200" dirty="0">
+                <a:solidFill>
+                  <a:srgbClr val="1C2833"/>
+                </a:solidFill>
+                <a:latin typeface="Arial" pitchFamily="34" charset="0"/>
+                <a:ea typeface="Arial" pitchFamily="34" charset="-122"/>
+                <a:cs typeface="Arial" pitchFamily="34" charset="-120"/>
+              </a:rPr>
+              <a:t> Part A.</a:t>
+            </a:r>
+            <a:endParaRPr lang="en-US" sz="1200" dirty="0"/>
+          </a:p>
+          <a:p>
+            <a:pPr algn="l" marL="342900" indent="-342900">
+              <a:lnSpc>
+                <a:spcPts val="1620"/>
+              </a:lnSpc>
+              <a:spcAft>
+                <a:spcPts val="300"/>
+              </a:spcAft>
+              <a:buSzPct val="100000"/>
+              <a:buChar char="•"/>
+            </a:pPr>
+            <a:r>
+              <a:rPr lang="en-US" sz="1200" dirty="0">
+                <a:solidFill>
+                  <a:srgbClr val="1C2833"/>
+                </a:solidFill>
+                <a:latin typeface="Arial" pitchFamily="34" charset="0"/>
+                <a:ea typeface="Arial" pitchFamily="34" charset="-122"/>
+                <a:cs typeface="Arial" pitchFamily="34" charset="-120"/>
+              </a:rPr>
+              <a:t>Collect for grading.</a:t>
+            </a:r>
+            <a:endParaRPr lang="en-US" sz="1200" dirty="0"/>
+          </a:p>
+        </p:txBody>
+      </p:sp>
+      <p:sp>
+        <p:nvSpPr>
+          <p:cNvPr id="5" name="Text 3"/>
+          <p:cNvSpPr/>
+          <p:nvPr/>
+        </p:nvSpPr>
+        <p:spPr>
+          <a:xfrm>
+            <a:off x="406301" y="4434929"/>
+            <a:ext cx="8498026" cy="213271"/>
+          </a:xfrm>
+          <a:prstGeom prst="rect">
+            <a:avLst/>
+          </a:prstGeom>
+          <a:noFill/>
+          <a:ln/>
+        </p:spPr>
+        <p:txBody>
+          <a:bodyPr wrap="square" lIns="0" tIns="0" rIns="0" bIns="0" rtlCol="0" anchor="t"/>
+          <a:lstStyle/>
+          <a:p>
+            <a:pPr algn="l" indent="0" marL="0">
+              <a:lnSpc>
+                <a:spcPts val="1680"/>
+              </a:lnSpc>
+              <a:spcBef>
+                <a:spcPts val="300"/>
+              </a:spcBef>
+              <a:spcAft>
+                <a:spcPts val="300"/>
+              </a:spcAft>
+              <a:buNone/>
+            </a:pPr>
+            <a:r>
+              <a:rPr lang="en-US" sz="1200" dirty="0">
+                <a:solidFill>
+                  <a:srgbClr val="1C2833"/>
+                </a:solidFill>
+                <a:latin typeface="Arial" pitchFamily="34" charset="0"/>
+                <a:ea typeface="Arial" pitchFamily="34" charset="-122"/>
+                <a:cs typeface="Arial" pitchFamily="34" charset="-120"/>
+              </a:rPr>
+              <a:t>Middle ·  · IKS Curriculum</a:t>
+            </a:r>
+            <a:endParaRPr lang="en-US" sz="1200" dirty="0"/>
+          </a:p>
+        </p:txBody>
+      </p:sp>
+    </p:spTree>
+  </p:cSld>
+  <p:clrMapOvr>
+    <a:masterClrMapping/>
+  </p:clrMapOvr>
+</p:sld>
+</file>
+
+<file path=ppt/slides/slide15.xml><?xml version="1.0" encoding="utf-8"?>
+<p:sld xmlns:a="http://schemas.openxmlformats.org/drawingml/2006/main" xmlns:r="http://schemas.openxmlformats.org/officeDocument/2006/relationships" xmlns:p="http://schemas.openxmlformats.org/presentationml/2006/main">
+  <p:cSld name="Slide 15">
+    <p:bg>
+      <p:bgPr>
+        <a:solidFill>
+          <a:srgbClr val="FFFFFF"/>
+        </a:solidFill>
+      </p:bgPr>
+    </p:bg>
+    <p:spTree>
+      <p:nvGrpSpPr>
+        <p:cNvPr id="1" name=""/>
+        <p:cNvGrpSpPr/>
+        <p:nvPr/>
+      </p:nvGrpSpPr>
+      <p:grpSpPr>
+        <a:xfrm>
+          <a:off x="0" y="0"/>
+          <a:ext cx="0" cy="0"/>
+          <a:chOff x="0" y="0"/>
+          <a:chExt cx="0" cy="0"/>
+        </a:xfrm>
+      </p:grpSpPr>
+      <p:sp>
+        <p:nvSpPr>
+          <p:cNvPr id="2" name="Text 0"/>
+          <p:cNvSpPr/>
+          <p:nvPr/>
+        </p:nvSpPr>
+        <p:spPr>
+          <a:xfrm>
+            <a:off x="0" y="0"/>
+            <a:ext cx="9144000" cy="101501"/>
+          </a:xfrm>
+          <a:prstGeom prst="rect">
+            <a:avLst/>
+          </a:prstGeom>
+          <a:solidFill>
+            <a:srgbClr val="277884"/>
+          </a:solidFill>
+          <a:ln/>
+        </p:spPr>
+        <p:txBody>
+          <a:bodyPr wrap="square" rtlCol="0" anchor="ctr"/>
+          <a:lstStyle/>
+          <a:p>
+            <a:pPr indent="0" marL="0">
+              <a:buNone/>
+            </a:pPr>
+            <a:endParaRPr lang="en-US" dirty="0"/>
+          </a:p>
+        </p:txBody>
+      </p:sp>
+      <p:sp>
+        <p:nvSpPr>
+          <p:cNvPr id="3" name="Text 1"/>
+          <p:cNvSpPr/>
+          <p:nvPr/>
+        </p:nvSpPr>
+        <p:spPr>
+          <a:xfrm>
+            <a:off x="406301" y="457051"/>
+            <a:ext cx="8498026" cy="274290"/>
+          </a:xfrm>
+          <a:prstGeom prst="rect">
+            <a:avLst/>
+          </a:prstGeom>
+          <a:noFill/>
+          <a:ln/>
+        </p:spPr>
+        <p:txBody>
+          <a:bodyPr wrap="square" lIns="0" tIns="0" rIns="0" bIns="0" rtlCol="0" anchor="t"/>
+          <a:lstStyle/>
+          <a:p>
+            <a:pPr algn="l" indent="0" marL="0">
+              <a:lnSpc>
+                <a:spcPts val="2160"/>
+              </a:lnSpc>
+              <a:spcBef>
+                <a:spcPts val="600"/>
+              </a:spcBef>
+              <a:spcAft>
+                <a:spcPts val="800"/>
+              </a:spcAft>
+              <a:buNone/>
+            </a:pPr>
+            <a:r>
+              <a:rPr lang="en-US" sz="1800" b="1" dirty="0">
+                <a:solidFill>
+                  <a:srgbClr val="FE4447"/>
+                </a:solidFill>
+                <a:latin typeface="Georgia" pitchFamily="34" charset="0"/>
+                <a:ea typeface="Georgia" pitchFamily="34" charset="-122"/>
+                <a:cs typeface="Georgia" pitchFamily="34" charset="-120"/>
+              </a:rPr>
+              <a:t>Student-facing content</a:t>
+            </a:r>
+            <a:endParaRPr lang="en-US" sz="1800" dirty="0"/>
+          </a:p>
+        </p:txBody>
+      </p:sp>
+      <p:sp>
+        <p:nvSpPr>
+          <p:cNvPr id="4" name="Text 2"/>
+          <p:cNvSpPr/>
+          <p:nvPr/>
+        </p:nvSpPr>
+        <p:spPr>
+          <a:xfrm>
+            <a:off x="406301" y="883593"/>
+            <a:ext cx="8331398" cy="2381250"/>
+          </a:xfrm>
+          <a:prstGeom prst="rect">
+            <a:avLst/>
+          </a:prstGeom>
+          <a:solidFill>
+            <a:srgbClr val="F4F8F9"/>
+          </a:solidFill>
+          <a:ln/>
+        </p:spPr>
+        <p:txBody>
+          <a:bodyPr wrap="square" rtlCol="0" anchor="ctr"/>
+          <a:lstStyle/>
+          <a:p>
+            <a:pPr indent="0" marL="0">
+              <a:buNone/>
+            </a:pPr>
+            <a:endParaRPr lang="en-US" dirty="0"/>
+          </a:p>
+        </p:txBody>
+      </p:sp>
+      <p:sp>
+        <p:nvSpPr>
+          <p:cNvPr id="5" name="Shape 3"/>
+          <p:cNvSpPr/>
+          <p:nvPr/>
+        </p:nvSpPr>
+        <p:spPr>
+          <a:xfrm>
+            <a:off x="434876" y="883593"/>
+            <a:ext cx="0" cy="2381250"/>
+          </a:xfrm>
+          <a:prstGeom prst="line">
+            <a:avLst/>
+          </a:prstGeom>
+          <a:noFill/>
+          <a:ln w="57150">
+            <a:solidFill>
+              <a:srgbClr val="FE4447"/>
+            </a:solidFill>
+            <a:prstDash val="solid"/>
+          </a:ln>
+        </p:spPr>
+      </p:sp>
       <p:sp>
         <p:nvSpPr>
           <p:cNvPr id="6" name="Text 4"/>
+          <p:cNvSpPr/>
+          <p:nvPr/>
+        </p:nvSpPr>
+        <p:spPr>
+          <a:xfrm>
+            <a:off x="692051" y="1074093"/>
+            <a:ext cx="7973389" cy="230981"/>
+          </a:xfrm>
+          <a:prstGeom prst="rect">
+            <a:avLst/>
+          </a:prstGeom>
+          <a:noFill/>
+          <a:ln/>
+        </p:spPr>
+        <p:txBody>
+          <a:bodyPr wrap="square" lIns="0" tIns="0" rIns="0" bIns="0" rtlCol="0" anchor="t"/>
+          <a:lstStyle/>
+          <a:p>
+            <a:pPr algn="l" indent="0" marL="0">
+              <a:lnSpc>
+                <a:spcPts val="1820"/>
+              </a:lnSpc>
+              <a:spcBef>
+                <a:spcPts val="300"/>
+              </a:spcBef>
+              <a:spcAft>
+                <a:spcPts val="300"/>
+              </a:spcAft>
+              <a:buNone/>
+            </a:pPr>
+            <a:r>
+              <a:rPr lang="en-US" sz="1300" b="1" i="1" dirty="0">
+                <a:solidFill>
+                  <a:srgbClr val="1C2833"/>
+                </a:solidFill>
+                <a:latin typeface="Georgia" pitchFamily="34" charset="0"/>
+                <a:ea typeface="Georgia" pitchFamily="34" charset="-122"/>
+                <a:cs typeface="Georgia" pitchFamily="34" charset="-120"/>
+              </a:rPr>
+              <a:t>The seven sacred rivers</a:t>
+            </a:r>
+            <a:pPr algn="l" indent="0" marL="0">
+              <a:lnSpc>
+                <a:spcPts val="1820"/>
+              </a:lnSpc>
+              <a:spcBef>
+                <a:spcPts val="300"/>
+              </a:spcBef>
+              <a:spcAft>
+                <a:spcPts val="300"/>
+              </a:spcAft>
+              <a:buNone/>
+            </a:pPr>
+            <a:r>
+              <a:rPr lang="en-US" sz="1300" dirty="0">
+                <a:solidFill>
+                  <a:srgbClr val="1C2833"/>
+                </a:solidFill>
+                <a:latin typeface="Georgia" pitchFamily="34" charset="0"/>
+                <a:ea typeface="Georgia" pitchFamily="34" charset="-122"/>
+                <a:cs typeface="Georgia" pitchFamily="34" charset="-120"/>
+              </a:rPr>
+              <a:t> — </a:t>
+            </a:r>
+            <a:pPr algn="l" indent="0" marL="0">
+              <a:lnSpc>
+                <a:spcPts val="1820"/>
+              </a:lnSpc>
+              <a:spcBef>
+                <a:spcPts val="300"/>
+              </a:spcBef>
+              <a:spcAft>
+                <a:spcPts val="300"/>
+              </a:spcAft>
+              <a:buNone/>
+            </a:pPr>
+            <a:r>
+              <a:rPr lang="en-US" sz="1300" i="1" dirty="0">
+                <a:solidFill>
+                  <a:srgbClr val="1C2833"/>
+                </a:solidFill>
+                <a:latin typeface="Georgia" pitchFamily="34" charset="0"/>
+                <a:ea typeface="Georgia" pitchFamily="34" charset="-122"/>
+                <a:cs typeface="Georgia" pitchFamily="34" charset="-120"/>
+              </a:rPr>
+              <a:t>Gaṅgā, Yamunā, Sarasvatī, Sindhu, Godāvarī, Narmadā, Kāverī</a:t>
+            </a:r>
+            <a:pPr algn="l" indent="0" marL="0">
+              <a:lnSpc>
+                <a:spcPts val="1820"/>
+              </a:lnSpc>
+              <a:spcBef>
+                <a:spcPts val="300"/>
+              </a:spcBef>
+              <a:spcAft>
+                <a:spcPts val="300"/>
+              </a:spcAft>
+              <a:buNone/>
+            </a:pPr>
+            <a:r>
+              <a:rPr lang="en-US" sz="1300" dirty="0">
+                <a:solidFill>
+                  <a:srgbClr val="1C2833"/>
+                </a:solidFill>
+                <a:latin typeface="Georgia" pitchFamily="34" charset="0"/>
+                <a:ea typeface="Georgia" pitchFamily="34" charset="-122"/>
+                <a:cs typeface="Georgia" pitchFamily="34" charset="-120"/>
+              </a:rPr>
+              <a:t>.</a:t>
+            </a:r>
+            <a:endParaRPr lang="en-US" sz="1300" dirty="0"/>
+          </a:p>
+        </p:txBody>
+      </p:sp>
+      <p:sp>
+        <p:nvSpPr>
+          <p:cNvPr id="7" name="Text 5"/>
+          <p:cNvSpPr/>
+          <p:nvPr/>
+        </p:nvSpPr>
+        <p:spPr>
+          <a:xfrm>
+            <a:off x="692051" y="1343174"/>
+            <a:ext cx="7973389" cy="230981"/>
+          </a:xfrm>
+          <a:prstGeom prst="rect">
+            <a:avLst/>
+          </a:prstGeom>
+          <a:noFill/>
+          <a:ln/>
+        </p:spPr>
+        <p:txBody>
+          <a:bodyPr wrap="square" lIns="0" tIns="0" rIns="0" bIns="0" rtlCol="0" anchor="t"/>
+          <a:lstStyle/>
+          <a:p>
+            <a:pPr algn="l" indent="0" marL="0">
+              <a:lnSpc>
+                <a:spcPts val="1820"/>
+              </a:lnSpc>
+              <a:spcBef>
+                <a:spcPts val="300"/>
+              </a:spcBef>
+              <a:spcAft>
+                <a:spcPts val="300"/>
+              </a:spcAft>
+              <a:buNone/>
+            </a:pPr>
+            <a:r>
+              <a:rPr lang="en-US" sz="1300" i="1" dirty="0">
+                <a:solidFill>
+                  <a:srgbClr val="1C2833"/>
+                </a:solidFill>
+                <a:latin typeface="Georgia" pitchFamily="34" charset="0"/>
+                <a:ea typeface="Georgia" pitchFamily="34" charset="-122"/>
+                <a:cs typeface="Georgia" pitchFamily="34" charset="-120"/>
+              </a:rPr>
+              <a:t>The invocation chanted before bathing or pouring water:</a:t>
+            </a:r>
+            <a:endParaRPr lang="en-US" sz="1300" dirty="0"/>
+          </a:p>
+        </p:txBody>
+      </p:sp>
+      <p:sp>
+        <p:nvSpPr>
+          <p:cNvPr id="8" name="Text 6"/>
+          <p:cNvSpPr/>
+          <p:nvPr/>
+        </p:nvSpPr>
+        <p:spPr>
+          <a:xfrm>
+            <a:off x="692051" y="1612255"/>
+            <a:ext cx="7973389" cy="230981"/>
+          </a:xfrm>
+          <a:prstGeom prst="rect">
+            <a:avLst/>
+          </a:prstGeom>
+          <a:noFill/>
+          <a:ln/>
+        </p:spPr>
+        <p:txBody>
+          <a:bodyPr wrap="square" lIns="0" tIns="0" rIns="0" bIns="0" rtlCol="0" anchor="t"/>
+          <a:lstStyle/>
+          <a:p>
+            <a:pPr algn="l" indent="0" marL="0">
+              <a:lnSpc>
+                <a:spcPts val="1820"/>
+              </a:lnSpc>
+              <a:spcBef>
+                <a:spcPts val="300"/>
+              </a:spcBef>
+              <a:spcAft>
+                <a:spcPts val="300"/>
+              </a:spcAft>
+              <a:buNone/>
+            </a:pPr>
+            <a:r>
+              <a:rPr lang="en-US" sz="1300" i="1" dirty="0">
+                <a:solidFill>
+                  <a:srgbClr val="1C2833"/>
+                </a:solidFill>
+                <a:latin typeface="Georgia" pitchFamily="34" charset="0"/>
+                <a:ea typeface="Georgia" pitchFamily="34" charset="-122"/>
+                <a:cs typeface="Georgia" pitchFamily="34" charset="-120"/>
+              </a:rPr>
+              <a:t>&gt; "O Gaṅgā, Yamunā, Godāvarī, Sarasvatī, Narmadā, Sindhu, Kāverī — be present in this water."</a:t>
+            </a:r>
+            <a:endParaRPr lang="en-US" sz="1300" dirty="0"/>
+          </a:p>
+        </p:txBody>
+      </p:sp>
+      <p:sp>
+        <p:nvSpPr>
+          <p:cNvPr id="9" name="Text 7"/>
+          <p:cNvSpPr/>
+          <p:nvPr/>
+        </p:nvSpPr>
+        <p:spPr>
+          <a:xfrm>
+            <a:off x="692051" y="1881336"/>
+            <a:ext cx="7973389" cy="461963"/>
+          </a:xfrm>
+          <a:prstGeom prst="rect">
+            <a:avLst/>
+          </a:prstGeom>
+          <a:noFill/>
+          <a:ln/>
+        </p:spPr>
+        <p:txBody>
+          <a:bodyPr wrap="square" lIns="0" tIns="0" rIns="0" bIns="0" rtlCol="0" anchor="t"/>
+          <a:lstStyle/>
+          <a:p>
+            <a:pPr algn="l" indent="0" marL="0">
+              <a:lnSpc>
+                <a:spcPts val="1820"/>
+              </a:lnSpc>
+              <a:spcBef>
+                <a:spcPts val="300"/>
+              </a:spcBef>
+              <a:spcAft>
+                <a:spcPts val="300"/>
+              </a:spcAft>
+              <a:buNone/>
+            </a:pPr>
+            <a:r>
+              <a:rPr lang="en-US" sz="1300" i="1" dirty="0">
+                <a:solidFill>
+                  <a:srgbClr val="1C2833"/>
+                </a:solidFill>
+                <a:latin typeface="Georgia" pitchFamily="34" charset="0"/>
+                <a:ea typeface="Georgia" pitchFamily="34" charset="-122"/>
+                <a:cs typeface="Georgia" pitchFamily="34" charset="-120"/>
+              </a:rPr>
+              <a:t>In Indic thought, sacred = protected. When a river is sacred, you do not pollute it, drain it, or treat it as private property.</a:t>
+            </a:r>
+            <a:endParaRPr lang="en-US" sz="1300" dirty="0"/>
+          </a:p>
+        </p:txBody>
+      </p:sp>
+      <p:sp>
+        <p:nvSpPr>
+          <p:cNvPr id="10" name="Text 8"/>
+          <p:cNvSpPr/>
+          <p:nvPr/>
+        </p:nvSpPr>
+        <p:spPr>
+          <a:xfrm>
+            <a:off x="692051" y="2381399"/>
+            <a:ext cx="7973389" cy="692944"/>
+          </a:xfrm>
+          <a:prstGeom prst="rect">
+            <a:avLst/>
+          </a:prstGeom>
+          <a:noFill/>
+          <a:ln/>
+        </p:spPr>
+        <p:txBody>
+          <a:bodyPr wrap="square" lIns="0" tIns="0" rIns="0" bIns="0" rtlCol="0" anchor="t"/>
+          <a:lstStyle/>
+          <a:p>
+            <a:pPr algn="l" indent="0" marL="0">
+              <a:lnSpc>
+                <a:spcPts val="1820"/>
+              </a:lnSpc>
+              <a:spcBef>
+                <a:spcPts val="300"/>
+              </a:spcBef>
+              <a:spcAft>
+                <a:spcPts val="300"/>
+              </a:spcAft>
+              <a:buNone/>
+            </a:pPr>
+            <a:r>
+              <a:rPr lang="en-US" sz="1300" b="1" i="1" dirty="0">
+                <a:solidFill>
+                  <a:srgbClr val="1C2833"/>
+                </a:solidFill>
+                <a:latin typeface="Georgia" pitchFamily="34" charset="0"/>
+                <a:ea typeface="Georgia" pitchFamily="34" charset="-122"/>
+                <a:cs typeface="Georgia" pitchFamily="34" charset="-120"/>
+              </a:rPr>
+              <a:t>But</a:t>
+            </a:r>
+            <a:pPr algn="l" indent="0" marL="0">
+              <a:lnSpc>
+                <a:spcPts val="1820"/>
+              </a:lnSpc>
+              <a:spcBef>
+                <a:spcPts val="300"/>
+              </a:spcBef>
+              <a:spcAft>
+                <a:spcPts val="300"/>
+              </a:spcAft>
+              <a:buNone/>
+            </a:pPr>
+            <a:r>
+              <a:rPr lang="en-US" sz="1300" dirty="0">
+                <a:solidFill>
+                  <a:srgbClr val="1C2833"/>
+                </a:solidFill>
+                <a:latin typeface="Georgia" pitchFamily="34" charset="0"/>
+                <a:ea typeface="Georgia" pitchFamily="34" charset="-122"/>
+                <a:cs typeface="Georgia" pitchFamily="34" charset="-120"/>
+              </a:rPr>
+              <a:t> sacred-status alone has not stopped industrial pollution in the urban stretches. The tradition supplies the </a:t>
+            </a:r>
+            <a:pPr algn="l" indent="0" marL="0">
+              <a:lnSpc>
+                <a:spcPts val="1820"/>
+              </a:lnSpc>
+              <a:spcBef>
+                <a:spcPts val="300"/>
+              </a:spcBef>
+              <a:spcAft>
+                <a:spcPts val="300"/>
+              </a:spcAft>
+              <a:buNone/>
+            </a:pPr>
+            <a:r>
+              <a:rPr lang="en-US" sz="1300" i="1" dirty="0">
+                <a:solidFill>
+                  <a:srgbClr val="1C2833"/>
+                </a:solidFill>
+                <a:latin typeface="Georgia" pitchFamily="34" charset="0"/>
+                <a:ea typeface="Georgia" pitchFamily="34" charset="-122"/>
+                <a:cs typeface="Georgia" pitchFamily="34" charset="-120"/>
+              </a:rPr>
+              <a:t>attitude of care</a:t>
+            </a:r>
+            <a:pPr algn="l" indent="0" marL="0">
+              <a:lnSpc>
+                <a:spcPts val="1820"/>
+              </a:lnSpc>
+              <a:spcBef>
+                <a:spcPts val="300"/>
+              </a:spcBef>
+              <a:spcAft>
+                <a:spcPts val="300"/>
+              </a:spcAft>
+              <a:buNone/>
+            </a:pPr>
+            <a:r>
+              <a:rPr lang="en-US" sz="1300" dirty="0">
+                <a:solidFill>
+                  <a:srgbClr val="1C2833"/>
+                </a:solidFill>
+                <a:latin typeface="Georgia" pitchFamily="34" charset="0"/>
+                <a:ea typeface="Georgia" pitchFamily="34" charset="-122"/>
+                <a:cs typeface="Georgia" pitchFamily="34" charset="-120"/>
+              </a:rPr>
+              <a:t>; modern science and policy must supply the </a:t>
+            </a:r>
+            <a:pPr algn="l" indent="0" marL="0">
+              <a:lnSpc>
+                <a:spcPts val="1820"/>
+              </a:lnSpc>
+              <a:spcBef>
+                <a:spcPts val="300"/>
+              </a:spcBef>
+              <a:spcAft>
+                <a:spcPts val="300"/>
+              </a:spcAft>
+              <a:buNone/>
+            </a:pPr>
+            <a:r>
+              <a:rPr lang="en-US" sz="1300" i="1" dirty="0">
+                <a:solidFill>
+                  <a:srgbClr val="1C2833"/>
+                </a:solidFill>
+                <a:latin typeface="Georgia" pitchFamily="34" charset="0"/>
+                <a:ea typeface="Georgia" pitchFamily="34" charset="-122"/>
+                <a:cs typeface="Georgia" pitchFamily="34" charset="-120"/>
+              </a:rPr>
+              <a:t>engineering and the accountability</a:t>
+            </a:r>
+            <a:pPr algn="l" indent="0" marL="0">
+              <a:lnSpc>
+                <a:spcPts val="1820"/>
+              </a:lnSpc>
+              <a:spcBef>
+                <a:spcPts val="300"/>
+              </a:spcBef>
+              <a:spcAft>
+                <a:spcPts val="300"/>
+              </a:spcAft>
+              <a:buNone/>
+            </a:pPr>
+            <a:r>
+              <a:rPr lang="en-US" sz="1300" dirty="0">
+                <a:solidFill>
+                  <a:srgbClr val="1C2833"/>
+                </a:solidFill>
+                <a:latin typeface="Georgia" pitchFamily="34" charset="0"/>
+                <a:ea typeface="Georgia" pitchFamily="34" charset="-122"/>
+                <a:cs typeface="Georgia" pitchFamily="34" charset="-120"/>
+              </a:rPr>
+              <a:t>. Both are needed.</a:t>
+            </a:r>
+            <a:endParaRPr lang="en-US" sz="1300" dirty="0"/>
+          </a:p>
+        </p:txBody>
+      </p:sp>
+      <p:sp>
+        <p:nvSpPr>
+          <p:cNvPr id="11" name="Text 9"/>
+          <p:cNvSpPr/>
+          <p:nvPr/>
+        </p:nvSpPr>
+        <p:spPr>
+          <a:xfrm>
+            <a:off x="406301" y="4434929"/>
+            <a:ext cx="8498026" cy="213271"/>
+          </a:xfrm>
+          <a:prstGeom prst="rect">
+            <a:avLst/>
+          </a:prstGeom>
+          <a:noFill/>
+          <a:ln/>
+        </p:spPr>
+        <p:txBody>
+          <a:bodyPr wrap="square" lIns="0" tIns="0" rIns="0" bIns="0" rtlCol="0" anchor="t"/>
+          <a:lstStyle/>
+          <a:p>
+            <a:pPr algn="l" indent="0" marL="0">
+              <a:lnSpc>
+                <a:spcPts val="1680"/>
+              </a:lnSpc>
+              <a:spcBef>
+                <a:spcPts val="300"/>
+              </a:spcBef>
+              <a:spcAft>
+                <a:spcPts val="300"/>
+              </a:spcAft>
+              <a:buNone/>
+            </a:pPr>
+            <a:r>
+              <a:rPr lang="en-US" sz="1200" dirty="0">
+                <a:solidFill>
+                  <a:srgbClr val="1C2833"/>
+                </a:solidFill>
+                <a:latin typeface="Arial" pitchFamily="34" charset="0"/>
+                <a:ea typeface="Arial" pitchFamily="34" charset="-122"/>
+                <a:cs typeface="Arial" pitchFamily="34" charset="-120"/>
+              </a:rPr>
+              <a:t>Middle ·  · IKS Curriculum</a:t>
+            </a:r>
+            <a:endParaRPr lang="en-US" sz="1200" dirty="0"/>
+          </a:p>
+        </p:txBody>
+      </p:sp>
+    </p:spTree>
+  </p:cSld>
+  <p:clrMapOvr>
+    <a:masterClrMapping/>
+  </p:clrMapOvr>
+</p:sld>
+</file>
+
+<file path=ppt/slides/slide16.xml><?xml version="1.0" encoding="utf-8"?>
+<p:sld xmlns:a="http://schemas.openxmlformats.org/drawingml/2006/main" xmlns:r="http://schemas.openxmlformats.org/officeDocument/2006/relationships" xmlns:p="http://schemas.openxmlformats.org/presentationml/2006/main">
+  <p:cSld name="Slide 16">
+    <p:bg>
+      <p:bgPr>
+        <a:solidFill>
+          <a:srgbClr val="FFFFFF"/>
+        </a:solidFill>
+      </p:bgPr>
+    </p:bg>
+    <p:spTree>
+      <p:nvGrpSpPr>
+        <p:cNvPr id="1" name=""/>
+        <p:cNvGrpSpPr/>
+        <p:nvPr/>
+      </p:nvGrpSpPr>
+      <p:grpSpPr>
+        <a:xfrm>
+          <a:off x="0" y="0"/>
+          <a:ext cx="0" cy="0"/>
+          <a:chOff x="0" y="0"/>
+          <a:chExt cx="0" cy="0"/>
+        </a:xfrm>
+      </p:grpSpPr>
+      <p:sp>
+        <p:nvSpPr>
+          <p:cNvPr id="2" name="Text 0"/>
+          <p:cNvSpPr/>
+          <p:nvPr/>
+        </p:nvSpPr>
+        <p:spPr>
+          <a:xfrm>
+            <a:off x="0" y="0"/>
+            <a:ext cx="9144000" cy="101501"/>
+          </a:xfrm>
+          <a:prstGeom prst="rect">
+            <a:avLst/>
+          </a:prstGeom>
+          <a:solidFill>
+            <a:srgbClr val="277884"/>
+          </a:solidFill>
+          <a:ln/>
+        </p:spPr>
+        <p:txBody>
+          <a:bodyPr wrap="square" rtlCol="0" anchor="ctr"/>
+          <a:lstStyle/>
+          <a:p>
+            <a:pPr indent="0" marL="0">
+              <a:buNone/>
+            </a:pPr>
+            <a:endParaRPr lang="en-US" dirty="0"/>
+          </a:p>
+        </p:txBody>
+      </p:sp>
+      <p:sp>
+        <p:nvSpPr>
+          <p:cNvPr id="3" name="Text 1"/>
+          <p:cNvSpPr/>
+          <p:nvPr/>
+        </p:nvSpPr>
+        <p:spPr>
+          <a:xfrm>
+            <a:off x="406301" y="457051"/>
+            <a:ext cx="8498026" cy="274290"/>
+          </a:xfrm>
+          <a:prstGeom prst="rect">
+            <a:avLst/>
+          </a:prstGeom>
+          <a:noFill/>
+          <a:ln/>
+        </p:spPr>
+        <p:txBody>
+          <a:bodyPr wrap="square" lIns="0" tIns="0" rIns="0" bIns="0" rtlCol="0" anchor="t"/>
+          <a:lstStyle/>
+          <a:p>
+            <a:pPr algn="l" indent="0" marL="0">
+              <a:lnSpc>
+                <a:spcPts val="2160"/>
+              </a:lnSpc>
+              <a:spcBef>
+                <a:spcPts val="600"/>
+              </a:spcBef>
+              <a:spcAft>
+                <a:spcPts val="800"/>
+              </a:spcAft>
+              <a:buNone/>
+            </a:pPr>
+            <a:r>
+              <a:rPr lang="en-US" sz="1800" b="1" dirty="0">
+                <a:solidFill>
+                  <a:srgbClr val="FE4447"/>
+                </a:solidFill>
+                <a:latin typeface="Georgia" pitchFamily="34" charset="0"/>
+                <a:ea typeface="Georgia" pitchFamily="34" charset="-122"/>
+                <a:cs typeface="Georgia" pitchFamily="34" charset="-120"/>
+              </a:rPr>
+              <a:t>Homework</a:t>
+            </a:r>
+            <a:endParaRPr lang="en-US" sz="1800" dirty="0"/>
+          </a:p>
+        </p:txBody>
+      </p:sp>
+      <p:sp>
+        <p:nvSpPr>
+          <p:cNvPr id="4" name="Text 2"/>
+          <p:cNvSpPr/>
+          <p:nvPr/>
+        </p:nvSpPr>
+        <p:spPr>
+          <a:xfrm>
+            <a:off x="634901" y="883593"/>
+            <a:ext cx="8102798" cy="487561"/>
+          </a:xfrm>
+          <a:prstGeom prst="rect">
+            <a:avLst/>
+          </a:prstGeom>
+          <a:noFill/>
+          <a:ln/>
+        </p:spPr>
+        <p:txBody>
+          <a:bodyPr wrap="square" lIns="0" tIns="0" rIns="0" bIns="0" rtlCol="0" anchor="t"/>
+          <a:lstStyle/>
+          <a:p>
+            <a:pPr algn="l" marL="342900" indent="-342900">
+              <a:lnSpc>
+                <a:spcPts val="1620"/>
+              </a:lnSpc>
+              <a:spcAft>
+                <a:spcPts val="300"/>
+              </a:spcAft>
+              <a:buSzPct val="100000"/>
+              <a:buChar char="•"/>
+            </a:pPr>
+            <a:r>
+              <a:rPr lang="en-US" sz="1200" dirty="0">
+                <a:solidFill>
+                  <a:srgbClr val="1C2833"/>
+                </a:solidFill>
+                <a:latin typeface="Arial" pitchFamily="34" charset="0"/>
+                <a:ea typeface="Arial" pitchFamily="34" charset="-122"/>
+                <a:cs typeface="Arial" pitchFamily="34" charset="-120"/>
+              </a:rPr>
+              <a:t>Find out one thing about your nearest river (or water body) that you didn't know yesterday. Examples: the river's name, where it starts, where it joins another river, whether it is monitored. Write 3 sentences.</a:t>
+            </a:r>
+            <a:endParaRPr lang="en-US" sz="1200" dirty="0"/>
+          </a:p>
+        </p:txBody>
+      </p:sp>
+      <p:sp>
+        <p:nvSpPr>
+          <p:cNvPr id="5" name="Text 3"/>
+          <p:cNvSpPr/>
+          <p:nvPr/>
+        </p:nvSpPr>
+        <p:spPr>
+          <a:xfrm>
+            <a:off x="406301" y="4434929"/>
+            <a:ext cx="8498026" cy="213271"/>
+          </a:xfrm>
+          <a:prstGeom prst="rect">
+            <a:avLst/>
+          </a:prstGeom>
+          <a:noFill/>
+          <a:ln/>
+        </p:spPr>
+        <p:txBody>
+          <a:bodyPr wrap="square" lIns="0" tIns="0" rIns="0" bIns="0" rtlCol="0" anchor="t"/>
+          <a:lstStyle/>
+          <a:p>
+            <a:pPr algn="l" indent="0" marL="0">
+              <a:lnSpc>
+                <a:spcPts val="1680"/>
+              </a:lnSpc>
+              <a:spcBef>
+                <a:spcPts val="300"/>
+              </a:spcBef>
+              <a:spcAft>
+                <a:spcPts val="300"/>
+              </a:spcAft>
+              <a:buNone/>
+            </a:pPr>
+            <a:r>
+              <a:rPr lang="en-US" sz="1200" dirty="0">
+                <a:solidFill>
+                  <a:srgbClr val="1C2833"/>
+                </a:solidFill>
+                <a:latin typeface="Arial" pitchFamily="34" charset="0"/>
+                <a:ea typeface="Arial" pitchFamily="34" charset="-122"/>
+                <a:cs typeface="Arial" pitchFamily="34" charset="-120"/>
+              </a:rPr>
+              <a:t>Middle ·  · IKS Curriculum</a:t>
+            </a:r>
+            <a:endParaRPr lang="en-US" sz="1200" dirty="0"/>
+          </a:p>
+        </p:txBody>
+      </p:sp>
+    </p:spTree>
+  </p:cSld>
+  <p:clrMapOvr>
+    <a:masterClrMapping/>
+  </p:clrMapOvr>
+</p:sld>
+</file>
+
+<file path=ppt/slides/slide17.xml><?xml version="1.0" encoding="utf-8"?>
+<p:sld xmlns:a="http://schemas.openxmlformats.org/drawingml/2006/main" xmlns:r="http://schemas.openxmlformats.org/officeDocument/2006/relationships" xmlns:p="http://schemas.openxmlformats.org/presentationml/2006/main">
+  <p:cSld name="Slide 17">
+    <p:bg>
+      <p:bgPr>
+        <a:solidFill>
+          <a:srgbClr val="FFFFFF"/>
+        </a:solidFill>
+      </p:bgPr>
+    </p:bg>
+    <p:spTree>
+      <p:nvGrpSpPr>
+        <p:cNvPr id="1" name=""/>
+        <p:cNvGrpSpPr/>
+        <p:nvPr/>
+      </p:nvGrpSpPr>
+      <p:grpSpPr>
+        <a:xfrm>
+          <a:off x="0" y="0"/>
+          <a:ext cx="0" cy="0"/>
+          <a:chOff x="0" y="0"/>
+          <a:chExt cx="0" cy="0"/>
+        </a:xfrm>
+      </p:grpSpPr>
+      <p:sp>
+        <p:nvSpPr>
+          <p:cNvPr id="2" name="Text 0"/>
+          <p:cNvSpPr/>
+          <p:nvPr/>
+        </p:nvSpPr>
+        <p:spPr>
+          <a:xfrm>
+            <a:off x="0" y="0"/>
+            <a:ext cx="9144000" cy="101501"/>
+          </a:xfrm>
+          <a:prstGeom prst="rect">
+            <a:avLst/>
+          </a:prstGeom>
+          <a:solidFill>
+            <a:srgbClr val="277884"/>
+          </a:solidFill>
+          <a:ln/>
+        </p:spPr>
+        <p:txBody>
+          <a:bodyPr wrap="square" rtlCol="0" anchor="ctr"/>
+          <a:lstStyle/>
+          <a:p>
+            <a:pPr indent="0" marL="0">
+              <a:buNone/>
+            </a:pPr>
+            <a:endParaRPr lang="en-US" dirty="0"/>
+          </a:p>
+        </p:txBody>
+      </p:sp>
+      <p:sp>
+        <p:nvSpPr>
+          <p:cNvPr id="3" name="Text 1"/>
+          <p:cNvSpPr/>
+          <p:nvPr/>
+        </p:nvSpPr>
+        <p:spPr>
+          <a:xfrm>
+            <a:off x="406301" y="457051"/>
+            <a:ext cx="8498026" cy="274290"/>
+          </a:xfrm>
+          <a:prstGeom prst="rect">
+            <a:avLst/>
+          </a:prstGeom>
+          <a:noFill/>
+          <a:ln/>
+        </p:spPr>
+        <p:txBody>
+          <a:bodyPr wrap="square" lIns="0" tIns="0" rIns="0" bIns="0" rtlCol="0" anchor="t"/>
+          <a:lstStyle/>
+          <a:p>
+            <a:pPr algn="l" indent="0" marL="0">
+              <a:lnSpc>
+                <a:spcPts val="2160"/>
+              </a:lnSpc>
+              <a:spcBef>
+                <a:spcPts val="600"/>
+              </a:spcBef>
+              <a:spcAft>
+                <a:spcPts val="800"/>
+              </a:spcAft>
+              <a:buNone/>
+            </a:pPr>
+            <a:r>
+              <a:rPr lang="en-US" sz="1800" b="1" dirty="0">
+                <a:solidFill>
+                  <a:srgbClr val="FE4447"/>
+                </a:solidFill>
+                <a:latin typeface="Georgia" pitchFamily="34" charset="0"/>
+                <a:ea typeface="Georgia" pitchFamily="34" charset="-122"/>
+                <a:cs typeface="Georgia" pitchFamily="34" charset="-120"/>
+              </a:rPr>
+              <a:t>Differentiation</a:t>
+            </a:r>
+            <a:endParaRPr lang="en-US" sz="1800" dirty="0"/>
+          </a:p>
+        </p:txBody>
+      </p:sp>
+      <p:sp>
+        <p:nvSpPr>
+          <p:cNvPr id="4" name="Text 2"/>
+          <p:cNvSpPr/>
+          <p:nvPr/>
+        </p:nvSpPr>
+        <p:spPr>
+          <a:xfrm>
+            <a:off x="634901" y="883593"/>
+            <a:ext cx="8102798" cy="1142702"/>
+          </a:xfrm>
+          <a:prstGeom prst="rect">
+            <a:avLst/>
+          </a:prstGeom>
+          <a:noFill/>
+          <a:ln/>
+        </p:spPr>
+        <p:txBody>
+          <a:bodyPr wrap="square" lIns="0" tIns="0" rIns="0" bIns="0" rtlCol="0" anchor="t"/>
+          <a:lstStyle/>
+          <a:p>
+            <a:pPr algn="l" marL="342900" indent="-342900">
+              <a:lnSpc>
+                <a:spcPts val="1620"/>
+              </a:lnSpc>
+              <a:spcAft>
+                <a:spcPts val="300"/>
+              </a:spcAft>
+              <a:buSzPct val="100000"/>
+              <a:buChar char="•"/>
+            </a:pPr>
+            <a:r>
+              <a:rPr lang="en-US" sz="1200" b="1" dirty="0">
+                <a:solidFill>
+                  <a:srgbClr val="1C2833"/>
+                </a:solidFill>
+                <a:latin typeface="Arial" pitchFamily="34" charset="0"/>
+                <a:ea typeface="Arial" pitchFamily="34" charset="-122"/>
+                <a:cs typeface="Arial" pitchFamily="34" charset="-120"/>
+              </a:rPr>
+              <a:t>One tier up:</a:t>
+            </a:r>
+            <a:pPr algn="l" indent="0" marL="0">
+              <a:lnSpc>
+                <a:spcPts val="1620"/>
+              </a:lnSpc>
+              <a:spcAft>
+                <a:spcPts val="300"/>
+              </a:spcAft>
+              <a:buNone/>
+            </a:pPr>
+            <a:r>
+              <a:rPr lang="en-US" sz="1200" dirty="0">
+                <a:solidFill>
+                  <a:srgbClr val="1C2833"/>
+                </a:solidFill>
+                <a:latin typeface="Arial" pitchFamily="34" charset="0"/>
+                <a:ea typeface="Arial" pitchFamily="34" charset="-122"/>
+                <a:cs typeface="Arial" pitchFamily="34" charset="-120"/>
+              </a:rPr>
+              <a:t> The Sarasvatī in the </a:t>
+            </a:r>
+            <a:pPr algn="l" indent="0" marL="0">
+              <a:lnSpc>
+                <a:spcPts val="1620"/>
+              </a:lnSpc>
+              <a:spcAft>
+                <a:spcPts val="300"/>
+              </a:spcAft>
+              <a:buNone/>
+            </a:pPr>
+            <a:r>
+              <a:rPr lang="en-US" sz="1200" i="1" dirty="0">
+                <a:solidFill>
+                  <a:srgbClr val="1C2833"/>
+                </a:solidFill>
+                <a:latin typeface="Arial" pitchFamily="34" charset="0"/>
+                <a:ea typeface="Arial" pitchFamily="34" charset="-122"/>
+                <a:cs typeface="Arial" pitchFamily="34" charset="-120"/>
+              </a:rPr>
+              <a:t>sapta-sindhu</a:t>
+            </a:r>
+            <a:pPr algn="l" indent="0" marL="0">
+              <a:lnSpc>
+                <a:spcPts val="1620"/>
+              </a:lnSpc>
+              <a:spcAft>
+                <a:spcPts val="300"/>
+              </a:spcAft>
+              <a:buNone/>
+            </a:pPr>
+            <a:r>
+              <a:rPr lang="en-US" sz="1200" dirty="0">
+                <a:solidFill>
+                  <a:srgbClr val="1C2833"/>
+                </a:solidFill>
+                <a:latin typeface="Arial" pitchFamily="34" charset="0"/>
+                <a:ea typeface="Arial" pitchFamily="34" charset="-122"/>
+                <a:cs typeface="Arial" pitchFamily="34" charset="-120"/>
+              </a:rPr>
+              <a:t> list is a "lost river" — the riverbed has been mapped by satellite (Ghaggar-Hakra system) but the river no longer flows. Look up one source on this and bring it tomorrow. What does it mean to call a </a:t>
+            </a:r>
+            <a:pPr algn="l" indent="0" marL="0">
+              <a:lnSpc>
+                <a:spcPts val="1620"/>
+              </a:lnSpc>
+              <a:spcAft>
+                <a:spcPts val="300"/>
+              </a:spcAft>
+              <a:buNone/>
+            </a:pPr>
+            <a:r>
+              <a:rPr lang="en-US" sz="1200" i="1" dirty="0">
+                <a:solidFill>
+                  <a:srgbClr val="1C2833"/>
+                </a:solidFill>
+                <a:latin typeface="Arial" pitchFamily="34" charset="0"/>
+                <a:ea typeface="Arial" pitchFamily="34" charset="-122"/>
+                <a:cs typeface="Arial" pitchFamily="34" charset="-120"/>
+              </a:rPr>
+              <a:t>dry riverbed</a:t>
+            </a:r>
+            <a:pPr algn="l" indent="0" marL="0">
+              <a:lnSpc>
+                <a:spcPts val="1620"/>
+              </a:lnSpc>
+              <a:spcAft>
+                <a:spcPts val="300"/>
+              </a:spcAft>
+              <a:buNone/>
+            </a:pPr>
+            <a:r>
+              <a:rPr lang="en-US" sz="1200" dirty="0">
+                <a:solidFill>
+                  <a:srgbClr val="1C2833"/>
+                </a:solidFill>
+                <a:latin typeface="Arial" pitchFamily="34" charset="0"/>
+                <a:ea typeface="Arial" pitchFamily="34" charset="-122"/>
+                <a:cs typeface="Arial" pitchFamily="34" charset="-120"/>
+              </a:rPr>
+              <a:t> sacred?</a:t>
+            </a:r>
+            <a:endParaRPr lang="en-US" sz="1200" dirty="0"/>
+          </a:p>
+          <a:p>
+            <a:pPr algn="l" marL="342900" indent="-342900">
+              <a:lnSpc>
+                <a:spcPts val="1620"/>
+              </a:lnSpc>
+              <a:spcAft>
+                <a:spcPts val="300"/>
+              </a:spcAft>
+              <a:buSzPct val="100000"/>
+              <a:buChar char="•"/>
+            </a:pPr>
+            <a:r>
+              <a:rPr lang="en-US" sz="1200" b="1" dirty="0">
+                <a:solidFill>
+                  <a:srgbClr val="1C2833"/>
+                </a:solidFill>
+                <a:latin typeface="Arial" pitchFamily="34" charset="0"/>
+                <a:ea typeface="Arial" pitchFamily="34" charset="-122"/>
+                <a:cs typeface="Arial" pitchFamily="34" charset="-120"/>
+              </a:rPr>
+              <a:t>One tier down:</a:t>
+            </a:r>
+            <a:pPr algn="l" indent="0" marL="0">
+              <a:lnSpc>
+                <a:spcPts val="1620"/>
+              </a:lnSpc>
+              <a:spcAft>
+                <a:spcPts val="300"/>
+              </a:spcAft>
+              <a:buNone/>
+            </a:pPr>
+            <a:r>
+              <a:rPr lang="en-US" sz="1200" dirty="0">
+                <a:solidFill>
+                  <a:srgbClr val="1C2833"/>
+                </a:solidFill>
+                <a:latin typeface="Arial" pitchFamily="34" charset="0"/>
+                <a:ea typeface="Arial" pitchFamily="34" charset="-122"/>
+                <a:cs typeface="Arial" pitchFamily="34" charset="-120"/>
+              </a:rPr>
+              <a:t> Memorise just three river names — Gaṅgā, Yamunā, Kāverī (north, north, south). The other four can come over the week.</a:t>
+            </a:r>
+            <a:endParaRPr lang="en-US" sz="1200" dirty="0"/>
+          </a:p>
+        </p:txBody>
+      </p:sp>
+      <p:sp>
+        <p:nvSpPr>
+          <p:cNvPr id="5" name="Text 3"/>
+          <p:cNvSpPr/>
+          <p:nvPr/>
+        </p:nvSpPr>
+        <p:spPr>
+          <a:xfrm>
+            <a:off x="406301" y="4434929"/>
+            <a:ext cx="8498026" cy="213271"/>
+          </a:xfrm>
+          <a:prstGeom prst="rect">
+            <a:avLst/>
+          </a:prstGeom>
+          <a:noFill/>
+          <a:ln/>
+        </p:spPr>
+        <p:txBody>
+          <a:bodyPr wrap="square" lIns="0" tIns="0" rIns="0" bIns="0" rtlCol="0" anchor="t"/>
+          <a:lstStyle/>
+          <a:p>
+            <a:pPr algn="l" indent="0" marL="0">
+              <a:lnSpc>
+                <a:spcPts val="1680"/>
+              </a:lnSpc>
+              <a:spcBef>
+                <a:spcPts val="300"/>
+              </a:spcBef>
+              <a:spcAft>
+                <a:spcPts val="300"/>
+              </a:spcAft>
+              <a:buNone/>
+            </a:pPr>
+            <a:r>
+              <a:rPr lang="en-US" sz="1200" dirty="0">
+                <a:solidFill>
+                  <a:srgbClr val="1C2833"/>
+                </a:solidFill>
+                <a:latin typeface="Arial" pitchFamily="34" charset="0"/>
+                <a:ea typeface="Arial" pitchFamily="34" charset="-122"/>
+                <a:cs typeface="Arial" pitchFamily="34" charset="-120"/>
+              </a:rPr>
+              <a:t>Middle ·  · IKS Curriculum</a:t>
+            </a:r>
+            <a:endParaRPr lang="en-US" sz="1200" dirty="0"/>
+          </a:p>
+        </p:txBody>
+      </p:sp>
+    </p:spTree>
+  </p:cSld>
+  <p:clrMapOvr>
+    <a:masterClrMapping/>
+  </p:clrMapOvr>
+</p:sld>
+</file>
+
+<file path=ppt/slides/slide18.xml><?xml version="1.0" encoding="utf-8"?>
+<p:sld xmlns:a="http://schemas.openxmlformats.org/drawingml/2006/main" xmlns:r="http://schemas.openxmlformats.org/officeDocument/2006/relationships" xmlns:p="http://schemas.openxmlformats.org/presentationml/2006/main">
+  <p:cSld name="Slide 18">
+    <p:bg>
+      <p:bgPr>
+        <a:solidFill>
+          <a:srgbClr val="FFFFFF"/>
+        </a:solidFill>
+      </p:bgPr>
+    </p:bg>
+    <p:spTree>
+      <p:nvGrpSpPr>
+        <p:cNvPr id="1" name=""/>
+        <p:cNvGrpSpPr/>
+        <p:nvPr/>
+      </p:nvGrpSpPr>
+      <p:grpSpPr>
+        <a:xfrm>
+          <a:off x="0" y="0"/>
+          <a:ext cx="0" cy="0"/>
+          <a:chOff x="0" y="0"/>
+          <a:chExt cx="0" cy="0"/>
+        </a:xfrm>
+      </p:grpSpPr>
+      <p:sp>
+        <p:nvSpPr>
+          <p:cNvPr id="2" name="Text 0"/>
+          <p:cNvSpPr/>
+          <p:nvPr/>
+        </p:nvSpPr>
+        <p:spPr>
+          <a:xfrm>
+            <a:off x="0" y="0"/>
+            <a:ext cx="9144000" cy="101501"/>
+          </a:xfrm>
+          <a:prstGeom prst="rect">
+            <a:avLst/>
+          </a:prstGeom>
+          <a:solidFill>
+            <a:srgbClr val="277884"/>
+          </a:solidFill>
+          <a:ln/>
+        </p:spPr>
+        <p:txBody>
+          <a:bodyPr wrap="square" rtlCol="0" anchor="ctr"/>
+          <a:lstStyle/>
+          <a:p>
+            <a:pPr indent="0" marL="0">
+              <a:buNone/>
+            </a:pPr>
+            <a:endParaRPr lang="en-US" dirty="0"/>
+          </a:p>
+        </p:txBody>
+      </p:sp>
+      <p:sp>
+        <p:nvSpPr>
+          <p:cNvPr id="3" name="Text 1"/>
+          <p:cNvSpPr/>
+          <p:nvPr/>
+        </p:nvSpPr>
+        <p:spPr>
+          <a:xfrm>
+            <a:off x="406301" y="457051"/>
+            <a:ext cx="8498026" cy="274290"/>
+          </a:xfrm>
+          <a:prstGeom prst="rect">
+            <a:avLst/>
+          </a:prstGeom>
+          <a:noFill/>
+          <a:ln/>
+        </p:spPr>
+        <p:txBody>
+          <a:bodyPr wrap="square" lIns="0" tIns="0" rIns="0" bIns="0" rtlCol="0" anchor="t"/>
+          <a:lstStyle/>
+          <a:p>
+            <a:pPr algn="l" indent="0" marL="0">
+              <a:lnSpc>
+                <a:spcPts val="2160"/>
+              </a:lnSpc>
+              <a:spcBef>
+                <a:spcPts val="600"/>
+              </a:spcBef>
+              <a:spcAft>
+                <a:spcPts val="800"/>
+              </a:spcAft>
+              <a:buNone/>
+            </a:pPr>
+            <a:r>
+              <a:rPr lang="en-US" sz="1800" b="1" dirty="0">
+                <a:solidFill>
+                  <a:srgbClr val="FE4447"/>
+                </a:solidFill>
+                <a:latin typeface="Georgia" pitchFamily="34" charset="0"/>
+                <a:ea typeface="Georgia" pitchFamily="34" charset="-122"/>
+                <a:cs typeface="Georgia" pitchFamily="34" charset="-120"/>
+              </a:rPr>
+              <a:t>Teacher notes</a:t>
+            </a:r>
+            <a:endParaRPr lang="en-US" sz="1800" dirty="0"/>
+          </a:p>
+        </p:txBody>
+      </p:sp>
+      <p:sp>
+        <p:nvSpPr>
+          <p:cNvPr id="4" name="Text 2"/>
+          <p:cNvSpPr/>
+          <p:nvPr/>
+        </p:nvSpPr>
+        <p:spPr>
+          <a:xfrm>
+            <a:off x="634901" y="883593"/>
+            <a:ext cx="8102798" cy="1386483"/>
+          </a:xfrm>
+          <a:prstGeom prst="rect">
+            <a:avLst/>
+          </a:prstGeom>
+          <a:noFill/>
+          <a:ln/>
+        </p:spPr>
+        <p:txBody>
+          <a:bodyPr wrap="square" lIns="0" tIns="0" rIns="0" bIns="0" rtlCol="0" anchor="t"/>
+          <a:lstStyle/>
+          <a:p>
+            <a:pPr algn="l" marL="342900" indent="-342900">
+              <a:lnSpc>
+                <a:spcPts val="1620"/>
+              </a:lnSpc>
+              <a:spcAft>
+                <a:spcPts val="300"/>
+              </a:spcAft>
+              <a:buSzPct val="100000"/>
+              <a:buChar char="•"/>
+            </a:pPr>
+            <a:r>
+              <a:rPr lang="en-US" sz="1200" dirty="0">
+                <a:solidFill>
+                  <a:srgbClr val="1C2833"/>
+                </a:solidFill>
+                <a:latin typeface="Arial" pitchFamily="34" charset="0"/>
+                <a:ea typeface="Arial" pitchFamily="34" charset="-122"/>
+                <a:cs typeface="Arial" pitchFamily="34" charset="-120"/>
+              </a:rPr>
+              <a:t>Some students will challenge the "sacred = protected" claim with the Gaṅgā being so polluted. Affirm the challenge. The lesson is precisely that ritual reverence without behavioural follow-through is insufficient. The tradition gave a strong starting point; we have not lived up to it.</a:t>
+            </a:r>
+            <a:endParaRPr lang="en-US" sz="1200" dirty="0"/>
+          </a:p>
+          <a:p>
+            <a:pPr algn="l" marL="342900" indent="-342900">
+              <a:lnSpc>
+                <a:spcPts val="1620"/>
+              </a:lnSpc>
+              <a:spcAft>
+                <a:spcPts val="300"/>
+              </a:spcAft>
+              <a:buSzPct val="100000"/>
+              <a:buChar char="•"/>
+            </a:pPr>
+            <a:r>
+              <a:rPr lang="en-US" sz="1200" dirty="0">
+                <a:solidFill>
+                  <a:srgbClr val="1C2833"/>
+                </a:solidFill>
+                <a:latin typeface="Arial" pitchFamily="34" charset="0"/>
+                <a:ea typeface="Arial" pitchFamily="34" charset="-122"/>
+                <a:cs typeface="Arial" pitchFamily="34" charset="-120"/>
+              </a:rPr>
+              <a:t>Avoid politicising the Namami Gange programme. Focus on it as one effort, with whatever results it has had.</a:t>
+            </a:r>
+            <a:endParaRPr lang="en-US" sz="1200" dirty="0"/>
+          </a:p>
+          <a:p>
+            <a:pPr algn="l" marL="342900" indent="-342900">
+              <a:lnSpc>
+                <a:spcPts val="1620"/>
+              </a:lnSpc>
+              <a:spcAft>
+                <a:spcPts val="300"/>
+              </a:spcAft>
+              <a:buSzPct val="100000"/>
+              <a:buChar char="•"/>
+            </a:pPr>
+            <a:r>
+              <a:rPr lang="en-US" sz="1200" dirty="0">
+                <a:solidFill>
+                  <a:srgbClr val="1C2833"/>
+                </a:solidFill>
+                <a:latin typeface="Arial" pitchFamily="34" charset="0"/>
+                <a:ea typeface="Arial" pitchFamily="34" charset="-122"/>
+                <a:cs typeface="Arial" pitchFamily="34" charset="-120"/>
+              </a:rPr>
+              <a:t>Some classes will have students whose families have done </a:t>
+            </a:r>
+            <a:pPr algn="l" indent="0" marL="0">
+              <a:lnSpc>
+                <a:spcPts val="1620"/>
+              </a:lnSpc>
+              <a:spcAft>
+                <a:spcPts val="300"/>
+              </a:spcAft>
+              <a:buNone/>
+            </a:pPr>
+            <a:r>
+              <a:rPr lang="en-US" sz="1200" i="1" dirty="0">
+                <a:solidFill>
+                  <a:srgbClr val="1C2833"/>
+                </a:solidFill>
+                <a:latin typeface="Arial" pitchFamily="34" charset="0"/>
+                <a:ea typeface="Arial" pitchFamily="34" charset="-122"/>
+                <a:cs typeface="Arial" pitchFamily="34" charset="-120"/>
+              </a:rPr>
+              <a:t>snāna</a:t>
+            </a:r>
+            <a:pPr algn="l" indent="0" marL="0">
+              <a:lnSpc>
+                <a:spcPts val="1620"/>
+              </a:lnSpc>
+              <a:spcAft>
+                <a:spcPts val="300"/>
+              </a:spcAft>
+              <a:buNone/>
+            </a:pPr>
+            <a:r>
+              <a:rPr lang="en-US" sz="1200" dirty="0">
+                <a:solidFill>
+                  <a:srgbClr val="1C2833"/>
+                </a:solidFill>
+                <a:latin typeface="Arial" pitchFamily="34" charset="0"/>
+                <a:ea typeface="Arial" pitchFamily="34" charset="-122"/>
+                <a:cs typeface="Arial" pitchFamily="34" charset="-120"/>
+              </a:rPr>
+              <a:t> at a sacred river. Invite them to share if they want; do not single them out. The lesson is enriched by lived experience.</a:t>
+            </a:r>
+            <a:endParaRPr lang="en-US" sz="1200" dirty="0"/>
+          </a:p>
+        </p:txBody>
+      </p:sp>
+      <p:sp>
+        <p:nvSpPr>
+          <p:cNvPr id="5" name="Text 3"/>
+          <p:cNvSpPr/>
+          <p:nvPr/>
+        </p:nvSpPr>
+        <p:spPr>
+          <a:xfrm>
+            <a:off x="406301" y="4434929"/>
+            <a:ext cx="8498026" cy="213271"/>
+          </a:xfrm>
+          <a:prstGeom prst="rect">
+            <a:avLst/>
+          </a:prstGeom>
+          <a:noFill/>
+          <a:ln/>
+        </p:spPr>
+        <p:txBody>
+          <a:bodyPr wrap="square" lIns="0" tIns="0" rIns="0" bIns="0" rtlCol="0" anchor="t"/>
+          <a:lstStyle/>
+          <a:p>
+            <a:pPr algn="l" indent="0" marL="0">
+              <a:lnSpc>
+                <a:spcPts val="1680"/>
+              </a:lnSpc>
+              <a:spcBef>
+                <a:spcPts val="300"/>
+              </a:spcBef>
+              <a:spcAft>
+                <a:spcPts val="300"/>
+              </a:spcAft>
+              <a:buNone/>
+            </a:pPr>
+            <a:r>
+              <a:rPr lang="en-US" sz="1200" dirty="0">
+                <a:solidFill>
+                  <a:srgbClr val="1C2833"/>
+                </a:solidFill>
+                <a:latin typeface="Arial" pitchFamily="34" charset="0"/>
+                <a:ea typeface="Arial" pitchFamily="34" charset="-122"/>
+                <a:cs typeface="Arial" pitchFamily="34" charset="-120"/>
+              </a:rPr>
+              <a:t>Middle ·  · IKS Curriculum</a:t>
+            </a:r>
+            <a:endParaRPr lang="en-US" sz="1200" dirty="0"/>
+          </a:p>
+        </p:txBody>
+      </p:sp>
+    </p:spTree>
+  </p:cSld>
+  <p:clrMapOvr>
+    <a:masterClrMapping/>
+  </p:clrMapOvr>
+</p:sld>
+</file>
+
+<file path=ppt/slides/slide19.xml><?xml version="1.0" encoding="utf-8"?>
+<p:sld xmlns:a="http://schemas.openxmlformats.org/drawingml/2006/main" xmlns:r="http://schemas.openxmlformats.org/officeDocument/2006/relationships" xmlns:p="http://schemas.openxmlformats.org/presentationml/2006/main">
+  <p:cSld name="Slide 19">
+    <p:bg>
+      <p:bgPr>
+        <a:solidFill>
+          <a:srgbClr val="FFFFFF"/>
+        </a:solidFill>
+      </p:bgPr>
+    </p:bg>
+    <p:spTree>
+      <p:nvGrpSpPr>
+        <p:cNvPr id="1" name=""/>
+        <p:cNvGrpSpPr/>
+        <p:nvPr/>
+      </p:nvGrpSpPr>
+      <p:grpSpPr>
+        <a:xfrm>
+          <a:off x="0" y="0"/>
+          <a:ext cx="0" cy="0"/>
+          <a:chOff x="0" y="0"/>
+          <a:chExt cx="0" cy="0"/>
+        </a:xfrm>
+      </p:grpSpPr>
+      <p:sp>
+        <p:nvSpPr>
+          <p:cNvPr id="2" name="Text 0"/>
+          <p:cNvSpPr/>
+          <p:nvPr/>
+        </p:nvSpPr>
+        <p:spPr>
+          <a:xfrm>
+            <a:off x="0" y="0"/>
+            <a:ext cx="9144000" cy="101501"/>
+          </a:xfrm>
+          <a:prstGeom prst="rect">
+            <a:avLst/>
+          </a:prstGeom>
+          <a:solidFill>
+            <a:srgbClr val="277884"/>
+          </a:solidFill>
+          <a:ln/>
+        </p:spPr>
+        <p:txBody>
+          <a:bodyPr wrap="square" rtlCol="0" anchor="ctr"/>
+          <a:lstStyle/>
+          <a:p>
+            <a:pPr indent="0" marL="0">
+              <a:buNone/>
+            </a:pPr>
+            <a:endParaRPr lang="en-US" dirty="0"/>
+          </a:p>
+        </p:txBody>
+      </p:sp>
+      <p:sp>
+        <p:nvSpPr>
+          <p:cNvPr id="3" name="Text 1"/>
+          <p:cNvSpPr/>
+          <p:nvPr/>
+        </p:nvSpPr>
+        <p:spPr>
+          <a:xfrm>
+            <a:off x="406301" y="457051"/>
+            <a:ext cx="8498026" cy="274290"/>
+          </a:xfrm>
+          <a:prstGeom prst="rect">
+            <a:avLst/>
+          </a:prstGeom>
+          <a:noFill/>
+          <a:ln/>
+        </p:spPr>
+        <p:txBody>
+          <a:bodyPr wrap="square" lIns="0" tIns="0" rIns="0" bIns="0" rtlCol="0" anchor="t"/>
+          <a:lstStyle/>
+          <a:p>
+            <a:pPr algn="l" indent="0" marL="0">
+              <a:lnSpc>
+                <a:spcPts val="2160"/>
+              </a:lnSpc>
+              <a:spcBef>
+                <a:spcPts val="600"/>
+              </a:spcBef>
+              <a:spcAft>
+                <a:spcPts val="800"/>
+              </a:spcAft>
+              <a:buNone/>
+            </a:pPr>
+            <a:r>
+              <a:rPr lang="en-US" sz="1800" b="1" dirty="0">
+                <a:solidFill>
+                  <a:srgbClr val="FE4447"/>
+                </a:solidFill>
+                <a:latin typeface="Georgia" pitchFamily="34" charset="0"/>
+                <a:ea typeface="Georgia" pitchFamily="34" charset="-122"/>
+                <a:cs typeface="Georgia" pitchFamily="34" charset="-120"/>
+              </a:rPr>
+              <a:t>Citation(s) used in this lesson</a:t>
+            </a:r>
+            <a:endParaRPr lang="en-US" sz="1800" dirty="0"/>
+          </a:p>
+        </p:txBody>
+      </p:sp>
+      <p:sp>
+        <p:nvSpPr>
+          <p:cNvPr id="4" name="Text 2"/>
+          <p:cNvSpPr/>
+          <p:nvPr/>
+        </p:nvSpPr>
+        <p:spPr>
+          <a:xfrm>
+            <a:off x="634901" y="883593"/>
+            <a:ext cx="8102798" cy="1142702"/>
+          </a:xfrm>
+          <a:prstGeom prst="rect">
+            <a:avLst/>
+          </a:prstGeom>
+          <a:noFill/>
+          <a:ln/>
+        </p:spPr>
+        <p:txBody>
+          <a:bodyPr wrap="square" lIns="0" tIns="0" rIns="0" bIns="0" rtlCol="0" anchor="t"/>
+          <a:lstStyle/>
+          <a:p>
+            <a:pPr algn="l" marL="342900" indent="-342900">
+              <a:lnSpc>
+                <a:spcPts val="1620"/>
+              </a:lnSpc>
+              <a:spcAft>
+                <a:spcPts val="300"/>
+              </a:spcAft>
+              <a:buSzPct val="100000"/>
+              <a:buChar char="•"/>
+            </a:pPr>
+            <a:r>
+              <a:rPr lang="en-US" sz="1200" i="1" dirty="0">
+                <a:solidFill>
+                  <a:srgbClr val="1C2833"/>
+                </a:solidFill>
+                <a:latin typeface="Arial" pitchFamily="34" charset="0"/>
+                <a:ea typeface="Arial" pitchFamily="34" charset="-122"/>
+                <a:cs typeface="Arial" pitchFamily="34" charset="-120"/>
+              </a:rPr>
+              <a:t>sapta-sindhu</a:t>
+            </a:r>
+            <a:pPr algn="l" indent="0" marL="0">
+              <a:lnSpc>
+                <a:spcPts val="1620"/>
+              </a:lnSpc>
+              <a:spcAft>
+                <a:spcPts val="300"/>
+              </a:spcAft>
+              <a:buNone/>
+            </a:pPr>
+            <a:r>
+              <a:rPr lang="en-US" sz="1200" dirty="0">
+                <a:solidFill>
+                  <a:srgbClr val="1C2833"/>
+                </a:solidFill>
+                <a:latin typeface="Arial" pitchFamily="34" charset="0"/>
+                <a:ea typeface="Arial" pitchFamily="34" charset="-122"/>
+                <a:cs typeface="Arial" pitchFamily="34" charset="-120"/>
+              </a:rPr>
+              <a:t> invocation — a traditional prayer chanted across many Hindu households; the exact text is found in standard prayer manuals (e.g. </a:t>
+            </a:r>
+            <a:pPr algn="l" indent="0" marL="0">
+              <a:lnSpc>
+                <a:spcPts val="1620"/>
+              </a:lnSpc>
+              <a:spcAft>
+                <a:spcPts val="300"/>
+              </a:spcAft>
+              <a:buNone/>
+            </a:pPr>
+            <a:r>
+              <a:rPr lang="en-US" sz="1200" i="1" dirty="0">
+                <a:solidFill>
+                  <a:srgbClr val="1C2833"/>
+                </a:solidFill>
+                <a:latin typeface="Arial" pitchFamily="34" charset="0"/>
+                <a:ea typeface="Arial" pitchFamily="34" charset="-122"/>
+                <a:cs typeface="Arial" pitchFamily="34" charset="-120"/>
+              </a:rPr>
+              <a:t>Nitya Karma Pūjā Prakāśa</a:t>
+            </a:r>
+            <a:pPr algn="l" indent="0" marL="0">
+              <a:lnSpc>
+                <a:spcPts val="1620"/>
+              </a:lnSpc>
+              <a:spcAft>
+                <a:spcPts val="300"/>
+              </a:spcAft>
+              <a:buNone/>
+            </a:pPr>
+            <a:r>
+              <a:rPr lang="en-US" sz="1200" dirty="0">
+                <a:solidFill>
+                  <a:srgbClr val="1C2833"/>
+                </a:solidFill>
+                <a:latin typeface="Arial" pitchFamily="34" charset="0"/>
+                <a:ea typeface="Arial" pitchFamily="34" charset="-122"/>
+                <a:cs typeface="Arial" pitchFamily="34" charset="-120"/>
+              </a:rPr>
+              <a:t>). Not from a single canonical scripture; treated here as a traditional liturgical verse.</a:t>
+            </a:r>
+            <a:endParaRPr lang="en-US" sz="1200" dirty="0"/>
+          </a:p>
+          <a:p>
+            <a:pPr algn="l" marL="342900" indent="-342900">
+              <a:lnSpc>
+                <a:spcPts val="1620"/>
+              </a:lnSpc>
+              <a:spcAft>
+                <a:spcPts val="300"/>
+              </a:spcAft>
+              <a:buSzPct val="100000"/>
+              <a:buChar char="•"/>
+            </a:pPr>
+            <a:r>
+              <a:rPr lang="en-US" sz="1200" dirty="0">
+                <a:solidFill>
+                  <a:srgbClr val="1C2833"/>
+                </a:solidFill>
+                <a:latin typeface="Arial" pitchFamily="34" charset="0"/>
+                <a:ea typeface="Arial" pitchFamily="34" charset="-122"/>
+                <a:cs typeface="Arial" pitchFamily="34" charset="-120"/>
+              </a:rPr>
+              <a:t>Central Pollution Control Board (Government of India) annual reports on polluted river stretches — paraphrased, not cited verbatim.</a:t>
+            </a:r>
+            <a:endParaRPr lang="en-US" sz="1200" dirty="0"/>
+          </a:p>
+        </p:txBody>
+      </p:sp>
+      <p:sp>
+        <p:nvSpPr>
+          <p:cNvPr id="5" name="Text 3"/>
           <p:cNvSpPr/>
           <p:nvPr/>
         </p:nvSpPr>
@@ -3547,7 +6276,7 @@
                 <a:ea typeface="Georgia" pitchFamily="34" charset="-122"/>
                 <a:cs typeface="Georgia" pitchFamily="34" charset="-120"/>
               </a:rPr>
-              <a:t>Materials</a:t>
+              <a:t>Learning objective</a:t>
             </a:r>
             <a:endParaRPr lang="en-US" sz="1800" dirty="0"/>
           </a:p>
@@ -3562,7 +6291,7 @@
         <p:spPr>
           <a:xfrm>
             <a:off x="406301" y="870942"/>
-            <a:ext cx="8498026" cy="639812"/>
+            <a:ext cx="8498026" cy="426541"/>
           </a:xfrm>
           <a:prstGeom prst="rect">
             <a:avLst/>
@@ -3595,53 +6324,7 @@
                 <a:ea typeface="Arial" pitchFamily="34" charset="-122"/>
                 <a:cs typeface="Arial" pitchFamily="34" charset="-120"/>
               </a:rPr>
-              <a:t>– Map of India, paper or projected – Printed handout: the </a:t>
-            </a:r>
-            <a:pPr algn="l" indent="0" marL="0">
-              <a:lnSpc>
-                <a:spcPts val="1680"/>
-              </a:lnSpc>
-              <a:spcBef>
-                <a:spcPts val="300"/>
-              </a:spcBef>
-              <a:spcAft>
-                <a:spcPts val="300"/>
-              </a:spcAft>
-              <a:buNone/>
-            </a:pPr>
-            <a:r>
-              <a:rPr lang="en-US" sz="1200" i="1" dirty="0">
-                <a:solidFill>
-                  <a:srgbClr val="1C2833"/>
-                </a:solidFill>
-                <a:latin typeface="Arial" pitchFamily="34" charset="0"/>
-                <a:ea typeface="Arial" pitchFamily="34" charset="-122"/>
-                <a:cs typeface="Arial" pitchFamily="34" charset="-120"/>
-              </a:rPr>
-              <a:t>sapta-sindhu</a:t>
-            </a:r>
-            <a:pPr algn="l" indent="0" marL="0">
-              <a:lnSpc>
-                <a:spcPts val="1680"/>
-              </a:lnSpc>
-              <a:spcBef>
-                <a:spcPts val="300"/>
-              </a:spcBef>
-              <a:spcAft>
-                <a:spcPts val="300"/>
-              </a:spcAft>
-              <a:buNone/>
-            </a:pPr>
-            <a:r>
-              <a:rPr lang="en-US" sz="1200" dirty="0">
-                <a:solidFill>
-                  <a:srgbClr val="1C2833"/>
-                </a:solidFill>
-                <a:latin typeface="Arial" pitchFamily="34" charset="0"/>
-                <a:ea typeface="Arial" pitchFamily="34" charset="-122"/>
-                <a:cs typeface="Arial" pitchFamily="34" charset="-120"/>
-              </a:rPr>
-              <a:t> invocation (a short stanza traditionally chanted at bathing) with translation – Two photographs: a clean stretch of a sacred river (upper Yamunā in Yamunotri, or the Gaṅgā at Devprayag) and a polluted stretch (Yamunā at Delhi, Gaṅgā at Kanpur) – Notebook</a:t>
+              <a:t>Students explain how treating a river as sacred functioned (sometimes well, sometimes poorly) as a method of protection in the Indic tradition, name the seven traditionally sacred rivers, and locate the nearest river to their own home.</a:t>
             </a:r>
             <a:endParaRPr lang="en-US" sz="1200" dirty="0"/>
           </a:p>
@@ -3799,7 +6482,7 @@
                 <a:ea typeface="Georgia" pitchFamily="34" charset="-122"/>
                 <a:cs typeface="Georgia" pitchFamily="34" charset="-120"/>
               </a:rPr>
-              <a:t>Vocabulary</a:t>
+              <a:t>Materials</a:t>
             </a:r>
             <a:endParaRPr lang="en-US" sz="1800" dirty="0"/>
           </a:p>
@@ -3814,7 +6497,7 @@
         <p:spPr>
           <a:xfrm>
             <a:off x="634901" y="883593"/>
-            <a:ext cx="8102798" cy="1013222"/>
+            <a:ext cx="8102798" cy="1218902"/>
           </a:xfrm>
           <a:prstGeom prst="rect">
             <a:avLst/>
@@ -3837,26 +6520,6 @@
               <a:buChar char="•"/>
             </a:pPr>
             <a:r>
-              <a:rPr lang="en-US" sz="1200" i="1" dirty="0">
-                <a:solidFill>
-                  <a:srgbClr val="1C2833"/>
-                </a:solidFill>
-                <a:latin typeface="Arial" pitchFamily="34" charset="0"/>
-                <a:ea typeface="Arial" pitchFamily="34" charset="-122"/>
-                <a:cs typeface="Arial" pitchFamily="34" charset="-120"/>
-              </a:rPr>
-              <a:t>sindhu</a:t>
-            </a:r>
-            <a:pPr algn="l" indent="0" marL="0">
-              <a:lnSpc>
-                <a:spcPts val="1620"/>
-              </a:lnSpc>
-              <a:spcAft>
-                <a:spcPts val="300"/>
-              </a:spcAft>
-              <a:buNone/>
-            </a:pPr>
-            <a:r>
               <a:rPr lang="en-US" sz="1200" dirty="0">
                 <a:solidFill>
                   <a:srgbClr val="1C2833"/>
@@ -3865,7 +6528,7 @@
                 <a:ea typeface="Arial" pitchFamily="34" charset="-122"/>
                 <a:cs typeface="Arial" pitchFamily="34" charset="-120"/>
               </a:rPr>
-              <a:t> (IAST: sindhu) — "river, ocean." Also the name of the Indus river system.</a:t>
+              <a:t>Map of India, paper or projected</a:t>
             </a:r>
             <a:endParaRPr lang="en-US" sz="1200" dirty="0"/>
           </a:p>
@@ -3881,6 +6544,26 @@
               <a:buChar char="•"/>
             </a:pPr>
             <a:r>
+              <a:rPr lang="en-US" sz="1200" dirty="0">
+                <a:solidFill>
+                  <a:srgbClr val="1C2833"/>
+                </a:solidFill>
+                <a:latin typeface="Arial" pitchFamily="34" charset="0"/>
+                <a:ea typeface="Arial" pitchFamily="34" charset="-122"/>
+                <a:cs typeface="Arial" pitchFamily="34" charset="-120"/>
+              </a:rPr>
+              <a:t>Printed handout: the </a:t>
+            </a:r>
+            <a:pPr algn="l" indent="0" marL="0">
+              <a:lnSpc>
+                <a:spcPts val="1620"/>
+              </a:lnSpc>
+              <a:spcAft>
+                <a:spcPts val="300"/>
+              </a:spcAft>
+              <a:buNone/>
+            </a:pPr>
+            <a:r>
               <a:rPr lang="en-US" sz="1200" i="1" dirty="0">
                 <a:solidFill>
                   <a:srgbClr val="1C2833"/>
@@ -3909,7 +6592,7 @@
                 <a:ea typeface="Arial" pitchFamily="34" charset="-122"/>
                 <a:cs typeface="Arial" pitchFamily="34" charset="-120"/>
               </a:rPr>
-              <a:t> (IAST: sapta-sindhu; lit. "seven rivers") — a traditional list of seven sacred rivers.</a:t>
+              <a:t> invocation (a short stanza traditionally chanted at bathing) with translation</a:t>
             </a:r>
             <a:endParaRPr lang="en-US" sz="1200" dirty="0"/>
           </a:p>
@@ -3925,26 +6608,6 @@
               <a:buChar char="•"/>
             </a:pPr>
             <a:r>
-              <a:rPr lang="en-US" sz="1200" i="1" dirty="0">
-                <a:solidFill>
-                  <a:srgbClr val="1C2833"/>
-                </a:solidFill>
-                <a:latin typeface="Arial" pitchFamily="34" charset="0"/>
-                <a:ea typeface="Arial" pitchFamily="34" charset="-122"/>
-                <a:cs typeface="Arial" pitchFamily="34" charset="-120"/>
-              </a:rPr>
-              <a:t>snāna</a:t>
-            </a:r>
-            <a:pPr algn="l" indent="0" marL="0">
-              <a:lnSpc>
-                <a:spcPts val="1620"/>
-              </a:lnSpc>
-              <a:spcAft>
-                <a:spcPts val="300"/>
-              </a:spcAft>
-              <a:buNone/>
-            </a:pPr>
-            <a:r>
               <a:rPr lang="en-US" sz="1200" dirty="0">
                 <a:solidFill>
                   <a:srgbClr val="1C2833"/>
@@ -3953,7 +6616,7 @@
                 <a:ea typeface="Arial" pitchFamily="34" charset="-122"/>
                 <a:cs typeface="Arial" pitchFamily="34" charset="-120"/>
               </a:rPr>
-              <a:t> (IAST: snāna) — "bath, ritual washing."</a:t>
+              <a:t>Two photographs: a clean stretch of a sacred river (upper Yamunā in Yamunotri, or the Gaṅgā at Devprayag) and a polluted stretch (Yamunā at Delhi, Gaṅgā at Kanpur)</a:t>
             </a:r>
             <a:endParaRPr lang="en-US" sz="1200" dirty="0"/>
           </a:p>
@@ -3969,26 +6632,6 @@
               <a:buChar char="•"/>
             </a:pPr>
             <a:r>
-              <a:rPr lang="en-US" sz="1200" i="1" dirty="0">
-                <a:solidFill>
-                  <a:srgbClr val="1C2833"/>
-                </a:solidFill>
-                <a:latin typeface="Arial" pitchFamily="34" charset="0"/>
-                <a:ea typeface="Arial" pitchFamily="34" charset="-122"/>
-                <a:cs typeface="Arial" pitchFamily="34" charset="-120"/>
-              </a:rPr>
-              <a:t>tīrtha</a:t>
-            </a:r>
-            <a:pPr algn="l" indent="0" marL="0">
-              <a:lnSpc>
-                <a:spcPts val="1620"/>
-              </a:lnSpc>
-              <a:spcAft>
-                <a:spcPts val="300"/>
-              </a:spcAft>
-              <a:buNone/>
-            </a:pPr>
-            <a:r>
               <a:rPr lang="en-US" sz="1200" dirty="0">
                 <a:solidFill>
                   <a:srgbClr val="1C2833"/>
@@ -3997,7 +6640,7 @@
                 <a:ea typeface="Arial" pitchFamily="34" charset="-122"/>
                 <a:cs typeface="Arial" pitchFamily="34" charset="-120"/>
               </a:rPr>
-              <a:t> (IAST: tīrtha; lit. "ford, crossing") — a sacred site, often on a river.</a:t>
+              <a:t>Notebook</a:t>
             </a:r>
             <a:endParaRPr lang="en-US" sz="1200" dirty="0"/>
           </a:p>
@@ -4155,7 +6798,7 @@
                 <a:ea typeface="Georgia" pitchFamily="34" charset="-122"/>
                 <a:cs typeface="Georgia" pitchFamily="34" charset="-120"/>
               </a:rPr>
-              <a:t>Lesson flow</a:t>
+              <a:t>Vocabulary</a:t>
             </a:r>
             <a:endParaRPr lang="en-US" sz="1800" dirty="0"/>
           </a:p>
@@ -4164,6 +6807,204 @@
       <p:sp>
         <p:nvSpPr>
           <p:cNvPr id="4" name="Text 2"/>
+          <p:cNvSpPr/>
+          <p:nvPr/>
+        </p:nvSpPr>
+        <p:spPr>
+          <a:xfrm>
+            <a:off x="634901" y="883593"/>
+            <a:ext cx="8102798" cy="1013222"/>
+          </a:xfrm>
+          <a:prstGeom prst="rect">
+            <a:avLst/>
+          </a:prstGeom>
+          <a:noFill/>
+          <a:ln/>
+        </p:spPr>
+        <p:txBody>
+          <a:bodyPr wrap="square" lIns="0" tIns="0" rIns="0" bIns="0" rtlCol="0" anchor="t"/>
+          <a:lstStyle/>
+          <a:p>
+            <a:pPr algn="l" marL="342900" indent="-342900">
+              <a:lnSpc>
+                <a:spcPts val="1620"/>
+              </a:lnSpc>
+              <a:spcAft>
+                <a:spcPts val="300"/>
+              </a:spcAft>
+              <a:buSzPct val="100000"/>
+              <a:buChar char="•"/>
+            </a:pPr>
+            <a:r>
+              <a:rPr lang="en-US" sz="1200" i="1" dirty="0">
+                <a:solidFill>
+                  <a:srgbClr val="1C2833"/>
+                </a:solidFill>
+                <a:latin typeface="Arial" pitchFamily="34" charset="0"/>
+                <a:ea typeface="Arial" pitchFamily="34" charset="-122"/>
+                <a:cs typeface="Arial" pitchFamily="34" charset="-120"/>
+              </a:rPr>
+              <a:t>sindhu</a:t>
+            </a:r>
+            <a:pPr algn="l" indent="0" marL="0">
+              <a:lnSpc>
+                <a:spcPts val="1620"/>
+              </a:lnSpc>
+              <a:spcAft>
+                <a:spcPts val="300"/>
+              </a:spcAft>
+              <a:buNone/>
+            </a:pPr>
+            <a:r>
+              <a:rPr lang="en-US" sz="1200" dirty="0">
+                <a:solidFill>
+                  <a:srgbClr val="1C2833"/>
+                </a:solidFill>
+                <a:latin typeface="Arial" pitchFamily="34" charset="0"/>
+                <a:ea typeface="Arial" pitchFamily="34" charset="-122"/>
+                <a:cs typeface="Arial" pitchFamily="34" charset="-120"/>
+              </a:rPr>
+              <a:t> (IAST: sindhu) — "river, ocean." Also the name of the Indus river system.</a:t>
+            </a:r>
+            <a:endParaRPr lang="en-US" sz="1200" dirty="0"/>
+          </a:p>
+          <a:p>
+            <a:pPr algn="l" marL="342900" indent="-342900">
+              <a:lnSpc>
+                <a:spcPts val="1620"/>
+              </a:lnSpc>
+              <a:spcAft>
+                <a:spcPts val="300"/>
+              </a:spcAft>
+              <a:buSzPct val="100000"/>
+              <a:buChar char="•"/>
+            </a:pPr>
+            <a:r>
+              <a:rPr lang="en-US" sz="1200" i="1" dirty="0">
+                <a:solidFill>
+                  <a:srgbClr val="1C2833"/>
+                </a:solidFill>
+                <a:latin typeface="Arial" pitchFamily="34" charset="0"/>
+                <a:ea typeface="Arial" pitchFamily="34" charset="-122"/>
+                <a:cs typeface="Arial" pitchFamily="34" charset="-120"/>
+              </a:rPr>
+              <a:t>sapta-sindhu</a:t>
+            </a:r>
+            <a:pPr algn="l" indent="0" marL="0">
+              <a:lnSpc>
+                <a:spcPts val="1620"/>
+              </a:lnSpc>
+              <a:spcAft>
+                <a:spcPts val="300"/>
+              </a:spcAft>
+              <a:buNone/>
+            </a:pPr>
+            <a:r>
+              <a:rPr lang="en-US" sz="1200" dirty="0">
+                <a:solidFill>
+                  <a:srgbClr val="1C2833"/>
+                </a:solidFill>
+                <a:latin typeface="Arial" pitchFamily="34" charset="0"/>
+                <a:ea typeface="Arial" pitchFamily="34" charset="-122"/>
+                <a:cs typeface="Arial" pitchFamily="34" charset="-120"/>
+              </a:rPr>
+              <a:t> (IAST: sapta-sindhu; lit. "seven rivers") — a traditional list of seven sacred rivers.</a:t>
+            </a:r>
+            <a:endParaRPr lang="en-US" sz="1200" dirty="0"/>
+          </a:p>
+          <a:p>
+            <a:pPr algn="l" marL="342900" indent="-342900">
+              <a:lnSpc>
+                <a:spcPts val="1620"/>
+              </a:lnSpc>
+              <a:spcAft>
+                <a:spcPts val="300"/>
+              </a:spcAft>
+              <a:buSzPct val="100000"/>
+              <a:buChar char="•"/>
+            </a:pPr>
+            <a:r>
+              <a:rPr lang="en-US" sz="1200" i="1" dirty="0">
+                <a:solidFill>
+                  <a:srgbClr val="1C2833"/>
+                </a:solidFill>
+                <a:latin typeface="Arial" pitchFamily="34" charset="0"/>
+                <a:ea typeface="Arial" pitchFamily="34" charset="-122"/>
+                <a:cs typeface="Arial" pitchFamily="34" charset="-120"/>
+              </a:rPr>
+              <a:t>snāna</a:t>
+            </a:r>
+            <a:pPr algn="l" indent="0" marL="0">
+              <a:lnSpc>
+                <a:spcPts val="1620"/>
+              </a:lnSpc>
+              <a:spcAft>
+                <a:spcPts val="300"/>
+              </a:spcAft>
+              <a:buNone/>
+            </a:pPr>
+            <a:r>
+              <a:rPr lang="en-US" sz="1200" dirty="0">
+                <a:solidFill>
+                  <a:srgbClr val="1C2833"/>
+                </a:solidFill>
+                <a:latin typeface="Arial" pitchFamily="34" charset="0"/>
+                <a:ea typeface="Arial" pitchFamily="34" charset="-122"/>
+                <a:cs typeface="Arial" pitchFamily="34" charset="-120"/>
+              </a:rPr>
+              <a:t> (IAST: snāna) — "bath, ritual washing."</a:t>
+            </a:r>
+            <a:endParaRPr lang="en-US" sz="1200" dirty="0"/>
+          </a:p>
+          <a:p>
+            <a:pPr algn="l" marL="342900" indent="-342900">
+              <a:lnSpc>
+                <a:spcPts val="1620"/>
+              </a:lnSpc>
+              <a:spcAft>
+                <a:spcPts val="300"/>
+              </a:spcAft>
+              <a:buSzPct val="100000"/>
+              <a:buChar char="•"/>
+            </a:pPr>
+            <a:r>
+              <a:rPr lang="en-US" sz="1200" i="1" dirty="0">
+                <a:solidFill>
+                  <a:srgbClr val="1C2833"/>
+                </a:solidFill>
+                <a:latin typeface="Arial" pitchFamily="34" charset="0"/>
+                <a:ea typeface="Arial" pitchFamily="34" charset="-122"/>
+                <a:cs typeface="Arial" pitchFamily="34" charset="-120"/>
+              </a:rPr>
+              <a:t>tīrtha</a:t>
+            </a:r>
+            <a:pPr algn="l" indent="0" marL="0">
+              <a:lnSpc>
+                <a:spcPts val="1620"/>
+              </a:lnSpc>
+              <a:spcAft>
+                <a:spcPts val="300"/>
+              </a:spcAft>
+              <a:buNone/>
+            </a:pPr>
+            <a:r>
+              <a:rPr lang="en-US" sz="1200" dirty="0">
+                <a:solidFill>
+                  <a:srgbClr val="1C2833"/>
+                </a:solidFill>
+                <a:latin typeface="Arial" pitchFamily="34" charset="0"/>
+                <a:ea typeface="Arial" pitchFamily="34" charset="-122"/>
+                <a:cs typeface="Arial" pitchFamily="34" charset="-120"/>
+              </a:rPr>
+              <a:t> (IAST: tīrtha; lit. "ford, crossing") — a sacred site, often on a river.</a:t>
+            </a:r>
+            <a:endParaRPr lang="en-US" sz="1200" dirty="0"/>
+          </a:p>
+        </p:txBody>
+      </p:sp>
+      <p:sp>
+        <p:nvSpPr>
+          <p:cNvPr id="5" name="Text 3"/>
           <p:cNvSpPr/>
           <p:nvPr/>
         </p:nvSpPr>
@@ -4313,7 +7154,7 @@
                 <a:ea typeface="Georgia" pitchFamily="34" charset="-122"/>
                 <a:cs typeface="Georgia" pitchFamily="34" charset="-120"/>
               </a:rPr>
-              <a:t>Warm-up (5 min)</a:t>
+              <a:t>Lesson flow</a:t>
             </a:r>
             <a:endParaRPr lang="en-US" sz="1800" dirty="0"/>
           </a:p>
@@ -4322,100 +7163,6 @@
       <p:sp>
         <p:nvSpPr>
           <p:cNvPr id="4" name="Text 2"/>
-          <p:cNvSpPr/>
-          <p:nvPr/>
-        </p:nvSpPr>
-        <p:spPr>
-          <a:xfrm>
-            <a:off x="406301" y="870942"/>
-            <a:ext cx="8498026" cy="426541"/>
-          </a:xfrm>
-          <a:prstGeom prst="rect">
-            <a:avLst/>
-          </a:prstGeom>
-          <a:noFill/>
-          <a:ln/>
-        </p:spPr>
-        <p:txBody>
-          <a:bodyPr wrap="square" lIns="0" tIns="0" rIns="0" bIns="0" rtlCol="0" anchor="t"/>
-          <a:lstStyle/>
-          <a:p>
-            <a:pPr algn="l" indent="0" marL="0">
-              <a:lnSpc>
-                <a:spcPts val="1680"/>
-              </a:lnSpc>
-              <a:spcBef>
-                <a:spcPts val="300"/>
-              </a:spcBef>
-              <a:spcAft>
-                <a:spcPts val="300"/>
-              </a:spcAft>
-              <a:buNone/>
-            </a:pPr>
-            <a:r>
-              <a:rPr lang="en-US" sz="1200" dirty="0">
-                <a:solidFill>
-                  <a:srgbClr val="1C2833"/>
-                </a:solidFill>
-                <a:latin typeface="Arial" pitchFamily="34" charset="0"/>
-                <a:ea typeface="Arial" pitchFamily="34" charset="-122"/>
-                <a:cs typeface="Arial" pitchFamily="34" charset="-120"/>
-              </a:rPr>
-              <a:t>– Show the two photographs side by side — same river, different stretches. – Ask: </a:t>
-            </a:r>
-            <a:pPr algn="l" indent="0" marL="0">
-              <a:lnSpc>
-                <a:spcPts val="1680"/>
-              </a:lnSpc>
-              <a:spcBef>
-                <a:spcPts val="300"/>
-              </a:spcBef>
-              <a:spcAft>
-                <a:spcPts val="300"/>
-              </a:spcAft>
-              <a:buNone/>
-            </a:pPr>
-            <a:r>
-              <a:rPr lang="en-US" sz="1200" i="1" dirty="0">
-                <a:solidFill>
-                  <a:srgbClr val="1C2833"/>
-                </a:solidFill>
-                <a:latin typeface="Arial" pitchFamily="34" charset="0"/>
-                <a:ea typeface="Arial" pitchFamily="34" charset="-122"/>
-                <a:cs typeface="Arial" pitchFamily="34" charset="-120"/>
-              </a:rPr>
-              <a:t>"Same religion. Same river. Same name. Why does one look sacred and the other look like a sewer?"</a:t>
-            </a:r>
-            <a:pPr algn="l" indent="0" marL="0">
-              <a:lnSpc>
-                <a:spcPts val="1680"/>
-              </a:lnSpc>
-              <a:spcBef>
-                <a:spcPts val="300"/>
-              </a:spcBef>
-              <a:spcAft>
-                <a:spcPts val="300"/>
-              </a:spcAft>
-              <a:buNone/>
-            </a:pPr>
-            <a:r>
-              <a:rPr lang="en-US" sz="1200" dirty="0">
-                <a:solidFill>
-                  <a:srgbClr val="1C2833"/>
-                </a:solidFill>
-                <a:latin typeface="Arial" pitchFamily="34" charset="0"/>
-                <a:ea typeface="Arial" pitchFamily="34" charset="-122"/>
-                <a:cs typeface="Arial" pitchFamily="34" charset="-120"/>
-              </a:rPr>
-              <a:t> – Take 2–3 student responses. Don't resolve yet.</a:t>
-            </a:r>
-            <a:endParaRPr lang="en-US" sz="1200" dirty="0"/>
-          </a:p>
-        </p:txBody>
-      </p:sp>
-      <p:sp>
-        <p:nvSpPr>
-          <p:cNvPr id="5" name="Text 3"/>
           <p:cNvSpPr/>
           <p:nvPr/>
         </p:nvSpPr>
@@ -4565,7 +7312,7 @@
                 <a:ea typeface="Georgia" pitchFamily="34" charset="-122"/>
                 <a:cs typeface="Georgia" pitchFamily="34" charset="-120"/>
               </a:rPr>
-              <a:t>Core (20 min)</a:t>
+              <a:t>Warm-up (5 min)</a:t>
             </a:r>
             <a:endParaRPr lang="en-US" sz="1800" dirty="0"/>
           </a:p>
@@ -4580,7 +7327,7 @@
         <p:spPr>
           <a:xfrm>
             <a:off x="634901" y="883593"/>
-            <a:ext cx="8102798" cy="281880"/>
+            <a:ext cx="8102798" cy="769441"/>
           </a:xfrm>
           <a:prstGeom prst="rect">
             <a:avLst/>
@@ -4603,26 +7350,6 @@
               <a:buChar char="•"/>
             </a:pPr>
             <a:r>
-              <a:rPr lang="en-US" sz="1200" b="1" dirty="0">
-                <a:solidFill>
-                  <a:srgbClr val="1C2833"/>
-                </a:solidFill>
-                <a:latin typeface="Arial" pitchFamily="34" charset="0"/>
-                <a:ea typeface="Arial" pitchFamily="34" charset="-122"/>
-                <a:cs typeface="Arial" pitchFamily="34" charset="-120"/>
-              </a:rPr>
-              <a:t>The seven rivers.</a:t>
-            </a:r>
-            <a:pPr algn="l" indent="0" marL="0">
-              <a:lnSpc>
-                <a:spcPts val="1620"/>
-              </a:lnSpc>
-              <a:spcAft>
-                <a:spcPts val="300"/>
-              </a:spcAft>
-              <a:buNone/>
-            </a:pPr>
-            <a:r>
               <a:rPr lang="en-US" sz="1200" dirty="0">
                 <a:solidFill>
                   <a:srgbClr val="1C2833"/>
@@ -4631,293 +7358,10 @@
                 <a:ea typeface="Arial" pitchFamily="34" charset="-122"/>
                 <a:cs typeface="Arial" pitchFamily="34" charset="-120"/>
               </a:rPr>
-              <a:t> Write on the board:</a:t>
+              <a:t>Show the two photographs side by side — same river, different stretches.</a:t>
             </a:r>
             <a:endParaRPr lang="en-US" sz="1200" dirty="0"/>
           </a:p>
-        </p:txBody>
-      </p:sp>
-      <p:sp>
-        <p:nvSpPr>
-          <p:cNvPr id="5" name="Text 3"/>
-          <p:cNvSpPr/>
-          <p:nvPr/>
-        </p:nvSpPr>
-        <p:spPr>
-          <a:xfrm>
-            <a:off x="406301" y="1254323"/>
-            <a:ext cx="8498026" cy="213271"/>
-          </a:xfrm>
-          <a:prstGeom prst="rect">
-            <a:avLst/>
-          </a:prstGeom>
-          <a:noFill/>
-          <a:ln/>
-        </p:spPr>
-        <p:txBody>
-          <a:bodyPr wrap="square" lIns="0" tIns="0" rIns="0" bIns="0" rtlCol="0" anchor="t"/>
-          <a:lstStyle/>
-          <a:p>
-            <a:pPr algn="l" indent="0" marL="0">
-              <a:lnSpc>
-                <a:spcPts val="1680"/>
-              </a:lnSpc>
-              <a:spcBef>
-                <a:spcPts val="300"/>
-              </a:spcBef>
-              <a:spcAft>
-                <a:spcPts val="300"/>
-              </a:spcAft>
-              <a:buNone/>
-            </a:pPr>
-            <a:r>
-              <a:rPr lang="en-US" sz="1200" dirty="0">
-                <a:solidFill>
-                  <a:srgbClr val="1C2833"/>
-                </a:solidFill>
-                <a:latin typeface="Arial" pitchFamily="34" charset="0"/>
-                <a:ea typeface="Arial" pitchFamily="34" charset="-122"/>
-                <a:cs typeface="Arial" pitchFamily="34" charset="-120"/>
-              </a:rPr>
-              <a:t>&gt; </a:t>
-            </a:r>
-            <a:pPr algn="l" indent="0" marL="0">
-              <a:lnSpc>
-                <a:spcPts val="1680"/>
-              </a:lnSpc>
-              <a:spcBef>
-                <a:spcPts val="300"/>
-              </a:spcBef>
-              <a:spcAft>
-                <a:spcPts val="300"/>
-              </a:spcAft>
-              <a:buNone/>
-            </a:pPr>
-            <a:r>
-              <a:rPr lang="en-US" sz="1200" i="1" dirty="0">
-                <a:solidFill>
-                  <a:srgbClr val="1C2833"/>
-                </a:solidFill>
-                <a:latin typeface="Arial" pitchFamily="34" charset="0"/>
-                <a:ea typeface="Arial" pitchFamily="34" charset="-122"/>
-                <a:cs typeface="Arial" pitchFamily="34" charset="-120"/>
-              </a:rPr>
-              <a:t>Gaṅgā · Yamunā · Sarasvatī · Sindhu · Godāvarī · Narmadā · Kāverī</a:t>
-            </a:r>
-            <a:endParaRPr lang="en-US" sz="1200" dirty="0"/>
-          </a:p>
-        </p:txBody>
-      </p:sp>
-      <p:sp>
-        <p:nvSpPr>
-          <p:cNvPr id="6" name="Text 4"/>
-          <p:cNvSpPr/>
-          <p:nvPr/>
-        </p:nvSpPr>
-        <p:spPr>
-          <a:xfrm>
-            <a:off x="406301" y="1543794"/>
-            <a:ext cx="8498026" cy="213271"/>
-          </a:xfrm>
-          <a:prstGeom prst="rect">
-            <a:avLst/>
-          </a:prstGeom>
-          <a:noFill/>
-          <a:ln/>
-        </p:spPr>
-        <p:txBody>
-          <a:bodyPr wrap="square" lIns="0" tIns="0" rIns="0" bIns="0" rtlCol="0" anchor="t"/>
-          <a:lstStyle/>
-          <a:p>
-            <a:pPr algn="l" indent="0" marL="0">
-              <a:lnSpc>
-                <a:spcPts val="1680"/>
-              </a:lnSpc>
-              <a:spcBef>
-                <a:spcPts val="300"/>
-              </a:spcBef>
-              <a:spcAft>
-                <a:spcPts val="300"/>
-              </a:spcAft>
-              <a:buNone/>
-            </a:pPr>
-            <a:r>
-              <a:rPr lang="en-US" sz="1200" dirty="0">
-                <a:solidFill>
-                  <a:srgbClr val="1C2833"/>
-                </a:solidFill>
-                <a:latin typeface="Arial" pitchFamily="34" charset="0"/>
-                <a:ea typeface="Arial" pitchFamily="34" charset="-122"/>
-                <a:cs typeface="Arial" pitchFamily="34" charset="-120"/>
-              </a:rPr>
-              <a:t>The traditional invocation (read, don't memorise):</a:t>
-            </a:r>
-            <a:endParaRPr lang="en-US" sz="1200" dirty="0"/>
-          </a:p>
-        </p:txBody>
-      </p:sp>
-      <p:sp>
-        <p:nvSpPr>
-          <p:cNvPr id="7" name="Text 5"/>
-          <p:cNvSpPr/>
-          <p:nvPr/>
-        </p:nvSpPr>
-        <p:spPr>
-          <a:xfrm>
-            <a:off x="406301" y="1833265"/>
-            <a:ext cx="8498026" cy="426541"/>
-          </a:xfrm>
-          <a:prstGeom prst="rect">
-            <a:avLst/>
-          </a:prstGeom>
-          <a:noFill/>
-          <a:ln/>
-        </p:spPr>
-        <p:txBody>
-          <a:bodyPr wrap="square" lIns="0" tIns="0" rIns="0" bIns="0" rtlCol="0" anchor="t"/>
-          <a:lstStyle/>
-          <a:p>
-            <a:pPr algn="l" indent="0" marL="0">
-              <a:lnSpc>
-                <a:spcPts val="1680"/>
-              </a:lnSpc>
-              <a:spcBef>
-                <a:spcPts val="300"/>
-              </a:spcBef>
-              <a:spcAft>
-                <a:spcPts val="300"/>
-              </a:spcAft>
-              <a:buNone/>
-            </a:pPr>
-            <a:r>
-              <a:rPr lang="en-US" sz="1200" dirty="0">
-                <a:solidFill>
-                  <a:srgbClr val="1C2833"/>
-                </a:solidFill>
-                <a:latin typeface="Arial" pitchFamily="34" charset="0"/>
-                <a:ea typeface="Arial" pitchFamily="34" charset="-122"/>
-                <a:cs typeface="Arial" pitchFamily="34" charset="-120"/>
-              </a:rPr>
-              <a:t>&gt; "</a:t>
-            </a:r>
-            <a:pPr algn="l" indent="0" marL="0">
-              <a:lnSpc>
-                <a:spcPts val="1680"/>
-              </a:lnSpc>
-              <a:spcBef>
-                <a:spcPts val="300"/>
-              </a:spcBef>
-              <a:spcAft>
-                <a:spcPts val="300"/>
-              </a:spcAft>
-              <a:buNone/>
-            </a:pPr>
-            <a:r>
-              <a:rPr lang="en-US" sz="1200" i="1" dirty="0">
-                <a:solidFill>
-                  <a:srgbClr val="1C2833"/>
-                </a:solidFill>
-                <a:latin typeface="Arial" pitchFamily="34" charset="0"/>
-                <a:ea typeface="Arial" pitchFamily="34" charset="-122"/>
-                <a:cs typeface="Arial" pitchFamily="34" charset="-120"/>
-              </a:rPr>
-              <a:t>gaṅge ca yamune caiva godāvari sarasvati / &gt; narmade sindho kāveri jale 'smin sannidhiṁ kuru //</a:t>
-            </a:r>
-            <a:pPr algn="l" indent="0" marL="0">
-              <a:lnSpc>
-                <a:spcPts val="1680"/>
-              </a:lnSpc>
-              <a:spcBef>
-                <a:spcPts val="300"/>
-              </a:spcBef>
-              <a:spcAft>
-                <a:spcPts val="300"/>
-              </a:spcAft>
-              <a:buNone/>
-            </a:pPr>
-            <a:r>
-              <a:rPr lang="en-US" sz="1200" dirty="0">
-                <a:solidFill>
-                  <a:srgbClr val="1C2833"/>
-                </a:solidFill>
-                <a:latin typeface="Arial" pitchFamily="34" charset="0"/>
-                <a:ea typeface="Arial" pitchFamily="34" charset="-122"/>
-                <a:cs typeface="Arial" pitchFamily="34" charset="-120"/>
-              </a:rPr>
-              <a:t>" &gt; &gt; "O Gaṅgā, Yamunā, Godāvarī, Sarasvatī, Narmadā, Sindhu, Kāverī — be present in this water."</a:t>
-            </a:r>
-            <a:endParaRPr lang="en-US" sz="1200" dirty="0"/>
-          </a:p>
-        </p:txBody>
-      </p:sp>
-      <p:sp>
-        <p:nvSpPr>
-          <p:cNvPr id="8" name="Text 6"/>
-          <p:cNvSpPr/>
-          <p:nvPr/>
-        </p:nvSpPr>
-        <p:spPr>
-          <a:xfrm>
-            <a:off x="406301" y="2336006"/>
-            <a:ext cx="8498026" cy="426541"/>
-          </a:xfrm>
-          <a:prstGeom prst="rect">
-            <a:avLst/>
-          </a:prstGeom>
-          <a:noFill/>
-          <a:ln/>
-        </p:spPr>
-        <p:txBody>
-          <a:bodyPr wrap="square" lIns="0" tIns="0" rIns="0" bIns="0" rtlCol="0" anchor="t"/>
-          <a:lstStyle/>
-          <a:p>
-            <a:pPr algn="l" indent="0" marL="0">
-              <a:lnSpc>
-                <a:spcPts val="1680"/>
-              </a:lnSpc>
-              <a:spcBef>
-                <a:spcPts val="300"/>
-              </a:spcBef>
-              <a:spcAft>
-                <a:spcPts val="300"/>
-              </a:spcAft>
-              <a:buNone/>
-            </a:pPr>
-            <a:r>
-              <a:rPr lang="en-US" sz="1200" dirty="0">
-                <a:solidFill>
-                  <a:srgbClr val="1C2833"/>
-                </a:solidFill>
-                <a:latin typeface="Arial" pitchFamily="34" charset="0"/>
-                <a:ea typeface="Arial" pitchFamily="34" charset="-122"/>
-                <a:cs typeface="Arial" pitchFamily="34" charset="-120"/>
-              </a:rPr>
-              <a:t>The verse is chanted while pouring even a glass of water before drinking, in many households. The idea: every drop of water carries the dignity of every great river.</a:t>
-            </a:r>
-            <a:endParaRPr lang="en-US" sz="1200" dirty="0"/>
-          </a:p>
-        </p:txBody>
-      </p:sp>
-      <p:sp>
-        <p:nvSpPr>
-          <p:cNvPr id="9" name="Text 7"/>
-          <p:cNvSpPr/>
-          <p:nvPr/>
-        </p:nvSpPr>
-        <p:spPr>
-          <a:xfrm>
-            <a:off x="634901" y="2851398"/>
-            <a:ext cx="8102798" cy="281880"/>
-          </a:xfrm>
-          <a:prstGeom prst="rect">
-            <a:avLst/>
-          </a:prstGeom>
-          <a:noFill/>
-          <a:ln/>
-        </p:spPr>
-        <p:txBody>
-          <a:bodyPr wrap="square" lIns="0" tIns="0" rIns="0" bIns="0" rtlCol="0" anchor="t"/>
-          <a:lstStyle/>
           <a:p>
             <a:pPr algn="l" marL="342900" indent="-342900">
               <a:lnSpc>
@@ -4930,15 +7374,15 @@
               <a:buChar char="•"/>
             </a:pPr>
             <a:r>
-              <a:rPr lang="en-US" sz="1200" b="1" dirty="0">
-                <a:solidFill>
-                  <a:srgbClr val="1C2833"/>
-                </a:solidFill>
-                <a:latin typeface="Arial" pitchFamily="34" charset="0"/>
-                <a:ea typeface="Arial" pitchFamily="34" charset="-122"/>
-                <a:cs typeface="Arial" pitchFamily="34" charset="-120"/>
-              </a:rPr>
-              <a:t>What "sacred" did in practice.</a:t>
+              <a:rPr lang="en-US" sz="1200" dirty="0">
+                <a:solidFill>
+                  <a:srgbClr val="1C2833"/>
+                </a:solidFill>
+                <a:latin typeface="Arial" pitchFamily="34" charset="0"/>
+                <a:ea typeface="Arial" pitchFamily="34" charset="-122"/>
+                <a:cs typeface="Arial" pitchFamily="34" charset="-120"/>
+              </a:rPr>
+              <a:t>Ask: </a:t>
             </a:r>
             <a:pPr algn="l" indent="0" marL="0">
               <a:lnSpc>
@@ -4950,228 +7394,18 @@
               <a:buNone/>
             </a:pPr>
             <a:r>
-              <a:rPr lang="en-US" sz="1200" dirty="0">
-                <a:solidFill>
-                  <a:srgbClr val="1C2833"/>
-                </a:solidFill>
-                <a:latin typeface="Arial" pitchFamily="34" charset="0"/>
-                <a:ea typeface="Arial" pitchFamily="34" charset="-122"/>
-                <a:cs typeface="Arial" pitchFamily="34" charset="-120"/>
-              </a:rPr>
-              <a:t> When a river is sacred:</a:t>
+              <a:rPr lang="en-US" sz="1200" i="1" dirty="0">
+                <a:solidFill>
+                  <a:srgbClr val="1C2833"/>
+                </a:solidFill>
+                <a:latin typeface="Arial" pitchFamily="34" charset="0"/>
+                <a:ea typeface="Arial" pitchFamily="34" charset="-122"/>
+                <a:cs typeface="Arial" pitchFamily="34" charset="-120"/>
+              </a:rPr>
+              <a:t>"Same religion. Same river. Same name. Why does one look sacred and the other look like a sewer?"</a:t>
             </a:r>
             <a:endParaRPr lang="en-US" sz="1200" dirty="0"/>
           </a:p>
-        </p:txBody>
-      </p:sp>
-      <p:sp>
-        <p:nvSpPr>
-          <p:cNvPr id="10" name="Text 8"/>
-          <p:cNvSpPr/>
-          <p:nvPr/>
-        </p:nvSpPr>
-        <p:spPr>
-          <a:xfrm>
-            <a:off x="406301" y="3222129"/>
-            <a:ext cx="8498026" cy="426541"/>
-          </a:xfrm>
-          <a:prstGeom prst="rect">
-            <a:avLst/>
-          </a:prstGeom>
-          <a:noFill/>
-          <a:ln/>
-        </p:spPr>
-        <p:txBody>
-          <a:bodyPr wrap="square" lIns="0" tIns="0" rIns="0" bIns="0" rtlCol="0" anchor="t"/>
-          <a:lstStyle/>
-          <a:p>
-            <a:pPr algn="l" indent="0" marL="0">
-              <a:lnSpc>
-                <a:spcPts val="1680"/>
-              </a:lnSpc>
-              <a:spcBef>
-                <a:spcPts val="300"/>
-              </a:spcBef>
-              <a:spcAft>
-                <a:spcPts val="300"/>
-              </a:spcAft>
-              <a:buNone/>
-            </a:pPr>
-            <a:r>
-              <a:rPr lang="en-US" sz="1200" dirty="0">
-                <a:solidFill>
-                  <a:srgbClr val="1C2833"/>
-                </a:solidFill>
-                <a:latin typeface="Arial" pitchFamily="34" charset="0"/>
-                <a:ea typeface="Arial" pitchFamily="34" charset="-122"/>
-                <a:cs typeface="Arial" pitchFamily="34" charset="-120"/>
-              </a:rPr>
-              <a:t>– You don't urinate or defecate in it (taboo). – You don't dump bodies (well — you cremate, then immerse ash, with rules). – You don't drain it for one farmer's field at the cost of the village. – You build steps (</a:t>
-            </a:r>
-            <a:pPr algn="l" indent="0" marL="0">
-              <a:lnSpc>
-                <a:spcPts val="1680"/>
-              </a:lnSpc>
-              <a:spcBef>
-                <a:spcPts val="300"/>
-              </a:spcBef>
-              <a:spcAft>
-                <a:spcPts val="300"/>
-              </a:spcAft>
-              <a:buNone/>
-            </a:pPr>
-            <a:r>
-              <a:rPr lang="en-US" sz="1200" i="1" dirty="0">
-                <a:solidFill>
-                  <a:srgbClr val="1C2833"/>
-                </a:solidFill>
-                <a:latin typeface="Arial" pitchFamily="34" charset="0"/>
-                <a:ea typeface="Arial" pitchFamily="34" charset="-122"/>
-                <a:cs typeface="Arial" pitchFamily="34" charset="-120"/>
-              </a:rPr>
-              <a:t>ghāṭ</a:t>
-            </a:r>
-            <a:pPr algn="l" indent="0" marL="0">
-              <a:lnSpc>
-                <a:spcPts val="1680"/>
-              </a:lnSpc>
-              <a:spcBef>
-                <a:spcPts val="300"/>
-              </a:spcBef>
-              <a:spcAft>
-                <a:spcPts val="300"/>
-              </a:spcAft>
-              <a:buNone/>
-            </a:pPr>
-            <a:r>
-              <a:rPr lang="en-US" sz="1200" dirty="0">
-                <a:solidFill>
-                  <a:srgbClr val="1C2833"/>
-                </a:solidFill>
-                <a:latin typeface="Arial" pitchFamily="34" charset="0"/>
-                <a:ea typeface="Arial" pitchFamily="34" charset="-122"/>
-                <a:cs typeface="Arial" pitchFamily="34" charset="-120"/>
-              </a:rPr>
-              <a:t>) to it; you maintain those steps.</a:t>
-            </a:r>
-            <a:endParaRPr lang="en-US" sz="1200" dirty="0"/>
-          </a:p>
-        </p:txBody>
-      </p:sp>
-      <p:sp>
-        <p:nvSpPr>
-          <p:cNvPr id="11" name="Text 9"/>
-          <p:cNvSpPr/>
-          <p:nvPr/>
-        </p:nvSpPr>
-        <p:spPr>
-          <a:xfrm>
-            <a:off x="406301" y="3724870"/>
-            <a:ext cx="8498026" cy="426541"/>
-          </a:xfrm>
-          <a:prstGeom prst="rect">
-            <a:avLst/>
-          </a:prstGeom>
-          <a:noFill/>
-          <a:ln/>
-        </p:spPr>
-        <p:txBody>
-          <a:bodyPr wrap="square" lIns="0" tIns="0" rIns="0" bIns="0" rtlCol="0" anchor="t"/>
-          <a:lstStyle/>
-          <a:p>
-            <a:pPr algn="l" indent="0" marL="0">
-              <a:lnSpc>
-                <a:spcPts val="1680"/>
-              </a:lnSpc>
-              <a:spcBef>
-                <a:spcPts val="300"/>
-              </a:spcBef>
-              <a:spcAft>
-                <a:spcPts val="300"/>
-              </a:spcAft>
-              <a:buNone/>
-            </a:pPr>
-            <a:r>
-              <a:rPr lang="en-US" sz="1200" dirty="0">
-                <a:solidFill>
-                  <a:srgbClr val="1C2833"/>
-                </a:solidFill>
-                <a:latin typeface="Arial" pitchFamily="34" charset="0"/>
-                <a:ea typeface="Arial" pitchFamily="34" charset="-122"/>
-                <a:cs typeface="Arial" pitchFamily="34" charset="-120"/>
-              </a:rPr>
-              <a:t>When a river is </a:t>
-            </a:r>
-            <a:pPr algn="l" indent="0" marL="0">
-              <a:lnSpc>
-                <a:spcPts val="1680"/>
-              </a:lnSpc>
-              <a:spcBef>
-                <a:spcPts val="300"/>
-              </a:spcBef>
-              <a:spcAft>
-                <a:spcPts val="300"/>
-              </a:spcAft>
-              <a:buNone/>
-            </a:pPr>
-            <a:r>
-              <a:rPr lang="en-US" sz="1200" i="1" dirty="0">
-                <a:solidFill>
-                  <a:srgbClr val="1C2833"/>
-                </a:solidFill>
-                <a:latin typeface="Arial" pitchFamily="34" charset="0"/>
-                <a:ea typeface="Arial" pitchFamily="34" charset="-122"/>
-                <a:cs typeface="Arial" pitchFamily="34" charset="-120"/>
-              </a:rPr>
-              <a:t>not</a:t>
-            </a:r>
-            <a:pPr algn="l" indent="0" marL="0">
-              <a:lnSpc>
-                <a:spcPts val="1680"/>
-              </a:lnSpc>
-              <a:spcBef>
-                <a:spcPts val="300"/>
-              </a:spcBef>
-              <a:spcAft>
-                <a:spcPts val="300"/>
-              </a:spcAft>
-              <a:buNone/>
-            </a:pPr>
-            <a:r>
-              <a:rPr lang="en-US" sz="1200" dirty="0">
-                <a:solidFill>
-                  <a:srgbClr val="1C2833"/>
-                </a:solidFill>
-                <a:latin typeface="Arial" pitchFamily="34" charset="0"/>
-                <a:ea typeface="Arial" pitchFamily="34" charset="-122"/>
-                <a:cs typeface="Arial" pitchFamily="34" charset="-120"/>
-              </a:rPr>
-              <a:t> sacred — or when the sacredness gets only ritual attention and not behavioural attention — you get the second photograph.</a:t>
-            </a:r>
-            <a:endParaRPr lang="en-US" sz="1200" dirty="0"/>
-          </a:p>
-        </p:txBody>
-      </p:sp>
-      <p:sp>
-        <p:nvSpPr>
-          <p:cNvPr id="12" name="Text 10"/>
-          <p:cNvSpPr/>
-          <p:nvPr/>
-        </p:nvSpPr>
-        <p:spPr>
-          <a:xfrm>
-            <a:off x="634901" y="4240262"/>
-            <a:ext cx="8102798" cy="898922"/>
-          </a:xfrm>
-          <a:prstGeom prst="rect">
-            <a:avLst/>
-          </a:prstGeom>
-          <a:noFill/>
-          <a:ln/>
-        </p:spPr>
-        <p:txBody>
-          <a:bodyPr wrap="square" lIns="0" tIns="0" rIns="0" bIns="0" rtlCol="0" anchor="t"/>
-          <a:lstStyle/>
           <a:p>
             <a:pPr algn="l" marL="342900" indent="-342900">
               <a:lnSpc>
@@ -5184,26 +7418,6 @@
               <a:buChar char="•"/>
             </a:pPr>
             <a:r>
-              <a:rPr lang="en-US" sz="1200" b="1" dirty="0">
-                <a:solidFill>
-                  <a:srgbClr val="1C2833"/>
-                </a:solidFill>
-                <a:latin typeface="Arial" pitchFamily="34" charset="0"/>
-                <a:ea typeface="Arial" pitchFamily="34" charset="-122"/>
-                <a:cs typeface="Arial" pitchFamily="34" charset="-120"/>
-              </a:rPr>
-              <a:t>Where the system worked and where it broke.</a:t>
-            </a:r>
-            <a:pPr algn="l" indent="0" marL="0">
-              <a:lnSpc>
-                <a:spcPts val="1620"/>
-              </a:lnSpc>
-              <a:spcAft>
-                <a:spcPts val="300"/>
-              </a:spcAft>
-              <a:buNone/>
-            </a:pPr>
-            <a:r>
               <a:rPr lang="en-US" sz="1200" dirty="0">
                 <a:solidFill>
                   <a:srgbClr val="1C2833"/>
@@ -5212,47 +7426,7 @@
                 <a:ea typeface="Arial" pitchFamily="34" charset="-122"/>
                 <a:cs typeface="Arial" pitchFamily="34" charset="-120"/>
               </a:rPr>
-              <a:t> Sacred-status protected upper-stretch rivers and small streams in many villages for centuries. It did </a:t>
-            </a:r>
-            <a:pPr algn="l" indent="0" marL="0">
-              <a:lnSpc>
-                <a:spcPts val="1620"/>
-              </a:lnSpc>
-              <a:spcAft>
-                <a:spcPts val="300"/>
-              </a:spcAft>
-              <a:buNone/>
-            </a:pPr>
-            <a:r>
-              <a:rPr lang="en-US" sz="1200" i="1" dirty="0">
-                <a:solidFill>
-                  <a:srgbClr val="1C2833"/>
-                </a:solidFill>
-                <a:latin typeface="Arial" pitchFamily="34" charset="0"/>
-                <a:ea typeface="Arial" pitchFamily="34" charset="-122"/>
-                <a:cs typeface="Arial" pitchFamily="34" charset="-120"/>
-              </a:rPr>
-              <a:t>not</a:t>
-            </a:r>
-            <a:pPr algn="l" indent="0" marL="0">
-              <a:lnSpc>
-                <a:spcPts val="1620"/>
-              </a:lnSpc>
-              <a:spcAft>
-                <a:spcPts val="300"/>
-              </a:spcAft>
-              <a:buNone/>
-            </a:pPr>
-            <a:r>
-              <a:rPr lang="en-US" sz="1200" dirty="0">
-                <a:solidFill>
-                  <a:srgbClr val="1C2833"/>
-                </a:solidFill>
-                <a:latin typeface="Arial" pitchFamily="34" charset="0"/>
-                <a:ea typeface="Arial" pitchFamily="34" charset="-122"/>
-                <a:cs typeface="Arial" pitchFamily="34" charset="-120"/>
-              </a:rPr>
-              <a:t> protect the urban stretches once cities grew, industry came, and population grew faster than the river could absorb. The Gaṅgā at Haridwar (upper) is still relatively clean; at Kanpur (urban industrial) it is among India's most polluted stretches.</a:t>
+              <a:t>Take 2–3 student responses. Don't resolve yet.</a:t>
             </a:r>
             <a:endParaRPr lang="en-US" sz="1200" dirty="0"/>
           </a:p>
@@ -5260,359 +7434,13 @@
       </p:sp>
       <p:sp>
         <p:nvSpPr>
-          <p:cNvPr id="13" name="Text 11"/>
-          <p:cNvSpPr/>
-          <p:nvPr/>
-        </p:nvSpPr>
-        <p:spPr>
-          <a:xfrm>
-            <a:off x="406301" y="5228034"/>
-            <a:ext cx="8498026" cy="213271"/>
-          </a:xfrm>
-          <a:prstGeom prst="rect">
-            <a:avLst/>
-          </a:prstGeom>
-          <a:noFill/>
-          <a:ln/>
-        </p:spPr>
-        <p:txBody>
-          <a:bodyPr wrap="square" lIns="0" tIns="0" rIns="0" bIns="0" rtlCol="0" anchor="t"/>
-          <a:lstStyle/>
-          <a:p>
-            <a:pPr algn="l" indent="0" marL="0">
-              <a:lnSpc>
-                <a:spcPts val="1680"/>
-              </a:lnSpc>
-              <a:spcBef>
-                <a:spcPts val="300"/>
-              </a:spcBef>
-              <a:spcAft>
-                <a:spcPts val="300"/>
-              </a:spcAft>
-              <a:buNone/>
-            </a:pPr>
-            <a:r>
-              <a:rPr lang="en-US" sz="1200" dirty="0">
-                <a:solidFill>
-                  <a:srgbClr val="1C2833"/>
-                </a:solidFill>
-                <a:latin typeface="Arial" pitchFamily="34" charset="0"/>
-                <a:ea typeface="Arial" pitchFamily="34" charset="-122"/>
-                <a:cs typeface="Arial" pitchFamily="34" charset="-120"/>
-              </a:rPr>
-              <a:t>This is the honest pattern: the tradition gave us a </a:t>
-            </a:r>
-            <a:pPr algn="l" indent="0" marL="0">
-              <a:lnSpc>
-                <a:spcPts val="1680"/>
-              </a:lnSpc>
-              <a:spcBef>
-                <a:spcPts val="300"/>
-              </a:spcBef>
-              <a:spcAft>
-                <a:spcPts val="300"/>
-              </a:spcAft>
-              <a:buNone/>
-            </a:pPr>
-            <a:r>
-              <a:rPr lang="en-US" sz="1200" i="1" dirty="0">
-                <a:solidFill>
-                  <a:srgbClr val="1C2833"/>
-                </a:solidFill>
-                <a:latin typeface="Arial" pitchFamily="34" charset="0"/>
-                <a:ea typeface="Arial" pitchFamily="34" charset="-122"/>
-                <a:cs typeface="Arial" pitchFamily="34" charset="-120"/>
-              </a:rPr>
-              <a:t>protective attitude</a:t>
-            </a:r>
-            <a:pPr algn="l" indent="0" marL="0">
-              <a:lnSpc>
-                <a:spcPts val="1680"/>
-              </a:lnSpc>
-              <a:spcBef>
-                <a:spcPts val="300"/>
-              </a:spcBef>
-              <a:spcAft>
-                <a:spcPts val="300"/>
-              </a:spcAft>
-              <a:buNone/>
-            </a:pPr>
-            <a:r>
-              <a:rPr lang="en-US" sz="1200" dirty="0">
-                <a:solidFill>
-                  <a:srgbClr val="1C2833"/>
-                </a:solidFill>
-                <a:latin typeface="Arial" pitchFamily="34" charset="0"/>
-                <a:ea typeface="Arial" pitchFamily="34" charset="-122"/>
-                <a:cs typeface="Arial" pitchFamily="34" charset="-120"/>
-              </a:rPr>
-              <a:t>, not a </a:t>
-            </a:r>
-            <a:pPr algn="l" indent="0" marL="0">
-              <a:lnSpc>
-                <a:spcPts val="1680"/>
-              </a:lnSpc>
-              <a:spcBef>
-                <a:spcPts val="300"/>
-              </a:spcBef>
-              <a:spcAft>
-                <a:spcPts val="300"/>
-              </a:spcAft>
-              <a:buNone/>
-            </a:pPr>
-            <a:r>
-              <a:rPr lang="en-US" sz="1200" i="1" dirty="0">
-                <a:solidFill>
-                  <a:srgbClr val="1C2833"/>
-                </a:solidFill>
-                <a:latin typeface="Arial" pitchFamily="34" charset="0"/>
-                <a:ea typeface="Arial" pitchFamily="34" charset="-122"/>
-                <a:cs typeface="Arial" pitchFamily="34" charset="-120"/>
-              </a:rPr>
-              <a:t>technical solution</a:t>
-            </a:r>
-            <a:pPr algn="l" indent="0" marL="0">
-              <a:lnSpc>
-                <a:spcPts val="1680"/>
-              </a:lnSpc>
-              <a:spcBef>
-                <a:spcPts val="300"/>
-              </a:spcBef>
-              <a:spcAft>
-                <a:spcPts val="300"/>
-              </a:spcAft>
-              <a:buNone/>
-            </a:pPr>
-            <a:r>
-              <a:rPr lang="en-US" sz="1200" dirty="0">
-                <a:solidFill>
-                  <a:srgbClr val="1C2833"/>
-                </a:solidFill>
-                <a:latin typeface="Arial" pitchFamily="34" charset="0"/>
-                <a:ea typeface="Arial" pitchFamily="34" charset="-122"/>
-                <a:cs typeface="Arial" pitchFamily="34" charset="-120"/>
-              </a:rPr>
-              <a:t>. Both are needed.</a:t>
-            </a:r>
-            <a:endParaRPr lang="en-US" sz="1200" dirty="0"/>
-          </a:p>
-        </p:txBody>
-      </p:sp>
-      <p:sp>
-        <p:nvSpPr>
-          <p:cNvPr id="14" name="Text 12"/>
-          <p:cNvSpPr/>
-          <p:nvPr/>
-        </p:nvSpPr>
-        <p:spPr>
-          <a:xfrm>
-            <a:off x="634901" y="5530155"/>
-            <a:ext cx="8102798" cy="693241"/>
-          </a:xfrm>
-          <a:prstGeom prst="rect">
-            <a:avLst/>
-          </a:prstGeom>
-          <a:noFill/>
-          <a:ln/>
-        </p:spPr>
-        <p:txBody>
-          <a:bodyPr wrap="square" lIns="0" tIns="0" rIns="0" bIns="0" rtlCol="0" anchor="t"/>
-          <a:lstStyle/>
-          <a:p>
-            <a:pPr algn="l" marL="342900" indent="-342900">
-              <a:lnSpc>
-                <a:spcPts val="1620"/>
-              </a:lnSpc>
-              <a:spcAft>
-                <a:spcPts val="300"/>
-              </a:spcAft>
-              <a:buSzPct val="100000"/>
-              <a:buChar char="•"/>
-            </a:pPr>
-            <a:r>
-              <a:rPr lang="en-US" sz="1200" b="1" dirty="0">
-                <a:solidFill>
-                  <a:srgbClr val="1C2833"/>
-                </a:solidFill>
-                <a:latin typeface="Arial" pitchFamily="34" charset="0"/>
-                <a:ea typeface="Arial" pitchFamily="34" charset="-122"/>
-                <a:cs typeface="Arial" pitchFamily="34" charset="-120"/>
-              </a:rPr>
-              <a:t>The contemporary state — quick numbers.</a:t>
-            </a:r>
-            <a:pPr algn="l" indent="0" marL="0">
-              <a:lnSpc>
-                <a:spcPts val="1620"/>
-              </a:lnSpc>
-              <a:spcAft>
-                <a:spcPts val="300"/>
-              </a:spcAft>
-              <a:buNone/>
-            </a:pPr>
-            <a:r>
-              <a:rPr lang="en-US" sz="1200" dirty="0">
-                <a:solidFill>
-                  <a:srgbClr val="1C2833"/>
-                </a:solidFill>
-                <a:latin typeface="Arial" pitchFamily="34" charset="0"/>
-                <a:ea typeface="Arial" pitchFamily="34" charset="-122"/>
-                <a:cs typeface="Arial" pitchFamily="34" charset="-120"/>
-              </a:rPr>
-              <a:t> (Source: Central Pollution Control Board, government of India, annual river-water-quality reports.) Of India's major river stretches monitored, more than 100 are in the "polluted" category (Class C or worse). Sewage is the primary cause. Industrial effluent is the second.</a:t>
-            </a:r>
-            <a:endParaRPr lang="en-US" sz="1200" dirty="0"/>
-          </a:p>
-        </p:txBody>
-      </p:sp>
-      <p:sp>
-        <p:nvSpPr>
-          <p:cNvPr id="15" name="Text 13"/>
-          <p:cNvSpPr/>
-          <p:nvPr/>
-        </p:nvSpPr>
-        <p:spPr>
-          <a:xfrm>
-            <a:off x="406301" y="6312247"/>
-            <a:ext cx="8498026" cy="639812"/>
-          </a:xfrm>
-          <a:prstGeom prst="rect">
-            <a:avLst/>
-          </a:prstGeom>
-          <a:noFill/>
-          <a:ln/>
-        </p:spPr>
-        <p:txBody>
-          <a:bodyPr wrap="square" lIns="0" tIns="0" rIns="0" bIns="0" rtlCol="0" anchor="t"/>
-          <a:lstStyle/>
-          <a:p>
-            <a:pPr algn="l" indent="0" marL="0">
-              <a:lnSpc>
-                <a:spcPts val="1680"/>
-              </a:lnSpc>
-              <a:spcBef>
-                <a:spcPts val="300"/>
-              </a:spcBef>
-              <a:spcAft>
-                <a:spcPts val="300"/>
-              </a:spcAft>
-              <a:buNone/>
-            </a:pPr>
-            <a:r>
-              <a:rPr lang="en-US" sz="1200" dirty="0">
-                <a:solidFill>
-                  <a:srgbClr val="1C2833"/>
-                </a:solidFill>
-                <a:latin typeface="Arial" pitchFamily="34" charset="0"/>
-                <a:ea typeface="Arial" pitchFamily="34" charset="-122"/>
-                <a:cs typeface="Arial" pitchFamily="34" charset="-120"/>
-              </a:rPr>
-              <a:t>The remedy is being attempted — Namami Gange (the national clean-up programme) is one example. The tradition can supply the </a:t>
-            </a:r>
-            <a:pPr algn="l" indent="0" marL="0">
-              <a:lnSpc>
-                <a:spcPts val="1680"/>
-              </a:lnSpc>
-              <a:spcBef>
-                <a:spcPts val="300"/>
-              </a:spcBef>
-              <a:spcAft>
-                <a:spcPts val="300"/>
-              </a:spcAft>
-              <a:buNone/>
-            </a:pPr>
-            <a:r>
-              <a:rPr lang="en-US" sz="1200" i="1" dirty="0">
-                <a:solidFill>
-                  <a:srgbClr val="1C2833"/>
-                </a:solidFill>
-                <a:latin typeface="Arial" pitchFamily="34" charset="0"/>
-                <a:ea typeface="Arial" pitchFamily="34" charset="-122"/>
-                <a:cs typeface="Arial" pitchFamily="34" charset="-120"/>
-              </a:rPr>
-              <a:t>will</a:t>
-            </a:r>
-            <a:pPr algn="l" indent="0" marL="0">
-              <a:lnSpc>
-                <a:spcPts val="1680"/>
-              </a:lnSpc>
-              <a:spcBef>
-                <a:spcPts val="300"/>
-              </a:spcBef>
-              <a:spcAft>
-                <a:spcPts val="300"/>
-              </a:spcAft>
-              <a:buNone/>
-            </a:pPr>
-            <a:r>
-              <a:rPr lang="en-US" sz="1200" dirty="0">
-                <a:solidFill>
-                  <a:srgbClr val="1C2833"/>
-                </a:solidFill>
-                <a:latin typeface="Arial" pitchFamily="34" charset="0"/>
-                <a:ea typeface="Arial" pitchFamily="34" charset="-122"/>
-                <a:cs typeface="Arial" pitchFamily="34" charset="-120"/>
-              </a:rPr>
-              <a:t> (this river is sacred — we must clean it); the engineers supply the </a:t>
-            </a:r>
-            <a:pPr algn="l" indent="0" marL="0">
-              <a:lnSpc>
-                <a:spcPts val="1680"/>
-              </a:lnSpc>
-              <a:spcBef>
-                <a:spcPts val="300"/>
-              </a:spcBef>
-              <a:spcAft>
-                <a:spcPts val="300"/>
-              </a:spcAft>
-              <a:buNone/>
-            </a:pPr>
-            <a:r>
-              <a:rPr lang="en-US" sz="1200" i="1" dirty="0">
-                <a:solidFill>
-                  <a:srgbClr val="1C2833"/>
-                </a:solidFill>
-                <a:latin typeface="Arial" pitchFamily="34" charset="0"/>
-                <a:ea typeface="Arial" pitchFamily="34" charset="-122"/>
-                <a:cs typeface="Arial" pitchFamily="34" charset="-120"/>
-              </a:rPr>
-              <a:t>means</a:t>
-            </a:r>
-            <a:pPr algn="l" indent="0" marL="0">
-              <a:lnSpc>
-                <a:spcPts val="1680"/>
-              </a:lnSpc>
-              <a:spcBef>
-                <a:spcPts val="300"/>
-              </a:spcBef>
-              <a:spcAft>
-                <a:spcPts val="300"/>
-              </a:spcAft>
-              <a:buNone/>
-            </a:pPr>
-            <a:r>
-              <a:rPr lang="en-US" sz="1200" dirty="0">
-                <a:solidFill>
-                  <a:srgbClr val="1C2833"/>
-                </a:solidFill>
-                <a:latin typeface="Arial" pitchFamily="34" charset="0"/>
-                <a:ea typeface="Arial" pitchFamily="34" charset="-122"/>
-                <a:cs typeface="Arial" pitchFamily="34" charset="-120"/>
-              </a:rPr>
-              <a:t> (sewage treatment plants, monitoring, accountability).</a:t>
-            </a:r>
-            <a:endParaRPr lang="en-US" sz="1200" dirty="0"/>
-          </a:p>
-        </p:txBody>
-      </p:sp>
-      <p:sp>
-        <p:nvSpPr>
-          <p:cNvPr id="16" name="Text 14"/>
-          <p:cNvSpPr/>
-          <p:nvPr/>
-        </p:nvSpPr>
-        <p:spPr>
-          <a:xfrm>
-            <a:off x="406301" y="7104459"/>
+          <p:cNvPr id="5" name="Text 3"/>
+          <p:cNvSpPr/>
+          <p:nvPr/>
+        </p:nvSpPr>
+        <p:spPr>
+          <a:xfrm>
+            <a:off x="406301" y="4434929"/>
             <a:ext cx="8498026" cy="213271"/>
           </a:xfrm>
           <a:prstGeom prst="rect">
@@ -5756,7 +7584,7 @@
                 <a:ea typeface="Georgia" pitchFamily="34" charset="-122"/>
                 <a:cs typeface="Georgia" pitchFamily="34" charset="-120"/>
               </a:rPr>
-              <a:t>Activity (15 min) — Find Your River</a:t>
+              <a:t>Core (20 min)</a:t>
             </a:r>
             <a:endParaRPr lang="en-US" sz="1800" dirty="0"/>
           </a:p>
@@ -5770,8 +7598,8 @@
         </p:nvSpPr>
         <p:spPr>
           <a:xfrm>
-            <a:off x="406301" y="870942"/>
-            <a:ext cx="8498026" cy="1066354"/>
+            <a:off x="634901" y="883593"/>
+            <a:ext cx="8102798" cy="281880"/>
           </a:xfrm>
           <a:prstGeom prst="rect">
             <a:avLst/>
@@ -5783,6 +7611,173 @@
           <a:bodyPr wrap="square" lIns="0" tIns="0" rIns="0" bIns="0" rtlCol="0" anchor="t"/>
           <a:lstStyle/>
           <a:p>
+            <a:pPr algn="l" marL="342900" indent="-342900">
+              <a:lnSpc>
+                <a:spcPts val="1620"/>
+              </a:lnSpc>
+              <a:spcAft>
+                <a:spcPts val="300"/>
+              </a:spcAft>
+              <a:buSzPct val="100000"/>
+              <a:buChar char="•"/>
+            </a:pPr>
+            <a:r>
+              <a:rPr lang="en-US" sz="1200" b="1" dirty="0">
+                <a:solidFill>
+                  <a:srgbClr val="1C2833"/>
+                </a:solidFill>
+                <a:latin typeface="Arial" pitchFamily="34" charset="0"/>
+                <a:ea typeface="Arial" pitchFamily="34" charset="-122"/>
+                <a:cs typeface="Arial" pitchFamily="34" charset="-120"/>
+              </a:rPr>
+              <a:t>The seven rivers.</a:t>
+            </a:r>
+            <a:pPr algn="l" indent="0" marL="0">
+              <a:lnSpc>
+                <a:spcPts val="1620"/>
+              </a:lnSpc>
+              <a:spcAft>
+                <a:spcPts val="300"/>
+              </a:spcAft>
+              <a:buNone/>
+            </a:pPr>
+            <a:r>
+              <a:rPr lang="en-US" sz="1200" dirty="0">
+                <a:solidFill>
+                  <a:srgbClr val="1C2833"/>
+                </a:solidFill>
+                <a:latin typeface="Arial" pitchFamily="34" charset="0"/>
+                <a:ea typeface="Arial" pitchFamily="34" charset="-122"/>
+                <a:cs typeface="Arial" pitchFamily="34" charset="-120"/>
+              </a:rPr>
+              <a:t> Write on the board:</a:t>
+            </a:r>
+            <a:endParaRPr lang="en-US" sz="1200" dirty="0"/>
+          </a:p>
+        </p:txBody>
+      </p:sp>
+      <p:sp>
+        <p:nvSpPr>
+          <p:cNvPr id="5" name="Text 3"/>
+          <p:cNvSpPr/>
+          <p:nvPr/>
+        </p:nvSpPr>
+        <p:spPr>
+          <a:xfrm>
+            <a:off x="406301" y="1266974"/>
+            <a:ext cx="8331398" cy="611981"/>
+          </a:xfrm>
+          <a:prstGeom prst="rect">
+            <a:avLst/>
+          </a:prstGeom>
+          <a:solidFill>
+            <a:srgbClr val="F4F8F9"/>
+          </a:solidFill>
+          <a:ln/>
+        </p:spPr>
+        <p:txBody>
+          <a:bodyPr wrap="square" rtlCol="0" anchor="ctr"/>
+          <a:lstStyle/>
+          <a:p>
+            <a:pPr indent="0" marL="0">
+              <a:buNone/>
+            </a:pPr>
+            <a:endParaRPr lang="en-US" dirty="0"/>
+          </a:p>
+        </p:txBody>
+      </p:sp>
+      <p:sp>
+        <p:nvSpPr>
+          <p:cNvPr id="6" name="Shape 4"/>
+          <p:cNvSpPr/>
+          <p:nvPr/>
+        </p:nvSpPr>
+        <p:spPr>
+          <a:xfrm>
+            <a:off x="434876" y="1266974"/>
+            <a:ext cx="0" cy="611981"/>
+          </a:xfrm>
+          <a:prstGeom prst="line">
+            <a:avLst/>
+          </a:prstGeom>
+          <a:noFill/>
+          <a:ln w="57150">
+            <a:solidFill>
+              <a:srgbClr val="FE4447"/>
+            </a:solidFill>
+            <a:prstDash val="solid"/>
+          </a:ln>
+        </p:spPr>
+      </p:sp>
+      <p:sp>
+        <p:nvSpPr>
+          <p:cNvPr id="7" name="Text 5"/>
+          <p:cNvSpPr/>
+          <p:nvPr/>
+        </p:nvSpPr>
+        <p:spPr>
+          <a:xfrm>
+            <a:off x="692051" y="1457474"/>
+            <a:ext cx="7973389" cy="230981"/>
+          </a:xfrm>
+          <a:prstGeom prst="rect">
+            <a:avLst/>
+          </a:prstGeom>
+          <a:noFill/>
+          <a:ln/>
+        </p:spPr>
+        <p:txBody>
+          <a:bodyPr wrap="square" lIns="0" tIns="0" rIns="0" bIns="0" rtlCol="0" anchor="t"/>
+          <a:lstStyle/>
+          <a:p>
+            <a:pPr algn="l" indent="0" marL="0">
+              <a:lnSpc>
+                <a:spcPts val="1820"/>
+              </a:lnSpc>
+              <a:spcBef>
+                <a:spcPts val="300"/>
+              </a:spcBef>
+              <a:spcAft>
+                <a:spcPts val="300"/>
+              </a:spcAft>
+              <a:buNone/>
+            </a:pPr>
+            <a:r>
+              <a:rPr lang="en-US" sz="1300" i="1" dirty="0">
+                <a:solidFill>
+                  <a:srgbClr val="1C2833"/>
+                </a:solidFill>
+                <a:latin typeface="Georgia" pitchFamily="34" charset="0"/>
+                <a:ea typeface="Georgia" pitchFamily="34" charset="-122"/>
+                <a:cs typeface="Georgia" pitchFamily="34" charset="-120"/>
+              </a:rPr>
+              <a:t>Gaṅgā · Yamunā · Sarasvatī · Sindhu · Godāvarī · Narmadā · Kāverī</a:t>
+            </a:r>
+            <a:endParaRPr lang="en-US" sz="1300" dirty="0"/>
+          </a:p>
+        </p:txBody>
+      </p:sp>
+      <p:sp>
+        <p:nvSpPr>
+          <p:cNvPr id="8" name="Text 6"/>
+          <p:cNvSpPr/>
+          <p:nvPr/>
+        </p:nvSpPr>
+        <p:spPr>
+          <a:xfrm>
+            <a:off x="406301" y="1967805"/>
+            <a:ext cx="8498026" cy="213271"/>
+          </a:xfrm>
+          <a:prstGeom prst="rect">
+            <a:avLst/>
+          </a:prstGeom>
+          <a:noFill/>
+          <a:ln/>
+        </p:spPr>
+        <p:txBody>
+          <a:bodyPr wrap="square" lIns="0" tIns="0" rIns="0" bIns="0" rtlCol="0" anchor="t"/>
+          <a:lstStyle/>
+          <a:p>
             <a:pPr algn="l" indent="0" marL="0">
               <a:lnSpc>
                 <a:spcPts val="1680"/>
@@ -5804,191 +7799,7 @@
                 <a:ea typeface="Arial" pitchFamily="34" charset="-122"/>
                 <a:cs typeface="Arial" pitchFamily="34" charset="-120"/>
               </a:rPr>
-              <a:t>– Each student writes: 1. </a:t>
-            </a:r>
-            <a:pPr algn="l" indent="0" marL="0">
-              <a:lnSpc>
-                <a:spcPts val="1680"/>
-              </a:lnSpc>
-              <a:spcBef>
-                <a:spcPts val="300"/>
-              </a:spcBef>
-              <a:spcAft>
-                <a:spcPts val="300"/>
-              </a:spcAft>
-              <a:buNone/>
-            </a:pPr>
-            <a:r>
-              <a:rPr lang="en-US" sz="1200" b="1" dirty="0">
-                <a:solidFill>
-                  <a:srgbClr val="1C2833"/>
-                </a:solidFill>
-                <a:latin typeface="Arial" pitchFamily="34" charset="0"/>
-                <a:ea typeface="Arial" pitchFamily="34" charset="-122"/>
-                <a:cs typeface="Arial" pitchFamily="34" charset="-120"/>
-              </a:rPr>
-              <a:t>Name</a:t>
-            </a:r>
-            <a:pPr algn="l" indent="0" marL="0">
-              <a:lnSpc>
-                <a:spcPts val="1680"/>
-              </a:lnSpc>
-              <a:spcBef>
-                <a:spcPts val="300"/>
-              </a:spcBef>
-              <a:spcAft>
-                <a:spcPts val="300"/>
-              </a:spcAft>
-              <a:buNone/>
-            </a:pPr>
-            <a:r>
-              <a:rPr lang="en-US" sz="1200" dirty="0">
-                <a:solidFill>
-                  <a:srgbClr val="1C2833"/>
-                </a:solidFill>
-                <a:latin typeface="Arial" pitchFamily="34" charset="0"/>
-                <a:ea typeface="Arial" pitchFamily="34" charset="-122"/>
-                <a:cs typeface="Arial" pitchFamily="34" charset="-120"/>
-              </a:rPr>
-              <a:t> of the nearest river / lake / large drain to your home. 2. </a:t>
-            </a:r>
-            <a:pPr algn="l" indent="0" marL="0">
-              <a:lnSpc>
-                <a:spcPts val="1680"/>
-              </a:lnSpc>
-              <a:spcBef>
-                <a:spcPts val="300"/>
-              </a:spcBef>
-              <a:spcAft>
-                <a:spcPts val="300"/>
-              </a:spcAft>
-              <a:buNone/>
-            </a:pPr>
-            <a:r>
-              <a:rPr lang="en-US" sz="1200" b="1" dirty="0">
-                <a:solidFill>
-                  <a:srgbClr val="1C2833"/>
-                </a:solidFill>
-                <a:latin typeface="Arial" pitchFamily="34" charset="0"/>
-                <a:ea typeface="Arial" pitchFamily="34" charset="-122"/>
-                <a:cs typeface="Arial" pitchFamily="34" charset="-120"/>
-              </a:rPr>
-              <a:t>One observation</a:t>
-            </a:r>
-            <a:pPr algn="l" indent="0" marL="0">
-              <a:lnSpc>
-                <a:spcPts val="1680"/>
-              </a:lnSpc>
-              <a:spcBef>
-                <a:spcPts val="300"/>
-              </a:spcBef>
-              <a:spcAft>
-                <a:spcPts val="300"/>
-              </a:spcAft>
-              <a:buNone/>
-            </a:pPr>
-            <a:r>
-              <a:rPr lang="en-US" sz="1200" dirty="0">
-                <a:solidFill>
-                  <a:srgbClr val="1C2833"/>
-                </a:solidFill>
-                <a:latin typeface="Arial" pitchFamily="34" charset="0"/>
-                <a:ea typeface="Arial" pitchFamily="34" charset="-122"/>
-                <a:cs typeface="Arial" pitchFamily="34" charset="-120"/>
-              </a:rPr>
-              <a:t> of its current state (clean? polluted? trickle? full?). 3. </a:t>
-            </a:r>
-            <a:pPr algn="l" indent="0" marL="0">
-              <a:lnSpc>
-                <a:spcPts val="1680"/>
-              </a:lnSpc>
-              <a:spcBef>
-                <a:spcPts val="300"/>
-              </a:spcBef>
-              <a:spcAft>
-                <a:spcPts val="300"/>
-              </a:spcAft>
-              <a:buNone/>
-            </a:pPr>
-            <a:r>
-              <a:rPr lang="en-US" sz="1200" b="1" dirty="0">
-                <a:solidFill>
-                  <a:srgbClr val="1C2833"/>
-                </a:solidFill>
-                <a:latin typeface="Arial" pitchFamily="34" charset="0"/>
-                <a:ea typeface="Arial" pitchFamily="34" charset="-122"/>
-                <a:cs typeface="Arial" pitchFamily="34" charset="-120"/>
-              </a:rPr>
-              <a:t>One specific source of pollution</a:t>
-            </a:r>
-            <a:pPr algn="l" indent="0" marL="0">
-              <a:lnSpc>
-                <a:spcPts val="1680"/>
-              </a:lnSpc>
-              <a:spcBef>
-                <a:spcPts val="300"/>
-              </a:spcBef>
-              <a:spcAft>
-                <a:spcPts val="300"/>
-              </a:spcAft>
-              <a:buNone/>
-            </a:pPr>
-            <a:r>
-              <a:rPr lang="en-US" sz="1200" dirty="0">
-                <a:solidFill>
-                  <a:srgbClr val="1C2833"/>
-                </a:solidFill>
-                <a:latin typeface="Arial" pitchFamily="34" charset="0"/>
-                <a:ea typeface="Arial" pitchFamily="34" charset="-122"/>
-                <a:cs typeface="Arial" pitchFamily="34" charset="-120"/>
-              </a:rPr>
-              <a:t> if you have noticed any (a particular drain, a particular factory, a particular dump). 4. </a:t>
-            </a:r>
-            <a:pPr algn="l" indent="0" marL="0">
-              <a:lnSpc>
-                <a:spcPts val="1680"/>
-              </a:lnSpc>
-              <a:spcBef>
-                <a:spcPts val="300"/>
-              </a:spcBef>
-              <a:spcAft>
-                <a:spcPts val="300"/>
-              </a:spcAft>
-              <a:buNone/>
-            </a:pPr>
-            <a:r>
-              <a:rPr lang="en-US" sz="1200" b="1" dirty="0">
-                <a:solidFill>
-                  <a:srgbClr val="1C2833"/>
-                </a:solidFill>
-                <a:latin typeface="Arial" pitchFamily="34" charset="0"/>
-                <a:ea typeface="Arial" pitchFamily="34" charset="-122"/>
-                <a:cs typeface="Arial" pitchFamily="34" charset="-120"/>
-              </a:rPr>
-              <a:t>Is it considered sacred locally?</a:t>
-            </a:r>
-            <a:pPr algn="l" indent="0" marL="0">
-              <a:lnSpc>
-                <a:spcPts val="1680"/>
-              </a:lnSpc>
-              <a:spcBef>
-                <a:spcPts val="300"/>
-              </a:spcBef>
-              <a:spcAft>
-                <a:spcPts val="300"/>
-              </a:spcAft>
-              <a:buNone/>
-            </a:pPr>
-            <a:r>
-              <a:rPr lang="en-US" sz="1200" dirty="0">
-                <a:solidFill>
-                  <a:srgbClr val="1C2833"/>
-                </a:solidFill>
-                <a:latin typeface="Arial" pitchFamily="34" charset="0"/>
-                <a:ea typeface="Arial" pitchFamily="34" charset="-122"/>
-                <a:cs typeface="Arial" pitchFamily="34" charset="-120"/>
-              </a:rPr>
-              <a:t> (Yes / no / don't know.) – Pairs share. Two pairs are picked to share with the class. – The teacher catalogues the rivers / lakes that come up; this list is used on Day 9 for the walk planning.</a:t>
+              <a:t>The traditional invocation (read, don't memorise):</a:t>
             </a:r>
             <a:endParaRPr lang="en-US" sz="1200" dirty="0"/>
           </a:p>
@@ -5996,7 +7807,7 @@
       </p:sp>
       <p:sp>
         <p:nvSpPr>
-          <p:cNvPr id="5" name="Text 3"/>
+          <p:cNvPr id="9" name="Text 7"/>
           <p:cNvSpPr/>
           <p:nvPr/>
         </p:nvSpPr>
@@ -6146,7 +7957,7 @@
                 <a:ea typeface="Georgia" pitchFamily="34" charset="-122"/>
                 <a:cs typeface="Georgia" pitchFamily="34" charset="-120"/>
               </a:rPr>
-              <a:t>Wrap-up (5 min)</a:t>
+              <a:t>Core (20 min) (cont.)</a:t>
             </a:r>
             <a:endParaRPr lang="en-US" sz="1800" dirty="0"/>
           </a:p>
@@ -6160,8 +7971,61 @@
         </p:nvSpPr>
         <p:spPr>
           <a:xfrm>
-            <a:off x="634901" y="883593"/>
-            <a:ext cx="8102798" cy="300930"/>
+            <a:off x="406301" y="883593"/>
+            <a:ext cx="8331398" cy="881063"/>
+          </a:xfrm>
+          <a:prstGeom prst="rect">
+            <a:avLst/>
+          </a:prstGeom>
+          <a:solidFill>
+            <a:srgbClr val="F4F8F9"/>
+          </a:solidFill>
+          <a:ln/>
+        </p:spPr>
+        <p:txBody>
+          <a:bodyPr wrap="square" rtlCol="0" anchor="ctr"/>
+          <a:lstStyle/>
+          <a:p>
+            <a:pPr indent="0" marL="0">
+              <a:buNone/>
+            </a:pPr>
+            <a:endParaRPr lang="en-US" dirty="0"/>
+          </a:p>
+        </p:txBody>
+      </p:sp>
+      <p:sp>
+        <p:nvSpPr>
+          <p:cNvPr id="5" name="Shape 3"/>
+          <p:cNvSpPr/>
+          <p:nvPr/>
+        </p:nvSpPr>
+        <p:spPr>
+          <a:xfrm>
+            <a:off x="434876" y="883593"/>
+            <a:ext cx="0" cy="881062"/>
+          </a:xfrm>
+          <a:prstGeom prst="line">
+            <a:avLst/>
+          </a:prstGeom>
+          <a:noFill/>
+          <a:ln w="57150">
+            <a:solidFill>
+              <a:srgbClr val="FE4447"/>
+            </a:solidFill>
+            <a:prstDash val="solid"/>
+          </a:ln>
+        </p:spPr>
+      </p:sp>
+      <p:sp>
+        <p:nvSpPr>
+          <p:cNvPr id="6" name="Text 4"/>
+          <p:cNvSpPr/>
+          <p:nvPr/>
+        </p:nvSpPr>
+        <p:spPr>
+          <a:xfrm>
+            <a:off x="692051" y="1074093"/>
+            <a:ext cx="7973389" cy="230981"/>
           </a:xfrm>
           <a:prstGeom prst="rect">
             <a:avLst/>
@@ -6173,101 +8037,89 @@
           <a:bodyPr wrap="square" lIns="0" tIns="0" rIns="0" bIns="0" rtlCol="0" anchor="t"/>
           <a:lstStyle/>
           <a:p>
-            <a:pPr algn="l" marL="342900" indent="-342900">
-              <a:lnSpc>
-                <a:spcPts val="1620"/>
-              </a:lnSpc>
-              <a:spcAft>
-                <a:spcPts val="300"/>
-              </a:spcAft>
-              <a:buSzPct val="100000"/>
-              <a:buChar char="•"/>
-            </a:pPr>
-            <a:r>
-              <a:rPr lang="en-US" sz="1200" b="1" dirty="0">
-                <a:solidFill>
-                  <a:srgbClr val="1C2833"/>
-                </a:solidFill>
-                <a:latin typeface="Arial" pitchFamily="34" charset="0"/>
-                <a:ea typeface="Arial" pitchFamily="34" charset="-122"/>
-                <a:cs typeface="Arial" pitchFamily="34" charset="-120"/>
-              </a:rPr>
-              <a:t>Formative quiz on a slip of paper (5 questions, 3 min)</a:t>
-            </a:r>
-            <a:pPr algn="l" indent="0" marL="0">
-              <a:lnSpc>
-                <a:spcPts val="1620"/>
-              </a:lnSpc>
-              <a:spcAft>
-                <a:spcPts val="300"/>
-              </a:spcAft>
-              <a:buNone/>
-            </a:pPr>
-            <a:r>
-              <a:rPr lang="en-US" sz="1200" dirty="0">
-                <a:solidFill>
-                  <a:srgbClr val="1C2833"/>
-                </a:solidFill>
-                <a:latin typeface="Arial" pitchFamily="34" charset="0"/>
-                <a:ea typeface="Arial" pitchFamily="34" charset="-122"/>
-                <a:cs typeface="Arial" pitchFamily="34" charset="-120"/>
-              </a:rPr>
-              <a:t> — see </a:t>
-            </a:r>
-            <a:pPr algn="l" indent="0" marL="0">
-              <a:lnSpc>
-                <a:spcPts val="1620"/>
-              </a:lnSpc>
-              <a:spcAft>
-                <a:spcPts val="300"/>
-              </a:spcAft>
-              <a:buNone/>
-            </a:pPr>
-            <a:r>
-              <a:rPr lang="en-US" sz="1200" dirty="0">
-                <a:solidFill>
-                  <a:srgbClr val="1C2833"/>
-                </a:solidFill>
-                <a:latin typeface="Arial" pitchFamily="34" charset="0"/>
-                <a:ea typeface="Arial" pitchFamily="34" charset="-122"/>
-                <a:cs typeface="Arial" pitchFamily="34" charset="-120"/>
-              </a:rPr>
-              <a:t>quizzes/formative.md</a:t>
-            </a:r>
-            <a:pPr algn="l" indent="0" marL="0">
-              <a:lnSpc>
-                <a:spcPts val="1620"/>
-              </a:lnSpc>
-              <a:spcAft>
-                <a:spcPts val="300"/>
-              </a:spcAft>
-              <a:buNone/>
-            </a:pPr>
-            <a:r>
-              <a:rPr lang="en-US" sz="1200" dirty="0">
-                <a:solidFill>
-                  <a:srgbClr val="1C2833"/>
-                </a:solidFill>
-                <a:latin typeface="Arial" pitchFamily="34" charset="0"/>
-                <a:ea typeface="Arial" pitchFamily="34" charset="-122"/>
-                <a:cs typeface="Arial" pitchFamily="34" charset="-120"/>
-              </a:rPr>
-              <a:t> Part A.</a:t>
-            </a:r>
-            <a:endParaRPr lang="en-US" sz="1200" dirty="0"/>
-          </a:p>
-        </p:txBody>
-      </p:sp>
-      <p:sp>
-        <p:nvSpPr>
-          <p:cNvPr id="5" name="Text 3"/>
-          <p:cNvSpPr/>
-          <p:nvPr/>
-        </p:nvSpPr>
-        <p:spPr>
-          <a:xfrm>
-            <a:off x="406301" y="1273373"/>
-            <a:ext cx="8498026" cy="213271"/>
+            <a:pPr algn="l" indent="0" marL="0">
+              <a:lnSpc>
+                <a:spcPts val="1820"/>
+              </a:lnSpc>
+              <a:spcBef>
+                <a:spcPts val="300"/>
+              </a:spcBef>
+              <a:spcAft>
+                <a:spcPts val="300"/>
+              </a:spcAft>
+              <a:buNone/>
+            </a:pPr>
+            <a:r>
+              <a:rPr lang="en-US" sz="1300" dirty="0">
+                <a:solidFill>
+                  <a:srgbClr val="1C2833"/>
+                </a:solidFill>
+                <a:latin typeface="Georgia" pitchFamily="34" charset="0"/>
+                <a:ea typeface="Georgia" pitchFamily="34" charset="-122"/>
+                <a:cs typeface="Georgia" pitchFamily="34" charset="-120"/>
+              </a:rPr>
+              <a:t>"</a:t>
+            </a:r>
+            <a:pPr algn="l" indent="0" marL="0">
+              <a:lnSpc>
+                <a:spcPts val="1820"/>
+              </a:lnSpc>
+              <a:spcBef>
+                <a:spcPts val="300"/>
+              </a:spcBef>
+              <a:spcAft>
+                <a:spcPts val="300"/>
+              </a:spcAft>
+              <a:buNone/>
+            </a:pPr>
+            <a:r>
+              <a:rPr lang="en-US" sz="1300" i="1" dirty="0">
+                <a:solidFill>
+                  <a:srgbClr val="1C2833"/>
+                </a:solidFill>
+                <a:latin typeface="Georgia" pitchFamily="34" charset="0"/>
+                <a:ea typeface="Georgia" pitchFamily="34" charset="-122"/>
+                <a:cs typeface="Georgia" pitchFamily="34" charset="-120"/>
+              </a:rPr>
+              <a:t>gaṅge ca yamune caiva godāvari sarasvati / narmade sindho kāveri jale 'smin sannidhiṁ kuru //</a:t>
+            </a:r>
+            <a:pPr algn="l" indent="0" marL="0">
+              <a:lnSpc>
+                <a:spcPts val="1820"/>
+              </a:lnSpc>
+              <a:spcBef>
+                <a:spcPts val="300"/>
+              </a:spcBef>
+              <a:spcAft>
+                <a:spcPts val="300"/>
+              </a:spcAft>
+              <a:buNone/>
+            </a:pPr>
+            <a:r>
+              <a:rPr lang="en-US" sz="1300" dirty="0">
+                <a:solidFill>
+                  <a:srgbClr val="1C2833"/>
+                </a:solidFill>
+                <a:latin typeface="Georgia" pitchFamily="34" charset="0"/>
+                <a:ea typeface="Georgia" pitchFamily="34" charset="-122"/>
+                <a:cs typeface="Georgia" pitchFamily="34" charset="-120"/>
+              </a:rPr>
+              <a:t>"</a:t>
+            </a:r>
+            <a:endParaRPr lang="en-US" sz="1300" dirty="0"/>
+          </a:p>
+        </p:txBody>
+      </p:sp>
+      <p:sp>
+        <p:nvSpPr>
+          <p:cNvPr id="7" name="Text 5"/>
+          <p:cNvSpPr/>
+          <p:nvPr/>
+        </p:nvSpPr>
+        <p:spPr>
+          <a:xfrm>
+            <a:off x="692051" y="1343174"/>
+            <a:ext cx="7973389" cy="230981"/>
           </a:xfrm>
           <a:prstGeom prst="rect">
             <a:avLst/>
@@ -6281,6 +8133,54 @@
           <a:p>
             <a:pPr algn="l" indent="0" marL="0">
               <a:lnSpc>
+                <a:spcPts val="1820"/>
+              </a:lnSpc>
+              <a:spcBef>
+                <a:spcPts val="300"/>
+              </a:spcBef>
+              <a:spcAft>
+                <a:spcPts val="300"/>
+              </a:spcAft>
+              <a:buNone/>
+            </a:pPr>
+            <a:r>
+              <a:rPr lang="en-US" sz="1300" i="1" dirty="0">
+                <a:solidFill>
+                  <a:srgbClr val="1C2833"/>
+                </a:solidFill>
+                <a:latin typeface="Georgia" pitchFamily="34" charset="0"/>
+                <a:ea typeface="Georgia" pitchFamily="34" charset="-122"/>
+                <a:cs typeface="Georgia" pitchFamily="34" charset="-120"/>
+              </a:rPr>
+              <a:t>"O Gaṅgā, Yamunā, Godāvarī, Sarasvatī, Narmadā, Sindhu, Kāverī — be present in this water."</a:t>
+            </a:r>
+            <a:endParaRPr lang="en-US" sz="1300" dirty="0"/>
+          </a:p>
+        </p:txBody>
+      </p:sp>
+      <p:sp>
+        <p:nvSpPr>
+          <p:cNvPr id="8" name="Text 6"/>
+          <p:cNvSpPr/>
+          <p:nvPr/>
+        </p:nvSpPr>
+        <p:spPr>
+          <a:xfrm>
+            <a:off x="406301" y="1853505"/>
+            <a:ext cx="8498026" cy="426541"/>
+          </a:xfrm>
+          <a:prstGeom prst="rect">
+            <a:avLst/>
+          </a:prstGeom>
+          <a:noFill/>
+          <a:ln/>
+        </p:spPr>
+        <p:txBody>
+          <a:bodyPr wrap="square" lIns="0" tIns="0" rIns="0" bIns="0" rtlCol="0" anchor="t"/>
+          <a:lstStyle/>
+          <a:p>
+            <a:pPr algn="l" indent="0" marL="0">
+              <a:lnSpc>
                 <a:spcPts val="1680"/>
               </a:lnSpc>
               <a:spcBef>
@@ -6300,7 +8200,7 @@
                 <a:ea typeface="Arial" pitchFamily="34" charset="-122"/>
                 <a:cs typeface="Arial" pitchFamily="34" charset="-120"/>
               </a:rPr>
-              <a:t>– Collect for grading.</a:t>
+              <a:t>The verse is chanted while pouring even a glass of water before drinking, in many households. The idea: every drop of water carries the dignity of every great river.</a:t>
             </a:r>
             <a:endParaRPr lang="en-US" sz="1200" dirty="0"/>
           </a:p>
@@ -6308,7 +8208,7 @@
       </p:sp>
       <p:sp>
         <p:nvSpPr>
-          <p:cNvPr id="6" name="Text 4"/>
+          <p:cNvPr id="9" name="Text 7"/>
           <p:cNvSpPr/>
           <p:nvPr/>
         </p:nvSpPr>
@@ -6458,7 +8358,7 @@
                 <a:ea typeface="Georgia" pitchFamily="34" charset="-122"/>
                 <a:cs typeface="Georgia" pitchFamily="34" charset="-120"/>
               </a:rPr>
-              <a:t>Student-facing content</a:t>
+              <a:t>Core (20 min) (cont.)</a:t>
             </a:r>
             <a:endParaRPr lang="en-US" sz="1800" dirty="0"/>
           </a:p>
@@ -6472,61 +8372,8 @@
         </p:nvSpPr>
         <p:spPr>
           <a:xfrm>
-            <a:off x="406301" y="883593"/>
-            <a:ext cx="8331398" cy="2381250"/>
-          </a:xfrm>
-          <a:prstGeom prst="rect">
-            <a:avLst/>
-          </a:prstGeom>
-          <a:solidFill>
-            <a:srgbClr val="F4F8F9"/>
-          </a:solidFill>
-          <a:ln/>
-        </p:spPr>
-        <p:txBody>
-          <a:bodyPr wrap="square" rtlCol="0" anchor="ctr"/>
-          <a:lstStyle/>
-          <a:p>
-            <a:pPr indent="0" marL="0">
-              <a:buNone/>
-            </a:pPr>
-            <a:endParaRPr lang="en-US" dirty="0"/>
-          </a:p>
-        </p:txBody>
-      </p:sp>
-      <p:sp>
-        <p:nvSpPr>
-          <p:cNvPr id="5" name="Shape 3"/>
-          <p:cNvSpPr/>
-          <p:nvPr/>
-        </p:nvSpPr>
-        <p:spPr>
-          <a:xfrm>
-            <a:off x="434876" y="883593"/>
-            <a:ext cx="0" cy="2381250"/>
-          </a:xfrm>
-          <a:prstGeom prst="line">
-            <a:avLst/>
-          </a:prstGeom>
-          <a:noFill/>
-          <a:ln w="57150">
-            <a:solidFill>
-              <a:srgbClr val="FE4447"/>
-            </a:solidFill>
-            <a:prstDash val="solid"/>
-          </a:ln>
-        </p:spPr>
-      </p:sp>
-      <p:sp>
-        <p:nvSpPr>
-          <p:cNvPr id="6" name="Text 4"/>
-          <p:cNvSpPr/>
-          <p:nvPr/>
-        </p:nvSpPr>
-        <p:spPr>
-          <a:xfrm>
-            <a:off x="692051" y="1074093"/>
-            <a:ext cx="7973389" cy="230981"/>
+            <a:off x="634901" y="883593"/>
+            <a:ext cx="8102798" cy="281880"/>
           </a:xfrm>
           <a:prstGeom prst="rect">
             <a:avLst/>
@@ -6538,112 +8385,61 @@
           <a:bodyPr wrap="square" lIns="0" tIns="0" rIns="0" bIns="0" rtlCol="0" anchor="t"/>
           <a:lstStyle/>
           <a:p>
-            <a:pPr algn="l" indent="0" marL="0">
-              <a:lnSpc>
-                <a:spcPts val="1820"/>
-              </a:lnSpc>
-              <a:spcBef>
-                <a:spcPts val="300"/>
-              </a:spcBef>
-              <a:spcAft>
-                <a:spcPts val="300"/>
-              </a:spcAft>
-              <a:buNone/>
-            </a:pPr>
-            <a:r>
-              <a:rPr lang="en-US" sz="1300" b="1" i="1" dirty="0">
-                <a:solidFill>
-                  <a:srgbClr val="1C2833"/>
-                </a:solidFill>
-                <a:latin typeface="Georgia" pitchFamily="34" charset="0"/>
-                <a:ea typeface="Georgia" pitchFamily="34" charset="-122"/>
-                <a:cs typeface="Georgia" pitchFamily="34" charset="-120"/>
-              </a:rPr>
-              <a:t>The seven sacred rivers</a:t>
-            </a:r>
-            <a:pPr algn="l" indent="0" marL="0">
-              <a:lnSpc>
-                <a:spcPts val="1820"/>
-              </a:lnSpc>
-              <a:spcBef>
-                <a:spcPts val="300"/>
-              </a:spcBef>
-              <a:spcAft>
-                <a:spcPts val="300"/>
-              </a:spcAft>
-              <a:buNone/>
-            </a:pPr>
-            <a:r>
-              <a:rPr lang="en-US" sz="1300" dirty="0">
-                <a:solidFill>
-                  <a:srgbClr val="1C2833"/>
-                </a:solidFill>
-                <a:latin typeface="Georgia" pitchFamily="34" charset="0"/>
-                <a:ea typeface="Georgia" pitchFamily="34" charset="-122"/>
-                <a:cs typeface="Georgia" pitchFamily="34" charset="-120"/>
-              </a:rPr>
-              <a:t> — </a:t>
-            </a:r>
-            <a:pPr algn="l" indent="0" marL="0">
-              <a:lnSpc>
-                <a:spcPts val="1820"/>
-              </a:lnSpc>
-              <a:spcBef>
-                <a:spcPts val="300"/>
-              </a:spcBef>
-              <a:spcAft>
-                <a:spcPts val="300"/>
-              </a:spcAft>
-              <a:buNone/>
-            </a:pPr>
-            <a:r>
-              <a:rPr lang="en-US" sz="1300" i="1" dirty="0">
-                <a:solidFill>
-                  <a:srgbClr val="1C2833"/>
-                </a:solidFill>
-                <a:latin typeface="Georgia" pitchFamily="34" charset="0"/>
-                <a:ea typeface="Georgia" pitchFamily="34" charset="-122"/>
-                <a:cs typeface="Georgia" pitchFamily="34" charset="-120"/>
-              </a:rPr>
-              <a:t>Gaṅgā, Yamunā, Sarasvatī, Sindhu, Godāvarī, Narmadā, Kāverī</a:t>
-            </a:r>
-            <a:pPr algn="l" indent="0" marL="0">
-              <a:lnSpc>
-                <a:spcPts val="1820"/>
-              </a:lnSpc>
-              <a:spcBef>
-                <a:spcPts val="300"/>
-              </a:spcBef>
-              <a:spcAft>
-                <a:spcPts val="300"/>
-              </a:spcAft>
-              <a:buNone/>
-            </a:pPr>
-            <a:r>
-              <a:rPr lang="en-US" sz="1300" dirty="0">
-                <a:solidFill>
-                  <a:srgbClr val="1C2833"/>
-                </a:solidFill>
-                <a:latin typeface="Georgia" pitchFamily="34" charset="0"/>
-                <a:ea typeface="Georgia" pitchFamily="34" charset="-122"/>
-                <a:cs typeface="Georgia" pitchFamily="34" charset="-120"/>
-              </a:rPr>
-              <a:t>.</a:t>
-            </a:r>
-            <a:endParaRPr lang="en-US" sz="1300" dirty="0"/>
-          </a:p>
-        </p:txBody>
-      </p:sp>
-      <p:sp>
-        <p:nvSpPr>
-          <p:cNvPr id="7" name="Text 5"/>
-          <p:cNvSpPr/>
-          <p:nvPr/>
-        </p:nvSpPr>
-        <p:spPr>
-          <a:xfrm>
-            <a:off x="692051" y="1343174"/>
-            <a:ext cx="7973389" cy="230981"/>
+            <a:pPr algn="l" marL="342900" indent="-342900">
+              <a:lnSpc>
+                <a:spcPts val="1620"/>
+              </a:lnSpc>
+              <a:spcAft>
+                <a:spcPts val="300"/>
+              </a:spcAft>
+              <a:buSzPct val="100000"/>
+              <a:buChar char="•"/>
+            </a:pPr>
+            <a:r>
+              <a:rPr lang="en-US" sz="1200" b="1" dirty="0">
+                <a:solidFill>
+                  <a:srgbClr val="1C2833"/>
+                </a:solidFill>
+                <a:latin typeface="Arial" pitchFamily="34" charset="0"/>
+                <a:ea typeface="Arial" pitchFamily="34" charset="-122"/>
+                <a:cs typeface="Arial" pitchFamily="34" charset="-120"/>
+              </a:rPr>
+              <a:t>What "sacred" did in practice.</a:t>
+            </a:r>
+            <a:pPr algn="l" indent="0" marL="0">
+              <a:lnSpc>
+                <a:spcPts val="1620"/>
+              </a:lnSpc>
+              <a:spcAft>
+                <a:spcPts val="300"/>
+              </a:spcAft>
+              <a:buNone/>
+            </a:pPr>
+            <a:r>
+              <a:rPr lang="en-US" sz="1200" dirty="0">
+                <a:solidFill>
+                  <a:srgbClr val="1C2833"/>
+                </a:solidFill>
+                <a:latin typeface="Arial" pitchFamily="34" charset="0"/>
+                <a:ea typeface="Arial" pitchFamily="34" charset="-122"/>
+                <a:cs typeface="Arial" pitchFamily="34" charset="-120"/>
+              </a:rPr>
+              <a:t> When a river is sacred:</a:t>
+            </a:r>
+            <a:endParaRPr lang="en-US" sz="1200" dirty="0"/>
+          </a:p>
+        </p:txBody>
+      </p:sp>
+      <p:sp>
+        <p:nvSpPr>
+          <p:cNvPr id="5" name="Text 3"/>
+          <p:cNvSpPr/>
+          <p:nvPr/>
+        </p:nvSpPr>
+        <p:spPr>
+          <a:xfrm>
+            <a:off x="634901" y="1266974"/>
+            <a:ext cx="8102798" cy="1013222"/>
           </a:xfrm>
           <a:prstGeom prst="rect">
             <a:avLst/>
@@ -6655,43 +8451,153 @@
           <a:bodyPr wrap="square" lIns="0" tIns="0" rIns="0" bIns="0" rtlCol="0" anchor="t"/>
           <a:lstStyle/>
           <a:p>
-            <a:pPr algn="l" indent="0" marL="0">
-              <a:lnSpc>
-                <a:spcPts val="1820"/>
-              </a:lnSpc>
-              <a:spcBef>
-                <a:spcPts val="300"/>
-              </a:spcBef>
-              <a:spcAft>
-                <a:spcPts val="300"/>
-              </a:spcAft>
-              <a:buNone/>
-            </a:pPr>
-            <a:r>
-              <a:rPr lang="en-US" sz="1300" i="1" dirty="0">
-                <a:solidFill>
-                  <a:srgbClr val="1C2833"/>
-                </a:solidFill>
-                <a:latin typeface="Georgia" pitchFamily="34" charset="0"/>
-                <a:ea typeface="Georgia" pitchFamily="34" charset="-122"/>
-                <a:cs typeface="Georgia" pitchFamily="34" charset="-120"/>
-              </a:rPr>
-              <a:t>The invocation chanted before bathing or pouring water:</a:t>
-            </a:r>
-            <a:endParaRPr lang="en-US" sz="1300" dirty="0"/>
-          </a:p>
-        </p:txBody>
-      </p:sp>
-      <p:sp>
-        <p:nvSpPr>
-          <p:cNvPr id="8" name="Text 6"/>
-          <p:cNvSpPr/>
-          <p:nvPr/>
-        </p:nvSpPr>
-        <p:spPr>
-          <a:xfrm>
-            <a:off x="692051" y="1612255"/>
-            <a:ext cx="7973389" cy="230981"/>
+            <a:pPr algn="l" marL="342900" indent="-342900">
+              <a:lnSpc>
+                <a:spcPts val="1620"/>
+              </a:lnSpc>
+              <a:spcAft>
+                <a:spcPts val="300"/>
+              </a:spcAft>
+              <a:buSzPct val="100000"/>
+              <a:buChar char="•"/>
+            </a:pPr>
+            <a:r>
+              <a:rPr lang="en-US" sz="1200" dirty="0">
+                <a:solidFill>
+                  <a:srgbClr val="1C2833"/>
+                </a:solidFill>
+                <a:latin typeface="Arial" pitchFamily="34" charset="0"/>
+                <a:ea typeface="Arial" pitchFamily="34" charset="-122"/>
+                <a:cs typeface="Arial" pitchFamily="34" charset="-120"/>
+              </a:rPr>
+              <a:t>You don't urinate or defecate in it (taboo).</a:t>
+            </a:r>
+            <a:endParaRPr lang="en-US" sz="1200" dirty="0"/>
+          </a:p>
+          <a:p>
+            <a:pPr algn="l" marL="342900" indent="-342900">
+              <a:lnSpc>
+                <a:spcPts val="1620"/>
+              </a:lnSpc>
+              <a:spcAft>
+                <a:spcPts val="300"/>
+              </a:spcAft>
+              <a:buSzPct val="100000"/>
+              <a:buChar char="•"/>
+            </a:pPr>
+            <a:r>
+              <a:rPr lang="en-US" sz="1200" dirty="0">
+                <a:solidFill>
+                  <a:srgbClr val="1C2833"/>
+                </a:solidFill>
+                <a:latin typeface="Arial" pitchFamily="34" charset="0"/>
+                <a:ea typeface="Arial" pitchFamily="34" charset="-122"/>
+                <a:cs typeface="Arial" pitchFamily="34" charset="-120"/>
+              </a:rPr>
+              <a:t>You don't dump bodies (well — you cremate, then immerse ash, with rules).</a:t>
+            </a:r>
+            <a:endParaRPr lang="en-US" sz="1200" dirty="0"/>
+          </a:p>
+          <a:p>
+            <a:pPr algn="l" marL="342900" indent="-342900">
+              <a:lnSpc>
+                <a:spcPts val="1620"/>
+              </a:lnSpc>
+              <a:spcAft>
+                <a:spcPts val="300"/>
+              </a:spcAft>
+              <a:buSzPct val="100000"/>
+              <a:buChar char="•"/>
+            </a:pPr>
+            <a:r>
+              <a:rPr lang="en-US" sz="1200" dirty="0">
+                <a:solidFill>
+                  <a:srgbClr val="1C2833"/>
+                </a:solidFill>
+                <a:latin typeface="Arial" pitchFamily="34" charset="0"/>
+                <a:ea typeface="Arial" pitchFamily="34" charset="-122"/>
+                <a:cs typeface="Arial" pitchFamily="34" charset="-120"/>
+              </a:rPr>
+              <a:t>You don't drain it for one farmer's field at the cost of the village.</a:t>
+            </a:r>
+            <a:endParaRPr lang="en-US" sz="1200" dirty="0"/>
+          </a:p>
+          <a:p>
+            <a:pPr algn="l" marL="342900" indent="-342900">
+              <a:lnSpc>
+                <a:spcPts val="1620"/>
+              </a:lnSpc>
+              <a:spcAft>
+                <a:spcPts val="300"/>
+              </a:spcAft>
+              <a:buSzPct val="100000"/>
+              <a:buChar char="•"/>
+            </a:pPr>
+            <a:r>
+              <a:rPr lang="en-US" sz="1200" dirty="0">
+                <a:solidFill>
+                  <a:srgbClr val="1C2833"/>
+                </a:solidFill>
+                <a:latin typeface="Arial" pitchFamily="34" charset="0"/>
+                <a:ea typeface="Arial" pitchFamily="34" charset="-122"/>
+                <a:cs typeface="Arial" pitchFamily="34" charset="-120"/>
+              </a:rPr>
+              <a:t>You build steps (</a:t>
+            </a:r>
+            <a:pPr algn="l" indent="0" marL="0">
+              <a:lnSpc>
+                <a:spcPts val="1620"/>
+              </a:lnSpc>
+              <a:spcAft>
+                <a:spcPts val="300"/>
+              </a:spcAft>
+              <a:buNone/>
+            </a:pPr>
+            <a:r>
+              <a:rPr lang="en-US" sz="1200" i="1" dirty="0">
+                <a:solidFill>
+                  <a:srgbClr val="1C2833"/>
+                </a:solidFill>
+                <a:latin typeface="Arial" pitchFamily="34" charset="0"/>
+                <a:ea typeface="Arial" pitchFamily="34" charset="-122"/>
+                <a:cs typeface="Arial" pitchFamily="34" charset="-120"/>
+              </a:rPr>
+              <a:t>ghāṭ</a:t>
+            </a:r>
+            <a:pPr algn="l" indent="0" marL="0">
+              <a:lnSpc>
+                <a:spcPts val="1620"/>
+              </a:lnSpc>
+              <a:spcAft>
+                <a:spcPts val="300"/>
+              </a:spcAft>
+              <a:buNone/>
+            </a:pPr>
+            <a:r>
+              <a:rPr lang="en-US" sz="1200" dirty="0">
+                <a:solidFill>
+                  <a:srgbClr val="1C2833"/>
+                </a:solidFill>
+                <a:latin typeface="Arial" pitchFamily="34" charset="0"/>
+                <a:ea typeface="Arial" pitchFamily="34" charset="-122"/>
+                <a:cs typeface="Arial" pitchFamily="34" charset="-120"/>
+              </a:rPr>
+              <a:t>) to it; you maintain those steps.</a:t>
+            </a:r>
+            <a:endParaRPr lang="en-US" sz="1200" dirty="0"/>
+          </a:p>
+        </p:txBody>
+      </p:sp>
+      <p:sp>
+        <p:nvSpPr>
+          <p:cNvPr id="6" name="Text 4"/>
+          <p:cNvSpPr/>
+          <p:nvPr/>
+        </p:nvSpPr>
+        <p:spPr>
+          <a:xfrm>
+            <a:off x="406301" y="2369046"/>
+            <a:ext cx="8498026" cy="426541"/>
           </a:xfrm>
           <a:prstGeom prst="rect">
             <a:avLst/>
@@ -6705,7 +8611,7 @@
           <a:p>
             <a:pPr algn="l" indent="0" marL="0">
               <a:lnSpc>
-                <a:spcPts val="1820"/>
+                <a:spcPts val="1680"/>
               </a:lnSpc>
               <a:spcBef>
                 <a:spcPts val="300"/>
@@ -6716,44 +8622,19 @@
               <a:buNone/>
             </a:pPr>
             <a:r>
-              <a:rPr lang="en-US" sz="1300" i="1" dirty="0">
-                <a:solidFill>
-                  <a:srgbClr val="1C2833"/>
-                </a:solidFill>
-                <a:latin typeface="Georgia" pitchFamily="34" charset="0"/>
-                <a:ea typeface="Georgia" pitchFamily="34" charset="-122"/>
-                <a:cs typeface="Georgia" pitchFamily="34" charset="-120"/>
-              </a:rPr>
-              <a:t>&gt; "O Gaṅgā, Yamunā, Godāvarī, Sarasvatī, Narmadā, Sindhu, Kāverī — be present in this water."</a:t>
-            </a:r>
-            <a:endParaRPr lang="en-US" sz="1300" dirty="0"/>
-          </a:p>
-        </p:txBody>
-      </p:sp>
-      <p:sp>
-        <p:nvSpPr>
-          <p:cNvPr id="9" name="Text 7"/>
-          <p:cNvSpPr/>
-          <p:nvPr/>
-        </p:nvSpPr>
-        <p:spPr>
-          <a:xfrm>
-            <a:off x="692051" y="1881336"/>
-            <a:ext cx="7973389" cy="461963"/>
-          </a:xfrm>
-          <a:prstGeom prst="rect">
-            <a:avLst/>
-          </a:prstGeom>
-          <a:noFill/>
-          <a:ln/>
-        </p:spPr>
-        <p:txBody>
-          <a:bodyPr wrap="square" lIns="0" tIns="0" rIns="0" bIns="0" rtlCol="0" anchor="t"/>
-          <a:lstStyle/>
-          <a:p>
-            <a:pPr algn="l" indent="0" marL="0">
-              <a:lnSpc>
-                <a:spcPts val="1820"/>
+              <a:rPr lang="en-US" sz="1200" dirty="0">
+                <a:solidFill>
+                  <a:srgbClr val="1C2833"/>
+                </a:solidFill>
+                <a:latin typeface="Arial" pitchFamily="34" charset="0"/>
+                <a:ea typeface="Arial" pitchFamily="34" charset="-122"/>
+                <a:cs typeface="Arial" pitchFamily="34" charset="-120"/>
+              </a:rPr>
+              <a:t>When a river is </a:t>
+            </a:r>
+            <a:pPr algn="l" indent="0" marL="0">
+              <a:lnSpc>
+                <a:spcPts val="1680"/>
               </a:lnSpc>
               <a:spcBef>
                 <a:spcPts val="300"/>
@@ -6764,44 +8645,19 @@
               <a:buNone/>
             </a:pPr>
             <a:r>
-              <a:rPr lang="en-US" sz="1300" i="1" dirty="0">
-                <a:solidFill>
-                  <a:srgbClr val="1C2833"/>
-                </a:solidFill>
-                <a:latin typeface="Georgia" pitchFamily="34" charset="0"/>
-                <a:ea typeface="Georgia" pitchFamily="34" charset="-122"/>
-                <a:cs typeface="Georgia" pitchFamily="34" charset="-120"/>
-              </a:rPr>
-              <a:t>In Indic thought, sacred = protected. When a river is sacred, you do not pollute it, drain it, or treat it as private property.</a:t>
-            </a:r>
-            <a:endParaRPr lang="en-US" sz="1300" dirty="0"/>
-          </a:p>
-        </p:txBody>
-      </p:sp>
-      <p:sp>
-        <p:nvSpPr>
-          <p:cNvPr id="10" name="Text 8"/>
-          <p:cNvSpPr/>
-          <p:nvPr/>
-        </p:nvSpPr>
-        <p:spPr>
-          <a:xfrm>
-            <a:off x="692051" y="2381399"/>
-            <a:ext cx="7973389" cy="692944"/>
-          </a:xfrm>
-          <a:prstGeom prst="rect">
-            <a:avLst/>
-          </a:prstGeom>
-          <a:noFill/>
-          <a:ln/>
-        </p:spPr>
-        <p:txBody>
-          <a:bodyPr wrap="square" lIns="0" tIns="0" rIns="0" bIns="0" rtlCol="0" anchor="t"/>
-          <a:lstStyle/>
-          <a:p>
-            <a:pPr algn="l" indent="0" marL="0">
-              <a:lnSpc>
-                <a:spcPts val="1820"/>
+              <a:rPr lang="en-US" sz="1200" i="1" dirty="0">
+                <a:solidFill>
+                  <a:srgbClr val="1C2833"/>
+                </a:solidFill>
+                <a:latin typeface="Arial" pitchFamily="34" charset="0"/>
+                <a:ea typeface="Arial" pitchFamily="34" charset="-122"/>
+                <a:cs typeface="Arial" pitchFamily="34" charset="-120"/>
+              </a:rPr>
+              <a:t>not</a:t>
+            </a:r>
+            <a:pPr algn="l" indent="0" marL="0">
+              <a:lnSpc>
+                <a:spcPts val="1680"/>
               </a:lnSpc>
               <a:spcBef>
                 <a:spcPts val="300"/>
@@ -6812,138 +8668,23 @@
               <a:buNone/>
             </a:pPr>
             <a:r>
-              <a:rPr lang="en-US" sz="1300" b="1" i="1" dirty="0">
-                <a:solidFill>
-                  <a:srgbClr val="1C2833"/>
-                </a:solidFill>
-                <a:latin typeface="Georgia" pitchFamily="34" charset="0"/>
-                <a:ea typeface="Georgia" pitchFamily="34" charset="-122"/>
-                <a:cs typeface="Georgia" pitchFamily="34" charset="-120"/>
-              </a:rPr>
-              <a:t>But</a:t>
-            </a:r>
-            <a:pPr algn="l" indent="0" marL="0">
-              <a:lnSpc>
-                <a:spcPts val="1820"/>
-              </a:lnSpc>
-              <a:spcBef>
-                <a:spcPts val="300"/>
-              </a:spcBef>
-              <a:spcAft>
-                <a:spcPts val="300"/>
-              </a:spcAft>
-              <a:buNone/>
-            </a:pPr>
-            <a:r>
-              <a:rPr lang="en-US" sz="1300" dirty="0">
-                <a:solidFill>
-                  <a:srgbClr val="1C2833"/>
-                </a:solidFill>
-                <a:latin typeface="Georgia" pitchFamily="34" charset="0"/>
-                <a:ea typeface="Georgia" pitchFamily="34" charset="-122"/>
-                <a:cs typeface="Georgia" pitchFamily="34" charset="-120"/>
-              </a:rPr>
-              <a:t> sacred-status alone has not stopped industrial pollution in the urban stretches. The tradition supplies the </a:t>
-            </a:r>
-            <a:pPr algn="l" indent="0" marL="0">
-              <a:lnSpc>
-                <a:spcPts val="1820"/>
-              </a:lnSpc>
-              <a:spcBef>
-                <a:spcPts val="300"/>
-              </a:spcBef>
-              <a:spcAft>
-                <a:spcPts val="300"/>
-              </a:spcAft>
-              <a:buNone/>
-            </a:pPr>
-            <a:r>
-              <a:rPr lang="en-US" sz="1300" i="1" dirty="0">
-                <a:solidFill>
-                  <a:srgbClr val="1C2833"/>
-                </a:solidFill>
-                <a:latin typeface="Georgia" pitchFamily="34" charset="0"/>
-                <a:ea typeface="Georgia" pitchFamily="34" charset="-122"/>
-                <a:cs typeface="Georgia" pitchFamily="34" charset="-120"/>
-              </a:rPr>
-              <a:t>attitude of care</a:t>
-            </a:r>
-            <a:pPr algn="l" indent="0" marL="0">
-              <a:lnSpc>
-                <a:spcPts val="1820"/>
-              </a:lnSpc>
-              <a:spcBef>
-                <a:spcPts val="300"/>
-              </a:spcBef>
-              <a:spcAft>
-                <a:spcPts val="300"/>
-              </a:spcAft>
-              <a:buNone/>
-            </a:pPr>
-            <a:r>
-              <a:rPr lang="en-US" sz="1300" dirty="0">
-                <a:solidFill>
-                  <a:srgbClr val="1C2833"/>
-                </a:solidFill>
-                <a:latin typeface="Georgia" pitchFamily="34" charset="0"/>
-                <a:ea typeface="Georgia" pitchFamily="34" charset="-122"/>
-                <a:cs typeface="Georgia" pitchFamily="34" charset="-120"/>
-              </a:rPr>
-              <a:t>; modern science and policy must supply the </a:t>
-            </a:r>
-            <a:pPr algn="l" indent="0" marL="0">
-              <a:lnSpc>
-                <a:spcPts val="1820"/>
-              </a:lnSpc>
-              <a:spcBef>
-                <a:spcPts val="300"/>
-              </a:spcBef>
-              <a:spcAft>
-                <a:spcPts val="300"/>
-              </a:spcAft>
-              <a:buNone/>
-            </a:pPr>
-            <a:r>
-              <a:rPr lang="en-US" sz="1300" i="1" dirty="0">
-                <a:solidFill>
-                  <a:srgbClr val="1C2833"/>
-                </a:solidFill>
-                <a:latin typeface="Georgia" pitchFamily="34" charset="0"/>
-                <a:ea typeface="Georgia" pitchFamily="34" charset="-122"/>
-                <a:cs typeface="Georgia" pitchFamily="34" charset="-120"/>
-              </a:rPr>
-              <a:t>engineering and the accountability</a:t>
-            </a:r>
-            <a:pPr algn="l" indent="0" marL="0">
-              <a:lnSpc>
-                <a:spcPts val="1820"/>
-              </a:lnSpc>
-              <a:spcBef>
-                <a:spcPts val="300"/>
-              </a:spcBef>
-              <a:spcAft>
-                <a:spcPts val="300"/>
-              </a:spcAft>
-              <a:buNone/>
-            </a:pPr>
-            <a:r>
-              <a:rPr lang="en-US" sz="1300" dirty="0">
-                <a:solidFill>
-                  <a:srgbClr val="1C2833"/>
-                </a:solidFill>
-                <a:latin typeface="Georgia" pitchFamily="34" charset="0"/>
-                <a:ea typeface="Georgia" pitchFamily="34" charset="-122"/>
-                <a:cs typeface="Georgia" pitchFamily="34" charset="-120"/>
-              </a:rPr>
-              <a:t>. Both are needed.</a:t>
-            </a:r>
-            <a:endParaRPr lang="en-US" sz="1300" dirty="0"/>
-          </a:p>
-        </p:txBody>
-      </p:sp>
-      <p:sp>
-        <p:nvSpPr>
-          <p:cNvPr id="11" name="Text 9"/>
+              <a:rPr lang="en-US" sz="1200" dirty="0">
+                <a:solidFill>
+                  <a:srgbClr val="1C2833"/>
+                </a:solidFill>
+                <a:latin typeface="Arial" pitchFamily="34" charset="0"/>
+                <a:ea typeface="Arial" pitchFamily="34" charset="-122"/>
+                <a:cs typeface="Arial" pitchFamily="34" charset="-120"/>
+              </a:rPr>
+              <a:t> sacred — or when the sacredness gets only ritual attention and not behavioural attention — you get the second photograph.</a:t>
+            </a:r>
+            <a:endParaRPr lang="en-US" sz="1200" dirty="0"/>
+          </a:p>
+        </p:txBody>
+      </p:sp>
+      <p:sp>
+        <p:nvSpPr>
+          <p:cNvPr id="7" name="Text 5"/>
           <p:cNvSpPr/>
           <p:nvPr/>
         </p:nvSpPr>
